--- a/Anfaenge_Kirche_Antike_v3.pptx
+++ b/Anfaenge_Kirche_Antike_v3.pptx
@@ -2166,7 +2166,7 @@
       </p:grpSpPr>
       <p:pic>
         <p:nvPicPr>
-          <p:cNvPr id="2" name="Image 0" descr="/home/user/uwg_raesfeld_erle_website_repo/images_v3/parthenon.jpg">    </p:cNvPr>
+          <p:cNvPr id="2" name="Image 0" descr="/home/user/uwg_raesfeld_erle_website_repo/images_v3/parthenon_real.jpg">    </p:cNvPr>
           <p:cNvPicPr>
             <a:picLocks noChangeAspect="1"/>
           </p:cNvPicPr>
@@ -2187,9 +2187,38 @@
           </a:prstGeom>
         </p:spPr>
       </p:pic>
+      <p:sp>
+        <p:nvSpPr>
+          <p:cNvPr id="3" name="Shape 0"/>
+          <p:cNvSpPr/>
+          <p:nvPr/>
+        </p:nvSpPr>
+        <p:spPr>
+          <a:xfrm>
+            <a:off x="0" y="0"/>
+            <a:ext cx="12191695" cy="6858000"/>
+          </a:xfrm>
+          <a:prstGeom prst="rect">
+            <a:avLst/>
+          </a:prstGeom>
+          <a:solidFill>
+            <a:srgbClr val="000000">
+              <a:alpha val="48000"/>
+            </a:srgbClr>
+          </a:solidFill>
+          <a:ln w="12700">
+            <a:solidFill>
+              <a:srgbClr val="000000">
+                <a:alpha val="0"/>
+              </a:srgbClr>
+            </a:solidFill>
+            <a:prstDash val="solid"/>
+          </a:ln>
+        </p:spPr>
+      </p:sp>
       <p:pic>
         <p:nvPicPr>
-          <p:cNvPr id="3" name="Image 1" descr="preencoded.png">    </p:cNvPr>
+          <p:cNvPr id="4" name="Image 1" descr="preencoded.png">    </p:cNvPr>
           <p:cNvPicPr>
             <a:picLocks noChangeAspect="1"/>
           </p:cNvPicPr>
@@ -2219,7 +2248,7 @@
       </p:pic>
       <p:pic>
         <p:nvPicPr>
-          <p:cNvPr id="4" name="Image 2" descr="preencoded.png">    </p:cNvPr>
+          <p:cNvPr id="5" name="Image 2" descr="preencoded.png">    </p:cNvPr>
           <p:cNvPicPr>
             <a:picLocks noChangeAspect="1"/>
           </p:cNvPicPr>
@@ -2249,7 +2278,7 @@
       </p:pic>
       <p:pic>
         <p:nvPicPr>
-          <p:cNvPr id="5" name="Image 3" descr="preencoded.png">    </p:cNvPr>
+          <p:cNvPr id="6" name="Image 3" descr="preencoded.png">    </p:cNvPr>
           <p:cNvPicPr>
             <a:picLocks noChangeAspect="1"/>
           </p:cNvPicPr>
@@ -2270,7 +2299,7 @@
         <p:spPr>
           <a:xfrm>
             <a:off x="274320" y="237744"/>
-            <a:ext cx="1645920" cy="246888"/>
+            <a:ext cx="2560320" cy="246888"/>
           </a:xfrm>
           <a:prstGeom prst="rect">
             <a:avLst/>
@@ -2279,7 +2308,7 @@
       </p:pic>
       <p:sp>
         <p:nvSpPr>
-          <p:cNvPr id="6" name="Text 0"/>
+          <p:cNvPr id="7" name="Text 1"/>
           <p:cNvSpPr/>
           <p:nvPr/>
         </p:nvSpPr>
@@ -2309,7 +2338,7 @@
               <a:buNone/>
             </a:pPr>
             <a:r>
-              <a:rPr lang="en-US" sz="2200" b="1" dirty="0">
+              <a:rPr lang="en-US" sz="2000" b="1" dirty="0">
                 <a:solidFill>
                   <a:srgbClr val="F5EBD8"/>
                 </a:solidFill>
@@ -2317,15 +2346,15 @@
                 <a:ea typeface="Georgia" pitchFamily="34" charset="-122"/>
                 <a:cs typeface="Georgia" pitchFamily="34" charset="-120"/>
               </a:rPr>
-              <a:t>Die Welt vor dem Christentum</a:t>
-            </a:r>
-            <a:endParaRPr lang="en-US" sz="2200" dirty="0"/>
-          </a:p>
-        </p:txBody>
-      </p:sp>
-      <p:sp>
-        <p:nvSpPr>
-          <p:cNvPr id="7" name="Text 1"/>
+              <a:t>In welcher Welt entstand das Christentum?</a:t>
+            </a:r>
+            <a:endParaRPr lang="en-US" sz="2000" dirty="0"/>
+          </a:p>
+        </p:txBody>
+      </p:sp>
+      <p:sp>
+        <p:nvSpPr>
+          <p:cNvPr id="8" name="Text 2"/>
           <p:cNvSpPr/>
           <p:nvPr/>
         </p:nvSpPr>
@@ -2367,7 +2396,7 @@
       </p:sp>
       <p:sp>
         <p:nvSpPr>
-          <p:cNvPr id="8" name="Shape 2"/>
+          <p:cNvPr id="9" name="Shape 3"/>
           <p:cNvSpPr/>
           <p:nvPr/>
         </p:nvSpPr>
@@ -2396,7 +2425,7 @@
       </p:sp>
       <p:sp>
         <p:nvSpPr>
-          <p:cNvPr id="9" name="Shape 3"/>
+          <p:cNvPr id="10" name="Shape 4"/>
           <p:cNvSpPr/>
           <p:nvPr/>
         </p:nvSpPr>
@@ -2418,7 +2447,7 @@
       </p:sp>
       <p:pic>
         <p:nvPicPr>
-          <p:cNvPr id="10" name="Image 4" descr="preencoded.png">    </p:cNvPr>
+          <p:cNvPr id="11" name="Image 4" descr="preencoded.png">    </p:cNvPr>
           <p:cNvPicPr>
             <a:picLocks noChangeAspect="1"/>
           </p:cNvPicPr>
@@ -2448,7 +2477,7 @@
       </p:pic>
       <p:sp>
         <p:nvSpPr>
-          <p:cNvPr id="11" name="Text 4"/>
+          <p:cNvPr id="12" name="Text 5"/>
           <p:cNvSpPr/>
           <p:nvPr/>
         </p:nvSpPr>
@@ -2487,7 +2516,7 @@
       </p:sp>
       <p:pic>
         <p:nvPicPr>
-          <p:cNvPr id="12" name="Image 5" descr="preencoded.png">    </p:cNvPr>
+          <p:cNvPr id="13" name="Image 5" descr="preencoded.png">    </p:cNvPr>
           <p:cNvPicPr>
             <a:picLocks noChangeAspect="1"/>
           </p:cNvPicPr>
@@ -2517,7 +2546,7 @@
       </p:pic>
       <p:sp>
         <p:nvSpPr>
-          <p:cNvPr id="13" name="Text 5"/>
+          <p:cNvPr id="14" name="Text 6"/>
           <p:cNvSpPr/>
           <p:nvPr/>
         </p:nvSpPr>
@@ -2559,7 +2588,7 @@
       </p:sp>
       <p:sp>
         <p:nvSpPr>
-          <p:cNvPr id="14" name="Shape 6"/>
+          <p:cNvPr id="15" name="Shape 7"/>
           <p:cNvSpPr/>
           <p:nvPr/>
         </p:nvSpPr>
@@ -2588,7 +2617,7 @@
       </p:sp>
       <p:sp>
         <p:nvSpPr>
-          <p:cNvPr id="15" name="Shape 7"/>
+          <p:cNvPr id="16" name="Shape 8"/>
           <p:cNvSpPr/>
           <p:nvPr/>
         </p:nvSpPr>
@@ -2610,7 +2639,7 @@
       </p:sp>
       <p:pic>
         <p:nvPicPr>
-          <p:cNvPr id="16" name="Image 6" descr="preencoded.png">    </p:cNvPr>
+          <p:cNvPr id="17" name="Image 6" descr="preencoded.png">    </p:cNvPr>
           <p:cNvPicPr>
             <a:picLocks noChangeAspect="1"/>
           </p:cNvPicPr>
@@ -2640,7 +2669,7 @@
       </p:pic>
       <p:sp>
         <p:nvSpPr>
-          <p:cNvPr id="17" name="Text 8"/>
+          <p:cNvPr id="18" name="Text 9"/>
           <p:cNvSpPr/>
           <p:nvPr/>
         </p:nvSpPr>
@@ -2679,7 +2708,7 @@
       </p:sp>
       <p:pic>
         <p:nvPicPr>
-          <p:cNvPr id="18" name="Image 7" descr="preencoded.png">    </p:cNvPr>
+          <p:cNvPr id="19" name="Image 7" descr="preencoded.png">    </p:cNvPr>
           <p:cNvPicPr>
             <a:picLocks noChangeAspect="1"/>
           </p:cNvPicPr>
@@ -2709,7 +2738,7 @@
       </p:pic>
       <p:sp>
         <p:nvSpPr>
-          <p:cNvPr id="19" name="Text 9"/>
+          <p:cNvPr id="20" name="Text 10"/>
           <p:cNvSpPr/>
           <p:nvPr/>
         </p:nvSpPr>
@@ -2751,7 +2780,7 @@
       </p:sp>
       <p:sp>
         <p:nvSpPr>
-          <p:cNvPr id="20" name="Shape 10"/>
+          <p:cNvPr id="21" name="Shape 11"/>
           <p:cNvSpPr/>
           <p:nvPr/>
         </p:nvSpPr>
@@ -2780,7 +2809,7 @@
       </p:sp>
       <p:sp>
         <p:nvSpPr>
-          <p:cNvPr id="21" name="Shape 11"/>
+          <p:cNvPr id="22" name="Shape 12"/>
           <p:cNvSpPr/>
           <p:nvPr/>
         </p:nvSpPr>
@@ -2802,7 +2831,7 @@
       </p:sp>
       <p:pic>
         <p:nvPicPr>
-          <p:cNvPr id="22" name="Image 8" descr="preencoded.png">    </p:cNvPr>
+          <p:cNvPr id="23" name="Image 8" descr="preencoded.png">    </p:cNvPr>
           <p:cNvPicPr>
             <a:picLocks noChangeAspect="1"/>
           </p:cNvPicPr>
@@ -2832,7 +2861,7 @@
       </p:pic>
       <p:sp>
         <p:nvSpPr>
-          <p:cNvPr id="23" name="Text 12"/>
+          <p:cNvPr id="24" name="Text 13"/>
           <p:cNvSpPr/>
           <p:nvPr/>
         </p:nvSpPr>
@@ -2871,7 +2900,7 @@
       </p:sp>
       <p:pic>
         <p:nvPicPr>
-          <p:cNvPr id="24" name="Image 9" descr="preencoded.png">    </p:cNvPr>
+          <p:cNvPr id="25" name="Image 9" descr="preencoded.png">    </p:cNvPr>
           <p:cNvPicPr>
             <a:picLocks noChangeAspect="1"/>
           </p:cNvPicPr>
@@ -2901,7 +2930,7 @@
       </p:pic>
       <p:sp>
         <p:nvSpPr>
-          <p:cNvPr id="25" name="Text 13"/>
+          <p:cNvPr id="26" name="Text 14"/>
           <p:cNvSpPr/>
           <p:nvPr/>
         </p:nvSpPr>
@@ -2943,7 +2972,7 @@
       </p:sp>
       <p:sp>
         <p:nvSpPr>
-          <p:cNvPr id="26" name="Shape 14"/>
+          <p:cNvPr id="27" name="Shape 15"/>
           <p:cNvSpPr/>
           <p:nvPr/>
         </p:nvSpPr>
@@ -2968,7 +2997,7 @@
       </p:sp>
       <p:sp>
         <p:nvSpPr>
-          <p:cNvPr id="27" name="Shape 15"/>
+          <p:cNvPr id="28" name="Shape 16"/>
           <p:cNvSpPr/>
           <p:nvPr/>
         </p:nvSpPr>
@@ -2997,7 +3026,7 @@
       </p:sp>
       <p:sp>
         <p:nvSpPr>
-          <p:cNvPr id="28" name="Text 16"/>
+          <p:cNvPr id="29" name="Text 17"/>
           <p:cNvSpPr/>
           <p:nvPr/>
         </p:nvSpPr>
@@ -3036,7 +3065,7 @@
       </p:sp>
       <p:sp>
         <p:nvSpPr>
-          <p:cNvPr id="29" name="Text 17"/>
+          <p:cNvPr id="30" name="Text 18"/>
           <p:cNvSpPr/>
           <p:nvPr/>
         </p:nvSpPr>
@@ -3105,7 +3134,7 @@
       </p:sp>
       <p:pic>
         <p:nvPicPr>
-          <p:cNvPr id="30" name="Image 10" descr="preencoded.png">    </p:cNvPr>
+          <p:cNvPr id="31" name="Image 10" descr="preencoded.png">    </p:cNvPr>
           <p:cNvPicPr>
             <a:picLocks noChangeAspect="1"/>
           </p:cNvPicPr>
@@ -3135,7 +3164,7 @@
       </p:pic>
       <p:sp>
         <p:nvSpPr>
-          <p:cNvPr id="31" name="Shape 18"/>
+          <p:cNvPr id="32" name="Shape 19"/>
           <p:cNvSpPr/>
           <p:nvPr/>
         </p:nvSpPr>
@@ -3164,7 +3193,7 @@
       </p:sp>
       <p:sp>
         <p:nvSpPr>
-          <p:cNvPr id="32" name="Shape 19"/>
+          <p:cNvPr id="33" name="Shape 20"/>
           <p:cNvSpPr/>
           <p:nvPr/>
         </p:nvSpPr>
@@ -3186,7 +3215,7 @@
       </p:sp>
       <p:sp>
         <p:nvSpPr>
-          <p:cNvPr id="33" name="Shape 20"/>
+          <p:cNvPr id="34" name="Shape 21"/>
           <p:cNvSpPr/>
           <p:nvPr/>
         </p:nvSpPr>
@@ -3208,7 +3237,7 @@
       </p:sp>
       <p:pic>
         <p:nvPicPr>
-          <p:cNvPr id="34" name="Image 11" descr="preencoded.png">    </p:cNvPr>
+          <p:cNvPr id="35" name="Image 11" descr="preencoded.png">    </p:cNvPr>
           <p:cNvPicPr>
             <a:picLocks noChangeAspect="1"/>
           </p:cNvPicPr>
@@ -3238,7 +3267,7 @@
       </p:pic>
       <p:sp>
         <p:nvSpPr>
-          <p:cNvPr id="35" name="Text 21"/>
+          <p:cNvPr id="36" name="Text 22"/>
           <p:cNvSpPr/>
           <p:nvPr/>
         </p:nvSpPr>
@@ -3277,7 +3306,7 @@
       </p:sp>
       <p:pic>
         <p:nvPicPr>
-          <p:cNvPr id="36" name="Image 12" descr="preencoded.png">    </p:cNvPr>
+          <p:cNvPr id="37" name="Image 12" descr="preencoded.png">    </p:cNvPr>
           <p:cNvPicPr>
             <a:picLocks noChangeAspect="1"/>
           </p:cNvPicPr>
@@ -3307,7 +3336,7 @@
       </p:pic>
       <p:sp>
         <p:nvSpPr>
-          <p:cNvPr id="37" name="Text 22"/>
+          <p:cNvPr id="38" name="Text 23"/>
           <p:cNvSpPr/>
           <p:nvPr/>
         </p:nvSpPr>
@@ -3349,7 +3378,7 @@
       </p:sp>
       <p:sp>
         <p:nvSpPr>
-          <p:cNvPr id="38" name="Shape 23"/>
+          <p:cNvPr id="39" name="Shape 24"/>
           <p:cNvSpPr/>
           <p:nvPr/>
         </p:nvSpPr>
@@ -3378,7 +3407,7 @@
       </p:sp>
       <p:sp>
         <p:nvSpPr>
-          <p:cNvPr id="39" name="Shape 24"/>
+          <p:cNvPr id="40" name="Shape 25"/>
           <p:cNvSpPr/>
           <p:nvPr/>
         </p:nvSpPr>
@@ -3400,7 +3429,7 @@
       </p:sp>
       <p:sp>
         <p:nvSpPr>
-          <p:cNvPr id="40" name="Shape 25"/>
+          <p:cNvPr id="41" name="Shape 26"/>
           <p:cNvSpPr/>
           <p:nvPr/>
         </p:nvSpPr>
@@ -3422,7 +3451,7 @@
       </p:sp>
       <p:pic>
         <p:nvPicPr>
-          <p:cNvPr id="41" name="Image 13" descr="preencoded.png">    </p:cNvPr>
+          <p:cNvPr id="42" name="Image 13" descr="preencoded.png">    </p:cNvPr>
           <p:cNvPicPr>
             <a:picLocks noChangeAspect="1"/>
           </p:cNvPicPr>
@@ -3452,7 +3481,7 @@
       </p:pic>
       <p:sp>
         <p:nvSpPr>
-          <p:cNvPr id="42" name="Text 26"/>
+          <p:cNvPr id="43" name="Text 27"/>
           <p:cNvSpPr/>
           <p:nvPr/>
         </p:nvSpPr>
@@ -3491,7 +3520,7 @@
       </p:sp>
       <p:pic>
         <p:nvPicPr>
-          <p:cNvPr id="43" name="Image 14" descr="preencoded.png">    </p:cNvPr>
+          <p:cNvPr id="44" name="Image 14" descr="preencoded.png">    </p:cNvPr>
           <p:cNvPicPr>
             <a:picLocks noChangeAspect="1"/>
           </p:cNvPicPr>
@@ -3521,7 +3550,7 @@
       </p:pic>
       <p:sp>
         <p:nvSpPr>
-          <p:cNvPr id="44" name="Text 27"/>
+          <p:cNvPr id="45" name="Text 28"/>
           <p:cNvSpPr/>
           <p:nvPr/>
         </p:nvSpPr>
@@ -3563,7 +3592,7 @@
       </p:sp>
       <p:sp>
         <p:nvSpPr>
-          <p:cNvPr id="45" name="Shape 28"/>
+          <p:cNvPr id="46" name="Shape 29"/>
           <p:cNvSpPr/>
           <p:nvPr/>
         </p:nvSpPr>
@@ -3592,7 +3621,7 @@
       </p:sp>
       <p:sp>
         <p:nvSpPr>
-          <p:cNvPr id="46" name="Shape 29"/>
+          <p:cNvPr id="47" name="Shape 30"/>
           <p:cNvSpPr/>
           <p:nvPr/>
         </p:nvSpPr>
@@ -3614,7 +3643,7 @@
       </p:sp>
       <p:sp>
         <p:nvSpPr>
-          <p:cNvPr id="47" name="Shape 30"/>
+          <p:cNvPr id="48" name="Shape 31"/>
           <p:cNvSpPr/>
           <p:nvPr/>
         </p:nvSpPr>
@@ -3636,7 +3665,7 @@
       </p:sp>
       <p:pic>
         <p:nvPicPr>
-          <p:cNvPr id="48" name="Image 15" descr="preencoded.png">    </p:cNvPr>
+          <p:cNvPr id="49" name="Image 15" descr="preencoded.png">    </p:cNvPr>
           <p:cNvPicPr>
             <a:picLocks noChangeAspect="1"/>
           </p:cNvPicPr>
@@ -3666,7 +3695,7 @@
       </p:pic>
       <p:sp>
         <p:nvSpPr>
-          <p:cNvPr id="49" name="Text 31"/>
+          <p:cNvPr id="50" name="Text 32"/>
           <p:cNvSpPr/>
           <p:nvPr/>
         </p:nvSpPr>
@@ -3705,7 +3734,7 @@
       </p:sp>
       <p:pic>
         <p:nvPicPr>
-          <p:cNvPr id="50" name="Image 16" descr="preencoded.png">    </p:cNvPr>
+          <p:cNvPr id="51" name="Image 16" descr="preencoded.png">    </p:cNvPr>
           <p:cNvPicPr>
             <a:picLocks noChangeAspect="1"/>
           </p:cNvPicPr>
@@ -3735,7 +3764,7 @@
       </p:pic>
       <p:sp>
         <p:nvSpPr>
-          <p:cNvPr id="51" name="Text 32"/>
+          <p:cNvPr id="52" name="Text 33"/>
           <p:cNvSpPr/>
           <p:nvPr/>
         </p:nvSpPr>
@@ -3777,7 +3806,7 @@
       </p:sp>
       <p:sp>
         <p:nvSpPr>
-          <p:cNvPr id="52" name="Shape 33"/>
+          <p:cNvPr id="53" name="Shape 34"/>
           <p:cNvSpPr/>
           <p:nvPr/>
         </p:nvSpPr>
@@ -3806,7 +3835,7 @@
       </p:sp>
       <p:sp>
         <p:nvSpPr>
-          <p:cNvPr id="53" name="Shape 34"/>
+          <p:cNvPr id="54" name="Shape 35"/>
           <p:cNvSpPr/>
           <p:nvPr/>
         </p:nvSpPr>
@@ -3828,7 +3857,7 @@
       </p:sp>
       <p:sp>
         <p:nvSpPr>
-          <p:cNvPr id="54" name="Shape 35"/>
+          <p:cNvPr id="55" name="Shape 36"/>
           <p:cNvSpPr/>
           <p:nvPr/>
         </p:nvSpPr>
@@ -3850,7 +3879,7 @@
       </p:sp>
       <p:pic>
         <p:nvPicPr>
-          <p:cNvPr id="55" name="Image 17" descr="preencoded.png">    </p:cNvPr>
+          <p:cNvPr id="56" name="Image 17" descr="preencoded.png">    </p:cNvPr>
           <p:cNvPicPr>
             <a:picLocks noChangeAspect="1"/>
           </p:cNvPicPr>
@@ -3880,7 +3909,7 @@
       </p:pic>
       <p:sp>
         <p:nvSpPr>
-          <p:cNvPr id="56" name="Text 36"/>
+          <p:cNvPr id="57" name="Text 37"/>
           <p:cNvSpPr/>
           <p:nvPr/>
         </p:nvSpPr>
@@ -3919,7 +3948,7 @@
       </p:sp>
       <p:pic>
         <p:nvPicPr>
-          <p:cNvPr id="57" name="Image 18" descr="preencoded.png">    </p:cNvPr>
+          <p:cNvPr id="58" name="Image 18" descr="preencoded.png">    </p:cNvPr>
           <p:cNvPicPr>
             <a:picLocks noChangeAspect="1"/>
           </p:cNvPicPr>
@@ -3949,7 +3978,7 @@
       </p:pic>
       <p:sp>
         <p:nvSpPr>
-          <p:cNvPr id="58" name="Text 37"/>
+          <p:cNvPr id="59" name="Text 38"/>
           <p:cNvSpPr/>
           <p:nvPr/>
         </p:nvSpPr>
@@ -4016,7 +4045,7 @@
       </p:grpSpPr>
       <p:pic>
         <p:nvPicPr>
-          <p:cNvPr id="2" name="Image 0" descr="/home/user/uwg_raesfeld_erle_website_repo/images_v3/catacombs.jpg">    </p:cNvPr>
+          <p:cNvPr id="2" name="Image 0" descr="/home/user/uwg_raesfeld_erle_website_repo/images_v3/ark_jesus.jpg">    </p:cNvPr>
           <p:cNvPicPr>
             <a:picLocks noChangeAspect="1"/>
           </p:cNvPicPr>
@@ -4037,9 +4066,38 @@
           </a:prstGeom>
         </p:spPr>
       </p:pic>
+      <p:sp>
+        <p:nvSpPr>
+          <p:cNvPr id="3" name="Shape 0"/>
+          <p:cNvSpPr/>
+          <p:nvPr/>
+        </p:nvSpPr>
+        <p:spPr>
+          <a:xfrm>
+            <a:off x="0" y="0"/>
+            <a:ext cx="12191695" cy="6858000"/>
+          </a:xfrm>
+          <a:prstGeom prst="rect">
+            <a:avLst/>
+          </a:prstGeom>
+          <a:solidFill>
+            <a:srgbClr val="000000">
+              <a:alpha val="50000"/>
+            </a:srgbClr>
+          </a:solidFill>
+          <a:ln w="12700">
+            <a:solidFill>
+              <a:srgbClr val="000000">
+                <a:alpha val="0"/>
+              </a:srgbClr>
+            </a:solidFill>
+            <a:prstDash val="solid"/>
+          </a:ln>
+        </p:spPr>
+      </p:sp>
       <p:pic>
         <p:nvPicPr>
-          <p:cNvPr id="3" name="Image 1" descr="preencoded.png">    </p:cNvPr>
+          <p:cNvPr id="4" name="Image 1" descr="preencoded.png">    </p:cNvPr>
           <p:cNvPicPr>
             <a:picLocks noChangeAspect="1"/>
           </p:cNvPicPr>
@@ -4069,7 +4127,7 @@
       </p:pic>
       <p:pic>
         <p:nvPicPr>
-          <p:cNvPr id="4" name="Image 2" descr="preencoded.png">    </p:cNvPr>
+          <p:cNvPr id="5" name="Image 2" descr="preencoded.png">    </p:cNvPr>
           <p:cNvPicPr>
             <a:picLocks noChangeAspect="1"/>
           </p:cNvPicPr>
@@ -4099,7 +4157,7 @@
       </p:pic>
       <p:pic>
         <p:nvPicPr>
-          <p:cNvPr id="5" name="Image 3" descr="preencoded.png">    </p:cNvPr>
+          <p:cNvPr id="6" name="Image 3" descr="preencoded.png">    </p:cNvPr>
           <p:cNvPicPr>
             <a:picLocks noChangeAspect="1"/>
           </p:cNvPicPr>
@@ -4120,7 +4178,7 @@
         <p:spPr>
           <a:xfrm>
             <a:off x="274320" y="256032"/>
-            <a:ext cx="1463040" cy="246888"/>
+            <a:ext cx="2011680" cy="246888"/>
           </a:xfrm>
           <a:prstGeom prst="rect">
             <a:avLst/>
@@ -4129,7 +4187,7 @@
       </p:pic>
       <p:sp>
         <p:nvSpPr>
-          <p:cNvPr id="6" name="Text 0"/>
+          <p:cNvPr id="7" name="Text 1"/>
           <p:cNvSpPr/>
           <p:nvPr/>
         </p:nvSpPr>
@@ -4175,7 +4233,7 @@
       </p:sp>
       <p:sp>
         <p:nvSpPr>
-          <p:cNvPr id="7" name="Text 1"/>
+          <p:cNvPr id="8" name="Text 2"/>
           <p:cNvSpPr/>
           <p:nvPr/>
         </p:nvSpPr>
@@ -4255,7 +4313,7 @@
       </p:sp>
       <p:pic>
         <p:nvPicPr>
-          <p:cNvPr id="8" name="Image 4" descr="preencoded.png">    </p:cNvPr>
+          <p:cNvPr id="9" name="Image 4" descr="preencoded.png">    </p:cNvPr>
           <p:cNvPicPr>
             <a:picLocks noChangeAspect="1"/>
           </p:cNvPicPr>
@@ -4285,7 +4343,7 @@
       </p:pic>
       <p:sp>
         <p:nvSpPr>
-          <p:cNvPr id="9" name="Text 2"/>
+          <p:cNvPr id="10" name="Text 3"/>
           <p:cNvSpPr/>
           <p:nvPr/>
         </p:nvSpPr>
@@ -4347,7 +4405,7 @@
       </p:sp>
       <p:sp>
         <p:nvSpPr>
-          <p:cNvPr id="10" name="Shape 3"/>
+          <p:cNvPr id="11" name="Shape 4"/>
           <p:cNvSpPr/>
           <p:nvPr/>
         </p:nvSpPr>
@@ -4376,7 +4434,7 @@
       </p:sp>
       <p:sp>
         <p:nvSpPr>
-          <p:cNvPr id="11" name="Shape 4"/>
+          <p:cNvPr id="12" name="Shape 5"/>
           <p:cNvSpPr/>
           <p:nvPr/>
         </p:nvSpPr>
@@ -4398,7 +4456,7 @@
       </p:sp>
       <p:sp>
         <p:nvSpPr>
-          <p:cNvPr id="12" name="Text 5"/>
+          <p:cNvPr id="13" name="Text 6"/>
           <p:cNvSpPr/>
           <p:nvPr/>
         </p:nvSpPr>
@@ -4437,7 +4495,7 @@
       </p:sp>
       <p:sp>
         <p:nvSpPr>
-          <p:cNvPr id="13" name="Text 6"/>
+          <p:cNvPr id="14" name="Text 7"/>
           <p:cNvSpPr/>
           <p:nvPr/>
         </p:nvSpPr>
@@ -4479,7 +4537,7 @@
       </p:sp>
       <p:sp>
         <p:nvSpPr>
-          <p:cNvPr id="14" name="Text 7"/>
+          <p:cNvPr id="15" name="Text 8"/>
           <p:cNvSpPr/>
           <p:nvPr/>
         </p:nvSpPr>
@@ -4518,7 +4576,7 @@
       </p:sp>
       <p:sp>
         <p:nvSpPr>
-          <p:cNvPr id="15" name="Shape 8"/>
+          <p:cNvPr id="16" name="Shape 9"/>
           <p:cNvSpPr/>
           <p:nvPr/>
         </p:nvSpPr>
@@ -4547,7 +4605,7 @@
       </p:sp>
       <p:sp>
         <p:nvSpPr>
-          <p:cNvPr id="16" name="Shape 9"/>
+          <p:cNvPr id="17" name="Shape 10"/>
           <p:cNvSpPr/>
           <p:nvPr/>
         </p:nvSpPr>
@@ -4569,7 +4627,7 @@
       </p:sp>
       <p:sp>
         <p:nvSpPr>
-          <p:cNvPr id="17" name="Text 10"/>
+          <p:cNvPr id="18" name="Text 11"/>
           <p:cNvSpPr/>
           <p:nvPr/>
         </p:nvSpPr>
@@ -4608,7 +4666,7 @@
       </p:sp>
       <p:pic>
         <p:nvPicPr>
-          <p:cNvPr id="18" name="Image 5" descr="preencoded.png">    </p:cNvPr>
+          <p:cNvPr id="19" name="Image 5" descr="preencoded.png">    </p:cNvPr>
           <p:cNvPicPr>
             <a:picLocks noChangeAspect="1"/>
           </p:cNvPicPr>
@@ -4638,7 +4696,7 @@
       </p:pic>
       <p:sp>
         <p:nvSpPr>
-          <p:cNvPr id="19" name="Text 11"/>
+          <p:cNvPr id="20" name="Text 12"/>
           <p:cNvSpPr/>
           <p:nvPr/>
         </p:nvSpPr>
@@ -4680,7 +4738,7 @@
       </p:sp>
       <p:sp>
         <p:nvSpPr>
-          <p:cNvPr id="20" name="Shape 12"/>
+          <p:cNvPr id="21" name="Shape 13"/>
           <p:cNvSpPr/>
           <p:nvPr/>
         </p:nvSpPr>
@@ -4709,7 +4767,7 @@
       </p:sp>
       <p:sp>
         <p:nvSpPr>
-          <p:cNvPr id="21" name="Shape 13"/>
+          <p:cNvPr id="22" name="Shape 14"/>
           <p:cNvSpPr/>
           <p:nvPr/>
         </p:nvSpPr>
@@ -4731,7 +4789,7 @@
       </p:sp>
       <p:sp>
         <p:nvSpPr>
-          <p:cNvPr id="22" name="Text 14"/>
+          <p:cNvPr id="23" name="Text 15"/>
           <p:cNvSpPr/>
           <p:nvPr/>
         </p:nvSpPr>
@@ -4770,7 +4828,7 @@
       </p:sp>
       <p:pic>
         <p:nvPicPr>
-          <p:cNvPr id="23" name="Image 6" descr="preencoded.png">    </p:cNvPr>
+          <p:cNvPr id="24" name="Image 6" descr="preencoded.png">    </p:cNvPr>
           <p:cNvPicPr>
             <a:picLocks noChangeAspect="1"/>
           </p:cNvPicPr>
@@ -4800,7 +4858,7 @@
       </p:pic>
       <p:sp>
         <p:nvSpPr>
-          <p:cNvPr id="24" name="Text 15"/>
+          <p:cNvPr id="25" name="Text 16"/>
           <p:cNvSpPr/>
           <p:nvPr/>
         </p:nvSpPr>
@@ -4842,7 +4900,7 @@
       </p:sp>
       <p:sp>
         <p:nvSpPr>
-          <p:cNvPr id="25" name="Shape 16"/>
+          <p:cNvPr id="26" name="Shape 17"/>
           <p:cNvSpPr/>
           <p:nvPr/>
         </p:nvSpPr>
@@ -4871,7 +4929,7 @@
       </p:sp>
       <p:sp>
         <p:nvSpPr>
-          <p:cNvPr id="26" name="Shape 17"/>
+          <p:cNvPr id="27" name="Shape 18"/>
           <p:cNvSpPr/>
           <p:nvPr/>
         </p:nvSpPr>
@@ -4893,7 +4951,7 @@
       </p:sp>
       <p:sp>
         <p:nvSpPr>
-          <p:cNvPr id="27" name="Text 18"/>
+          <p:cNvPr id="28" name="Text 19"/>
           <p:cNvSpPr/>
           <p:nvPr/>
         </p:nvSpPr>
@@ -4932,7 +4990,7 @@
       </p:sp>
       <p:pic>
         <p:nvPicPr>
-          <p:cNvPr id="28" name="Image 7" descr="preencoded.png">    </p:cNvPr>
+          <p:cNvPr id="29" name="Image 7" descr="preencoded.png">    </p:cNvPr>
           <p:cNvPicPr>
             <a:picLocks noChangeAspect="1"/>
           </p:cNvPicPr>
@@ -4962,7 +5020,7 @@
       </p:pic>
       <p:sp>
         <p:nvSpPr>
-          <p:cNvPr id="29" name="Text 19"/>
+          <p:cNvPr id="30" name="Text 20"/>
           <p:cNvSpPr/>
           <p:nvPr/>
         </p:nvSpPr>
@@ -5004,7 +5062,7 @@
       </p:sp>
       <p:sp>
         <p:nvSpPr>
-          <p:cNvPr id="30" name="Shape 20"/>
+          <p:cNvPr id="31" name="Shape 21"/>
           <p:cNvSpPr/>
           <p:nvPr/>
         </p:nvSpPr>
@@ -5033,7 +5091,7 @@
       </p:sp>
       <p:sp>
         <p:nvSpPr>
-          <p:cNvPr id="31" name="Shape 21"/>
+          <p:cNvPr id="32" name="Shape 22"/>
           <p:cNvSpPr/>
           <p:nvPr/>
         </p:nvSpPr>
@@ -5055,7 +5113,7 @@
       </p:sp>
       <p:sp>
         <p:nvSpPr>
-          <p:cNvPr id="32" name="Text 22"/>
+          <p:cNvPr id="33" name="Text 23"/>
           <p:cNvSpPr/>
           <p:nvPr/>
         </p:nvSpPr>
@@ -5094,7 +5152,7 @@
       </p:sp>
       <p:pic>
         <p:nvPicPr>
-          <p:cNvPr id="33" name="Image 8" descr="preencoded.png">    </p:cNvPr>
+          <p:cNvPr id="34" name="Image 8" descr="preencoded.png">    </p:cNvPr>
           <p:cNvPicPr>
             <a:picLocks noChangeAspect="1"/>
           </p:cNvPicPr>
@@ -5124,7 +5182,7 @@
       </p:pic>
       <p:sp>
         <p:nvSpPr>
-          <p:cNvPr id="34" name="Text 23"/>
+          <p:cNvPr id="35" name="Text 24"/>
           <p:cNvSpPr/>
           <p:nvPr/>
         </p:nvSpPr>
@@ -5295,7 +5353,7 @@
         <p:spPr>
           <a:xfrm>
             <a:off x="274320" y="256032"/>
-            <a:ext cx="1463040" cy="246888"/>
+            <a:ext cx="2194560" cy="246888"/>
           </a:xfrm>
           <a:prstGeom prst="rect">
             <a:avLst/>
@@ -5656,7 +5714,7 @@
               <a:buNone/>
             </a:pPr>
             <a:r>
-              <a:rPr lang="en-US" sz="1000" b="1" spc="250" kern="0" dirty="0">
+              <a:rPr lang="en-US" sz="1000" b="1" spc="150" kern="0" dirty="0">
                 <a:solidFill>
                   <a:srgbClr val="C8820A"/>
                 </a:solidFill>
@@ -5664,7 +5722,7 @@
                 <a:ea typeface="Calibri" pitchFamily="34" charset="-122"/>
                 <a:cs typeface="Calibri" pitchFamily="34" charset="-120"/>
               </a:rPr>
-              <a:t>SEINE STATIONEN</a:t>
+              <a:t>PAULUS’ MISSIONSSTATIONEN (45–67 n. Chr.)</a:t>
             </a:r>
             <a:endParaRPr lang="en-US" sz="1000" dirty="0"/>
           </a:p>
@@ -6344,7 +6402,7 @@
       </p:grpSpPr>
       <p:pic>
         <p:nvPicPr>
-          <p:cNvPr id="2" name="Image 0" descr="/home/user/uwg_raesfeld_erle_website_repo/images_v3/colosseum.jpg">    </p:cNvPr>
+          <p:cNvPr id="2" name="Image 0" descr="/home/user/uwg_raesfeld_erle_website_repo/images_v3/forest_persecution.jpg">    </p:cNvPr>
           <p:cNvPicPr>
             <a:picLocks noChangeAspect="1"/>
           </p:cNvPicPr>
@@ -6365,9 +6423,38 @@
           </a:prstGeom>
         </p:spPr>
       </p:pic>
+      <p:sp>
+        <p:nvSpPr>
+          <p:cNvPr id="3" name="Shape 0"/>
+          <p:cNvSpPr/>
+          <p:nvPr/>
+        </p:nvSpPr>
+        <p:spPr>
+          <a:xfrm>
+            <a:off x="0" y="0"/>
+            <a:ext cx="12191695" cy="6858000"/>
+          </a:xfrm>
+          <a:prstGeom prst="rect">
+            <a:avLst/>
+          </a:prstGeom>
+          <a:solidFill>
+            <a:srgbClr val="000000">
+              <a:alpha val="45000"/>
+            </a:srgbClr>
+          </a:solidFill>
+          <a:ln w="12700">
+            <a:solidFill>
+              <a:srgbClr val="000000">
+                <a:alpha val="0"/>
+              </a:srgbClr>
+            </a:solidFill>
+            <a:prstDash val="solid"/>
+          </a:ln>
+        </p:spPr>
+      </p:sp>
       <p:pic>
         <p:nvPicPr>
-          <p:cNvPr id="3" name="Image 1" descr="preencoded.png">    </p:cNvPr>
+          <p:cNvPr id="4" name="Image 1" descr="preencoded.png">    </p:cNvPr>
           <p:cNvPicPr>
             <a:picLocks noChangeAspect="1"/>
           </p:cNvPicPr>
@@ -6397,7 +6484,7 @@
       </p:pic>
       <p:pic>
         <p:nvPicPr>
-          <p:cNvPr id="4" name="Image 2" descr="preencoded.png">    </p:cNvPr>
+          <p:cNvPr id="5" name="Image 2" descr="preencoded.png">    </p:cNvPr>
           <p:cNvPicPr>
             <a:picLocks noChangeAspect="1"/>
           </p:cNvPicPr>
@@ -6427,7 +6514,7 @@
       </p:pic>
       <p:pic>
         <p:nvPicPr>
-          <p:cNvPr id="5" name="Image 3" descr="preencoded.png">    </p:cNvPr>
+          <p:cNvPr id="6" name="Image 3" descr="preencoded.png">    </p:cNvPr>
           <p:cNvPicPr>
             <a:picLocks noChangeAspect="1"/>
           </p:cNvPicPr>
@@ -6447,8 +6534,8 @@
         </p:blipFill>
         <p:spPr>
           <a:xfrm>
-            <a:off x="4998568" y="256032"/>
-            <a:ext cx="2194560" cy="246888"/>
+            <a:off x="4449928" y="256032"/>
+            <a:ext cx="3291840" cy="246888"/>
           </a:xfrm>
           <a:prstGeom prst="rect">
             <a:avLst/>
@@ -6457,7 +6544,7 @@
       </p:pic>
       <p:sp>
         <p:nvSpPr>
-          <p:cNvPr id="6" name="Text 0"/>
+          <p:cNvPr id="7" name="Text 1"/>
           <p:cNvSpPr/>
           <p:nvPr/>
         </p:nvSpPr>
@@ -6520,7 +6607,7 @@
       </p:sp>
       <p:pic>
         <p:nvPicPr>
-          <p:cNvPr id="7" name="Image 4" descr="preencoded.png">    </p:cNvPr>
+          <p:cNvPr id="8" name="Image 4" descr="preencoded.png">    </p:cNvPr>
           <p:cNvPicPr>
             <a:picLocks noChangeAspect="1"/>
           </p:cNvPicPr>
@@ -6550,7 +6637,7 @@
       </p:pic>
       <p:sp>
         <p:nvSpPr>
-          <p:cNvPr id="8" name="Text 1"/>
+          <p:cNvPr id="9" name="Text 2"/>
           <p:cNvSpPr/>
           <p:nvPr/>
         </p:nvSpPr>
@@ -6612,7 +6699,7 @@
       </p:sp>
       <p:sp>
         <p:nvSpPr>
-          <p:cNvPr id="9" name="Shape 2"/>
+          <p:cNvPr id="10" name="Shape 3"/>
           <p:cNvSpPr/>
           <p:nvPr/>
         </p:nvSpPr>
@@ -6648,7 +6735,7 @@
       </p:sp>
       <p:sp>
         <p:nvSpPr>
-          <p:cNvPr id="10" name="Shape 3"/>
+          <p:cNvPr id="11" name="Shape 4"/>
           <p:cNvSpPr/>
           <p:nvPr/>
         </p:nvSpPr>
@@ -6670,7 +6757,7 @@
       </p:sp>
       <p:sp>
         <p:nvSpPr>
-          <p:cNvPr id="11" name="Shape 4"/>
+          <p:cNvPr id="12" name="Shape 5"/>
           <p:cNvSpPr/>
           <p:nvPr/>
         </p:nvSpPr>
@@ -6692,7 +6779,7 @@
       </p:sp>
       <p:sp>
         <p:nvSpPr>
-          <p:cNvPr id="12" name="Text 5"/>
+          <p:cNvPr id="13" name="Text 6"/>
           <p:cNvSpPr/>
           <p:nvPr/>
         </p:nvSpPr>
@@ -6738,7 +6825,7 @@
       </p:sp>
       <p:sp>
         <p:nvSpPr>
-          <p:cNvPr id="13" name="Text 6"/>
+          <p:cNvPr id="14" name="Text 7"/>
           <p:cNvSpPr/>
           <p:nvPr/>
         </p:nvSpPr>
@@ -6777,7 +6864,7 @@
       </p:sp>
       <p:sp>
         <p:nvSpPr>
-          <p:cNvPr id="14" name="Text 7"/>
+          <p:cNvPr id="15" name="Text 8"/>
           <p:cNvSpPr/>
           <p:nvPr/>
         </p:nvSpPr>
@@ -6816,7 +6903,7 @@
       </p:sp>
       <p:pic>
         <p:nvPicPr>
-          <p:cNvPr id="15" name="Image 5" descr="preencoded.png">    </p:cNvPr>
+          <p:cNvPr id="16" name="Image 5" descr="preencoded.png">    </p:cNvPr>
           <p:cNvPicPr>
             <a:picLocks noChangeAspect="1"/>
           </p:cNvPicPr>
@@ -6846,7 +6933,7 @@
       </p:pic>
       <p:sp>
         <p:nvSpPr>
-          <p:cNvPr id="16" name="Text 8"/>
+          <p:cNvPr id="17" name="Text 9"/>
           <p:cNvSpPr/>
           <p:nvPr/>
         </p:nvSpPr>
@@ -6888,7 +6975,7 @@
       </p:sp>
       <p:sp>
         <p:nvSpPr>
-          <p:cNvPr id="17" name="Shape 9"/>
+          <p:cNvPr id="18" name="Shape 10"/>
           <p:cNvSpPr/>
           <p:nvPr/>
         </p:nvSpPr>
@@ -6924,7 +7011,7 @@
       </p:sp>
       <p:sp>
         <p:nvSpPr>
-          <p:cNvPr id="18" name="Shape 10"/>
+          <p:cNvPr id="19" name="Shape 11"/>
           <p:cNvSpPr/>
           <p:nvPr/>
         </p:nvSpPr>
@@ -6946,7 +7033,7 @@
       </p:sp>
       <p:sp>
         <p:nvSpPr>
-          <p:cNvPr id="19" name="Shape 11"/>
+          <p:cNvPr id="20" name="Shape 12"/>
           <p:cNvSpPr/>
           <p:nvPr/>
         </p:nvSpPr>
@@ -6968,7 +7055,7 @@
       </p:sp>
       <p:sp>
         <p:nvSpPr>
-          <p:cNvPr id="20" name="Text 12"/>
+          <p:cNvPr id="21" name="Text 13"/>
           <p:cNvSpPr/>
           <p:nvPr/>
         </p:nvSpPr>
@@ -7014,7 +7101,7 @@
       </p:sp>
       <p:sp>
         <p:nvSpPr>
-          <p:cNvPr id="21" name="Text 13"/>
+          <p:cNvPr id="22" name="Text 14"/>
           <p:cNvSpPr/>
           <p:nvPr/>
         </p:nvSpPr>
@@ -7053,7 +7140,7 @@
       </p:sp>
       <p:sp>
         <p:nvSpPr>
-          <p:cNvPr id="22" name="Text 14"/>
+          <p:cNvPr id="23" name="Text 15"/>
           <p:cNvSpPr/>
           <p:nvPr/>
         </p:nvSpPr>
@@ -7092,7 +7179,7 @@
       </p:sp>
       <p:pic>
         <p:nvPicPr>
-          <p:cNvPr id="23" name="Image 6" descr="preencoded.png">    </p:cNvPr>
+          <p:cNvPr id="24" name="Image 6" descr="preencoded.png">    </p:cNvPr>
           <p:cNvPicPr>
             <a:picLocks noChangeAspect="1"/>
           </p:cNvPicPr>
@@ -7122,7 +7209,7 @@
       </p:pic>
       <p:sp>
         <p:nvSpPr>
-          <p:cNvPr id="24" name="Text 15"/>
+          <p:cNvPr id="25" name="Text 16"/>
           <p:cNvSpPr/>
           <p:nvPr/>
         </p:nvSpPr>
@@ -7164,7 +7251,7 @@
       </p:sp>
       <p:sp>
         <p:nvSpPr>
-          <p:cNvPr id="25" name="Shape 16"/>
+          <p:cNvPr id="26" name="Shape 17"/>
           <p:cNvSpPr/>
           <p:nvPr/>
         </p:nvSpPr>
@@ -7200,7 +7287,7 @@
       </p:sp>
       <p:sp>
         <p:nvSpPr>
-          <p:cNvPr id="26" name="Shape 17"/>
+          <p:cNvPr id="27" name="Shape 18"/>
           <p:cNvSpPr/>
           <p:nvPr/>
         </p:nvSpPr>
@@ -7222,7 +7309,7 @@
       </p:sp>
       <p:sp>
         <p:nvSpPr>
-          <p:cNvPr id="27" name="Shape 18"/>
+          <p:cNvPr id="28" name="Shape 19"/>
           <p:cNvSpPr/>
           <p:nvPr/>
         </p:nvSpPr>
@@ -7244,7 +7331,7 @@
       </p:sp>
       <p:sp>
         <p:nvSpPr>
-          <p:cNvPr id="28" name="Text 19"/>
+          <p:cNvPr id="29" name="Text 20"/>
           <p:cNvSpPr/>
           <p:nvPr/>
         </p:nvSpPr>
@@ -7290,7 +7377,7 @@
       </p:sp>
       <p:sp>
         <p:nvSpPr>
-          <p:cNvPr id="29" name="Text 20"/>
+          <p:cNvPr id="30" name="Text 21"/>
           <p:cNvSpPr/>
           <p:nvPr/>
         </p:nvSpPr>
@@ -7329,7 +7416,7 @@
       </p:sp>
       <p:sp>
         <p:nvSpPr>
-          <p:cNvPr id="30" name="Text 21"/>
+          <p:cNvPr id="31" name="Text 22"/>
           <p:cNvSpPr/>
           <p:nvPr/>
         </p:nvSpPr>
@@ -7368,7 +7455,7 @@
       </p:sp>
       <p:pic>
         <p:nvPicPr>
-          <p:cNvPr id="31" name="Image 7" descr="preencoded.png">    </p:cNvPr>
+          <p:cNvPr id="32" name="Image 7" descr="preencoded.png">    </p:cNvPr>
           <p:cNvPicPr>
             <a:picLocks noChangeAspect="1"/>
           </p:cNvPicPr>
@@ -7398,7 +7485,7 @@
       </p:pic>
       <p:sp>
         <p:nvSpPr>
-          <p:cNvPr id="32" name="Text 22"/>
+          <p:cNvPr id="33" name="Text 23"/>
           <p:cNvSpPr/>
           <p:nvPr/>
         </p:nvSpPr>
@@ -7440,7 +7527,7 @@
       </p:sp>
       <p:sp>
         <p:nvSpPr>
-          <p:cNvPr id="33" name="Text 23"/>
+          <p:cNvPr id="34" name="Text 24"/>
           <p:cNvSpPr/>
           <p:nvPr/>
         </p:nvSpPr>
@@ -7615,7 +7702,7 @@
         <p:spPr>
           <a:xfrm>
             <a:off x="274320" y="256032"/>
-            <a:ext cx="1645920" cy="246888"/>
+            <a:ext cx="2560320" cy="246888"/>
           </a:xfrm>
           <a:prstGeom prst="rect">
             <a:avLst/>
@@ -7921,7 +8008,7 @@
               <a:buNone/>
             </a:pPr>
             <a:r>
-              <a:rPr lang="en-US" sz="1000" b="1" spc="250" kern="0" dirty="0">
+              <a:rPr lang="en-US" sz="1000" b="1" spc="150" kern="0" dirty="0">
                 <a:solidFill>
                   <a:srgbClr val="C8820A"/>
                 </a:solidFill>
@@ -7929,7 +8016,7 @@
                 <a:ea typeface="Calibri" pitchFamily="34" charset="-122"/>
                 <a:cs typeface="Calibri" pitchFamily="34" charset="-120"/>
               </a:rPr>
-              <a:t>DIE DREI MEILENSTEINE</a:t>
+              <a:t>DREI SCHLÜSSELEREIGNISSE (312–325)</a:t>
             </a:r>
             <a:endParaRPr lang="en-US" sz="1000" dirty="0"/>
           </a:p>
@@ -8780,7 +8867,7 @@
         <p:spPr>
           <a:xfrm>
             <a:off x="274320" y="256032"/>
-            <a:ext cx="1645920" cy="246888"/>
+            <a:ext cx="2560320" cy="246888"/>
           </a:xfrm>
           <a:prstGeom prst="rect">
             <a:avLst/>
@@ -9125,7 +9212,7 @@
               <a:buNone/>
             </a:pPr>
             <a:r>
-              <a:rPr lang="en-US" sz="1000" b="1" spc="250" kern="0" dirty="0">
+              <a:rPr lang="en-US" sz="1000" b="1" spc="150" kern="0" dirty="0">
                 <a:solidFill>
                   <a:srgbClr val="C8820A"/>
                 </a:solidFill>
@@ -9133,7 +9220,7 @@
                 <a:ea typeface="Calibri" pitchFamily="34" charset="-122"/>
                 <a:cs typeface="Calibri" pitchFamily="34" charset="-120"/>
               </a:rPr>
-              <a:t>DIE CHRONOLOGIE DER WENDE</a:t>
+              <a:t>CHRONOLOGIE DER MACHTWENDE (313–529)</a:t>
             </a:r>
             <a:endParaRPr lang="en-US" sz="1000" dirty="0"/>
           </a:p>
@@ -10184,8 +10271,8 @@
         </p:blipFill>
         <p:spPr>
           <a:xfrm>
-            <a:off x="4084168" y="228600"/>
-            <a:ext cx="4023360" cy="246888"/>
+            <a:off x="3718408" y="228600"/>
+            <a:ext cx="4754880" cy="246888"/>
           </a:xfrm>
           <a:prstGeom prst="rect">
             <a:avLst/>

--- a/Anfaenge_Kirche_Antike_v3.pptx
+++ b/Anfaenge_Kirche_Antike_v3.pptx
@@ -5249,7 +5249,7 @@
       </p:grpSpPr>
       <p:pic>
         <p:nvPicPr>
-          <p:cNvPr id="2" name="Image 0" descr="/home/user/uwg_raesfeld_erle_website_repo/images_v3/ostia.jpg">    </p:cNvPr>
+          <p:cNvPr id="2" name="Image 0" descr="/home/user/uwg_raesfeld_erle_website_repo/images_v3/desert_paulus.jpg">    </p:cNvPr>
           <p:cNvPicPr>
             <a:picLocks noChangeAspect="1"/>
           </p:cNvPicPr>
@@ -5270,9 +5270,38 @@
           </a:prstGeom>
         </p:spPr>
       </p:pic>
+      <p:sp>
+        <p:nvSpPr>
+          <p:cNvPr id="3" name="Shape 0"/>
+          <p:cNvSpPr/>
+          <p:nvPr/>
+        </p:nvSpPr>
+        <p:spPr>
+          <a:xfrm>
+            <a:off x="0" y="0"/>
+            <a:ext cx="12191695" cy="6858000"/>
+          </a:xfrm>
+          <a:prstGeom prst="rect">
+            <a:avLst/>
+          </a:prstGeom>
+          <a:solidFill>
+            <a:srgbClr val="000000">
+              <a:alpha val="45000"/>
+            </a:srgbClr>
+          </a:solidFill>
+          <a:ln w="12700">
+            <a:solidFill>
+              <a:srgbClr val="000000">
+                <a:alpha val="0"/>
+              </a:srgbClr>
+            </a:solidFill>
+            <a:prstDash val="solid"/>
+          </a:ln>
+        </p:spPr>
+      </p:sp>
       <p:pic>
         <p:nvPicPr>
-          <p:cNvPr id="3" name="Image 1" descr="preencoded.png">    </p:cNvPr>
+          <p:cNvPr id="4" name="Image 1" descr="preencoded.png">    </p:cNvPr>
           <p:cNvPicPr>
             <a:picLocks noChangeAspect="1"/>
           </p:cNvPicPr>
@@ -5302,7 +5331,7 @@
       </p:pic>
       <p:pic>
         <p:nvPicPr>
-          <p:cNvPr id="4" name="Image 2" descr="preencoded.png">    </p:cNvPr>
+          <p:cNvPr id="5" name="Image 2" descr="preencoded.png">    </p:cNvPr>
           <p:cNvPicPr>
             <a:picLocks noChangeAspect="1"/>
           </p:cNvPicPr>
@@ -5332,7 +5361,7 @@
       </p:pic>
       <p:pic>
         <p:nvPicPr>
-          <p:cNvPr id="5" name="Image 3" descr="preencoded.png">    </p:cNvPr>
+          <p:cNvPr id="6" name="Image 3" descr="preencoded.png">    </p:cNvPr>
           <p:cNvPicPr>
             <a:picLocks noChangeAspect="1"/>
           </p:cNvPicPr>
@@ -5362,7 +5391,7 @@
       </p:pic>
       <p:sp>
         <p:nvSpPr>
-          <p:cNvPr id="6" name="Text 0"/>
+          <p:cNvPr id="7" name="Text 1"/>
           <p:cNvSpPr/>
           <p:nvPr/>
         </p:nvSpPr>
@@ -5408,7 +5437,7 @@
       </p:sp>
       <p:pic>
         <p:nvPicPr>
-          <p:cNvPr id="7" name="Image 4" descr="preencoded.png">    </p:cNvPr>
+          <p:cNvPr id="8" name="Image 4" descr="preencoded.png">    </p:cNvPr>
           <p:cNvPicPr>
             <a:picLocks noChangeAspect="1"/>
           </p:cNvPicPr>
@@ -5438,7 +5467,7 @@
       </p:pic>
       <p:sp>
         <p:nvSpPr>
-          <p:cNvPr id="8" name="Text 1"/>
+          <p:cNvPr id="9" name="Text 2"/>
           <p:cNvSpPr/>
           <p:nvPr/>
         </p:nvSpPr>
@@ -5480,7 +5509,7 @@
       </p:sp>
       <p:sp>
         <p:nvSpPr>
-          <p:cNvPr id="9" name="Text 2"/>
+          <p:cNvPr id="10" name="Text 3"/>
           <p:cNvSpPr/>
           <p:nvPr/>
         </p:nvSpPr>
@@ -5519,7 +5548,7 @@
       </p:sp>
       <p:sp>
         <p:nvSpPr>
-          <p:cNvPr id="10" name="Shape 3"/>
+          <p:cNvPr id="11" name="Shape 4"/>
           <p:cNvSpPr/>
           <p:nvPr/>
         </p:nvSpPr>
@@ -5548,7 +5577,7 @@
       </p:sp>
       <p:sp>
         <p:nvSpPr>
-          <p:cNvPr id="11" name="Shape 4"/>
+          <p:cNvPr id="12" name="Shape 5"/>
           <p:cNvSpPr/>
           <p:nvPr/>
         </p:nvSpPr>
@@ -5570,7 +5599,7 @@
       </p:sp>
       <p:sp>
         <p:nvSpPr>
-          <p:cNvPr id="12" name="Text 5"/>
+          <p:cNvPr id="13" name="Text 6"/>
           <p:cNvSpPr/>
           <p:nvPr/>
         </p:nvSpPr>
@@ -5609,7 +5638,7 @@
       </p:sp>
       <p:sp>
         <p:nvSpPr>
-          <p:cNvPr id="13" name="Text 6"/>
+          <p:cNvPr id="14" name="Text 7"/>
           <p:cNvSpPr/>
           <p:nvPr/>
         </p:nvSpPr>
@@ -5691,7 +5720,7 @@
       </p:sp>
       <p:sp>
         <p:nvSpPr>
-          <p:cNvPr id="14" name="Text 7"/>
+          <p:cNvPr id="15" name="Text 8"/>
           <p:cNvSpPr/>
           <p:nvPr/>
         </p:nvSpPr>
@@ -5730,7 +5759,7 @@
       </p:sp>
       <p:pic>
         <p:nvPicPr>
-          <p:cNvPr id="15" name="Image 5" descr="preencoded.png">    </p:cNvPr>
+          <p:cNvPr id="16" name="Image 5" descr="preencoded.png">    </p:cNvPr>
           <p:cNvPicPr>
             <a:picLocks noChangeAspect="1"/>
           </p:cNvPicPr>
@@ -5760,7 +5789,7 @@
       </p:pic>
       <p:sp>
         <p:nvSpPr>
-          <p:cNvPr id="16" name="Shape 8"/>
+          <p:cNvPr id="17" name="Shape 9"/>
           <p:cNvSpPr/>
           <p:nvPr/>
         </p:nvSpPr>
@@ -5783,7 +5812,7 @@
       </p:sp>
       <p:sp>
         <p:nvSpPr>
-          <p:cNvPr id="17" name="Text 9"/>
+          <p:cNvPr id="18" name="Text 10"/>
           <p:cNvSpPr/>
           <p:nvPr/>
         </p:nvSpPr>
@@ -5822,7 +5851,7 @@
       </p:sp>
       <p:sp>
         <p:nvSpPr>
-          <p:cNvPr id="18" name="Text 10"/>
+          <p:cNvPr id="19" name="Text 11"/>
           <p:cNvSpPr/>
           <p:nvPr/>
         </p:nvSpPr>
@@ -5864,7 +5893,7 @@
       </p:sp>
       <p:pic>
         <p:nvPicPr>
-          <p:cNvPr id="19" name="Image 6" descr="preencoded.png">    </p:cNvPr>
+          <p:cNvPr id="20" name="Image 6" descr="preencoded.png">    </p:cNvPr>
           <p:cNvPicPr>
             <a:picLocks noChangeAspect="1"/>
           </p:cNvPicPr>
@@ -5894,7 +5923,7 @@
       </p:pic>
       <p:sp>
         <p:nvSpPr>
-          <p:cNvPr id="20" name="Shape 11"/>
+          <p:cNvPr id="21" name="Shape 12"/>
           <p:cNvSpPr/>
           <p:nvPr/>
         </p:nvSpPr>
@@ -5917,7 +5946,7 @@
       </p:sp>
       <p:sp>
         <p:nvSpPr>
-          <p:cNvPr id="21" name="Text 12"/>
+          <p:cNvPr id="22" name="Text 13"/>
           <p:cNvSpPr/>
           <p:nvPr/>
         </p:nvSpPr>
@@ -5956,7 +5985,7 @@
       </p:sp>
       <p:sp>
         <p:nvSpPr>
-          <p:cNvPr id="22" name="Text 13"/>
+          <p:cNvPr id="23" name="Text 14"/>
           <p:cNvSpPr/>
           <p:nvPr/>
         </p:nvSpPr>
@@ -5998,7 +6027,7 @@
       </p:sp>
       <p:pic>
         <p:nvPicPr>
-          <p:cNvPr id="23" name="Image 7" descr="preencoded.png">    </p:cNvPr>
+          <p:cNvPr id="24" name="Image 7" descr="preencoded.png">    </p:cNvPr>
           <p:cNvPicPr>
             <a:picLocks noChangeAspect="1"/>
           </p:cNvPicPr>
@@ -6028,7 +6057,7 @@
       </p:pic>
       <p:sp>
         <p:nvSpPr>
-          <p:cNvPr id="24" name="Shape 14"/>
+          <p:cNvPr id="25" name="Shape 15"/>
           <p:cNvSpPr/>
           <p:nvPr/>
         </p:nvSpPr>
@@ -6051,7 +6080,7 @@
       </p:sp>
       <p:sp>
         <p:nvSpPr>
-          <p:cNvPr id="25" name="Text 15"/>
+          <p:cNvPr id="26" name="Text 16"/>
           <p:cNvSpPr/>
           <p:nvPr/>
         </p:nvSpPr>
@@ -6090,7 +6119,7 @@
       </p:sp>
       <p:sp>
         <p:nvSpPr>
-          <p:cNvPr id="26" name="Text 16"/>
+          <p:cNvPr id="27" name="Text 17"/>
           <p:cNvSpPr/>
           <p:nvPr/>
         </p:nvSpPr>
@@ -6132,7 +6161,7 @@
       </p:sp>
       <p:pic>
         <p:nvPicPr>
-          <p:cNvPr id="27" name="Image 8" descr="preencoded.png">    </p:cNvPr>
+          <p:cNvPr id="28" name="Image 8" descr="preencoded.png">    </p:cNvPr>
           <p:cNvPicPr>
             <a:picLocks noChangeAspect="1"/>
           </p:cNvPicPr>
@@ -6162,7 +6191,7 @@
       </p:pic>
       <p:sp>
         <p:nvSpPr>
-          <p:cNvPr id="28" name="Shape 17"/>
+          <p:cNvPr id="29" name="Shape 18"/>
           <p:cNvSpPr/>
           <p:nvPr/>
         </p:nvSpPr>
@@ -6185,7 +6214,7 @@
       </p:sp>
       <p:sp>
         <p:nvSpPr>
-          <p:cNvPr id="29" name="Text 18"/>
+          <p:cNvPr id="30" name="Text 19"/>
           <p:cNvSpPr/>
           <p:nvPr/>
         </p:nvSpPr>
@@ -6224,7 +6253,7 @@
       </p:sp>
       <p:sp>
         <p:nvSpPr>
-          <p:cNvPr id="30" name="Text 19"/>
+          <p:cNvPr id="31" name="Text 20"/>
           <p:cNvSpPr/>
           <p:nvPr/>
         </p:nvSpPr>
@@ -6266,7 +6295,7 @@
       </p:sp>
       <p:pic>
         <p:nvPicPr>
-          <p:cNvPr id="31" name="Image 9" descr="preencoded.png">    </p:cNvPr>
+          <p:cNvPr id="32" name="Image 9" descr="preencoded.png">    </p:cNvPr>
           <p:cNvPicPr>
             <a:picLocks noChangeAspect="1"/>
           </p:cNvPicPr>
@@ -6296,7 +6325,7 @@
       </p:pic>
       <p:sp>
         <p:nvSpPr>
-          <p:cNvPr id="32" name="Text 20"/>
+          <p:cNvPr id="33" name="Text 21"/>
           <p:cNvSpPr/>
           <p:nvPr/>
         </p:nvSpPr>
@@ -6335,7 +6364,7 @@
       </p:sp>
       <p:sp>
         <p:nvSpPr>
-          <p:cNvPr id="33" name="Text 21"/>
+          <p:cNvPr id="34" name="Text 22"/>
           <p:cNvSpPr/>
           <p:nvPr/>
         </p:nvSpPr>
@@ -7598,7 +7627,7 @@
       </p:grpSpPr>
       <p:pic>
         <p:nvPicPr>
-          <p:cNvPr id="2" name="Image 0" descr="/home/user/uwg_raesfeld_erle_website_repo/images_v3/constantine_arch.jpg">    </p:cNvPr>
+          <p:cNvPr id="2" name="Image 0" descr="/home/user/uwg_raesfeld_erle_website_repo/images_v3/colosseum_real.jpg">    </p:cNvPr>
           <p:cNvPicPr>
             <a:picLocks noChangeAspect="1"/>
           </p:cNvPicPr>
@@ -7619,9 +7648,38 @@
           </a:prstGeom>
         </p:spPr>
       </p:pic>
+      <p:sp>
+        <p:nvSpPr>
+          <p:cNvPr id="3" name="Shape 0"/>
+          <p:cNvSpPr/>
+          <p:nvPr/>
+        </p:nvSpPr>
+        <p:spPr>
+          <a:xfrm>
+            <a:off x="0" y="0"/>
+            <a:ext cx="12191695" cy="6858000"/>
+          </a:xfrm>
+          <a:prstGeom prst="rect">
+            <a:avLst/>
+          </a:prstGeom>
+          <a:solidFill>
+            <a:srgbClr val="000000">
+              <a:alpha val="48000"/>
+            </a:srgbClr>
+          </a:solidFill>
+          <a:ln w="12700">
+            <a:solidFill>
+              <a:srgbClr val="000000">
+                <a:alpha val="0"/>
+              </a:srgbClr>
+            </a:solidFill>
+            <a:prstDash val="solid"/>
+          </a:ln>
+        </p:spPr>
+      </p:sp>
       <p:pic>
         <p:nvPicPr>
-          <p:cNvPr id="3" name="Image 1" descr="preencoded.png">    </p:cNvPr>
+          <p:cNvPr id="4" name="Image 1" descr="preencoded.png">    </p:cNvPr>
           <p:cNvPicPr>
             <a:picLocks noChangeAspect="1"/>
           </p:cNvPicPr>
@@ -7651,7 +7709,7 @@
       </p:pic>
       <p:pic>
         <p:nvPicPr>
-          <p:cNvPr id="4" name="Image 2" descr="preencoded.png">    </p:cNvPr>
+          <p:cNvPr id="5" name="Image 2" descr="preencoded.png">    </p:cNvPr>
           <p:cNvPicPr>
             <a:picLocks noChangeAspect="1"/>
           </p:cNvPicPr>
@@ -7681,7 +7739,7 @@
       </p:pic>
       <p:pic>
         <p:nvPicPr>
-          <p:cNvPr id="5" name="Image 3" descr="preencoded.png">    </p:cNvPr>
+          <p:cNvPr id="6" name="Image 3" descr="preencoded.png">    </p:cNvPr>
           <p:cNvPicPr>
             <a:picLocks noChangeAspect="1"/>
           </p:cNvPicPr>
@@ -7711,7 +7769,7 @@
       </p:pic>
       <p:sp>
         <p:nvSpPr>
-          <p:cNvPr id="6" name="Text 0"/>
+          <p:cNvPr id="7" name="Text 1"/>
           <p:cNvSpPr/>
           <p:nvPr/>
         </p:nvSpPr>
@@ -7791,7 +7849,7 @@
       </p:sp>
       <p:sp>
         <p:nvSpPr>
-          <p:cNvPr id="7" name="Text 1"/>
+          <p:cNvPr id="8" name="Text 2"/>
           <p:cNvSpPr/>
           <p:nvPr/>
         </p:nvSpPr>
@@ -7853,7 +7911,7 @@
       </p:sp>
       <p:sp>
         <p:nvSpPr>
-          <p:cNvPr id="8" name="Shape 2"/>
+          <p:cNvPr id="9" name="Shape 3"/>
           <p:cNvSpPr/>
           <p:nvPr/>
         </p:nvSpPr>
@@ -7882,7 +7940,7 @@
       </p:sp>
       <p:sp>
         <p:nvSpPr>
-          <p:cNvPr id="9" name="Shape 3"/>
+          <p:cNvPr id="10" name="Shape 4"/>
           <p:cNvSpPr/>
           <p:nvPr/>
         </p:nvSpPr>
@@ -7904,7 +7962,7 @@
       </p:sp>
       <p:sp>
         <p:nvSpPr>
-          <p:cNvPr id="10" name="Text 4"/>
+          <p:cNvPr id="11" name="Text 5"/>
           <p:cNvSpPr/>
           <p:nvPr/>
         </p:nvSpPr>
@@ -7943,7 +8001,7 @@
       </p:sp>
       <p:sp>
         <p:nvSpPr>
-          <p:cNvPr id="11" name="Text 5"/>
+          <p:cNvPr id="12" name="Text 6"/>
           <p:cNvSpPr/>
           <p:nvPr/>
         </p:nvSpPr>
@@ -7985,7 +8043,7 @@
       </p:sp>
       <p:sp>
         <p:nvSpPr>
-          <p:cNvPr id="12" name="Text 6"/>
+          <p:cNvPr id="13" name="Text 7"/>
           <p:cNvSpPr/>
           <p:nvPr/>
         </p:nvSpPr>
@@ -8024,7 +8082,7 @@
       </p:sp>
       <p:sp>
         <p:nvSpPr>
-          <p:cNvPr id="13" name="Shape 7"/>
+          <p:cNvPr id="14" name="Shape 8"/>
           <p:cNvSpPr/>
           <p:nvPr/>
         </p:nvSpPr>
@@ -8060,7 +8118,7 @@
       </p:sp>
       <p:sp>
         <p:nvSpPr>
-          <p:cNvPr id="14" name="Shape 8"/>
+          <p:cNvPr id="15" name="Shape 9"/>
           <p:cNvSpPr/>
           <p:nvPr/>
         </p:nvSpPr>
@@ -8082,7 +8140,7 @@
       </p:sp>
       <p:sp>
         <p:nvSpPr>
-          <p:cNvPr id="15" name="Text 9"/>
+          <p:cNvPr id="16" name="Text 10"/>
           <p:cNvSpPr/>
           <p:nvPr/>
         </p:nvSpPr>
@@ -8128,7 +8186,7 @@
       </p:sp>
       <p:sp>
         <p:nvSpPr>
-          <p:cNvPr id="16" name="Text 10"/>
+          <p:cNvPr id="17" name="Text 11"/>
           <p:cNvSpPr/>
           <p:nvPr/>
         </p:nvSpPr>
@@ -8167,7 +8225,7 @@
       </p:sp>
       <p:pic>
         <p:nvPicPr>
-          <p:cNvPr id="17" name="Image 4" descr="preencoded.png">    </p:cNvPr>
+          <p:cNvPr id="18" name="Image 4" descr="preencoded.png">    </p:cNvPr>
           <p:cNvPicPr>
             <a:picLocks noChangeAspect="1"/>
           </p:cNvPicPr>
@@ -8197,7 +8255,7 @@
       </p:pic>
       <p:sp>
         <p:nvSpPr>
-          <p:cNvPr id="18" name="Text 11"/>
+          <p:cNvPr id="19" name="Text 12"/>
           <p:cNvSpPr/>
           <p:nvPr/>
         </p:nvSpPr>
@@ -8239,7 +8297,7 @@
       </p:sp>
       <p:sp>
         <p:nvSpPr>
-          <p:cNvPr id="19" name="Shape 12"/>
+          <p:cNvPr id="20" name="Shape 13"/>
           <p:cNvSpPr/>
           <p:nvPr/>
         </p:nvSpPr>
@@ -8275,7 +8333,7 @@
       </p:sp>
       <p:sp>
         <p:nvSpPr>
-          <p:cNvPr id="20" name="Shape 13"/>
+          <p:cNvPr id="21" name="Shape 14"/>
           <p:cNvSpPr/>
           <p:nvPr/>
         </p:nvSpPr>
@@ -8297,7 +8355,7 @@
       </p:sp>
       <p:sp>
         <p:nvSpPr>
-          <p:cNvPr id="21" name="Text 14"/>
+          <p:cNvPr id="22" name="Text 15"/>
           <p:cNvSpPr/>
           <p:nvPr/>
         </p:nvSpPr>
@@ -8343,7 +8401,7 @@
       </p:sp>
       <p:sp>
         <p:nvSpPr>
-          <p:cNvPr id="22" name="Text 15"/>
+          <p:cNvPr id="23" name="Text 16"/>
           <p:cNvSpPr/>
           <p:nvPr/>
         </p:nvSpPr>
@@ -8382,7 +8440,7 @@
       </p:sp>
       <p:pic>
         <p:nvPicPr>
-          <p:cNvPr id="23" name="Image 5" descr="preencoded.png">    </p:cNvPr>
+          <p:cNvPr id="24" name="Image 5" descr="preencoded.png">    </p:cNvPr>
           <p:cNvPicPr>
             <a:picLocks noChangeAspect="1"/>
           </p:cNvPicPr>
@@ -8412,7 +8470,7 @@
       </p:pic>
       <p:sp>
         <p:nvSpPr>
-          <p:cNvPr id="24" name="Text 16"/>
+          <p:cNvPr id="25" name="Text 17"/>
           <p:cNvSpPr/>
           <p:nvPr/>
         </p:nvSpPr>
@@ -8454,7 +8512,7 @@
       </p:sp>
       <p:sp>
         <p:nvSpPr>
-          <p:cNvPr id="25" name="Shape 17"/>
+          <p:cNvPr id="26" name="Shape 18"/>
           <p:cNvSpPr/>
           <p:nvPr/>
         </p:nvSpPr>
@@ -8490,7 +8548,7 @@
       </p:sp>
       <p:sp>
         <p:nvSpPr>
-          <p:cNvPr id="26" name="Shape 18"/>
+          <p:cNvPr id="27" name="Shape 19"/>
           <p:cNvSpPr/>
           <p:nvPr/>
         </p:nvSpPr>
@@ -8512,7 +8570,7 @@
       </p:sp>
       <p:sp>
         <p:nvSpPr>
-          <p:cNvPr id="27" name="Text 19"/>
+          <p:cNvPr id="28" name="Text 20"/>
           <p:cNvSpPr/>
           <p:nvPr/>
         </p:nvSpPr>
@@ -8558,7 +8616,7 @@
       </p:sp>
       <p:sp>
         <p:nvSpPr>
-          <p:cNvPr id="28" name="Text 20"/>
+          <p:cNvPr id="29" name="Text 21"/>
           <p:cNvSpPr/>
           <p:nvPr/>
         </p:nvSpPr>
@@ -8597,7 +8655,7 @@
       </p:sp>
       <p:pic>
         <p:nvPicPr>
-          <p:cNvPr id="29" name="Image 6" descr="preencoded.png">    </p:cNvPr>
+          <p:cNvPr id="30" name="Image 6" descr="preencoded.png">    </p:cNvPr>
           <p:cNvPicPr>
             <a:picLocks noChangeAspect="1"/>
           </p:cNvPicPr>
@@ -8627,7 +8685,7 @@
       </p:pic>
       <p:sp>
         <p:nvSpPr>
-          <p:cNvPr id="30" name="Text 21"/>
+          <p:cNvPr id="31" name="Text 22"/>
           <p:cNvSpPr/>
           <p:nvPr/>
         </p:nvSpPr>
@@ -8669,7 +8727,7 @@
       </p:sp>
       <p:pic>
         <p:nvPicPr>
-          <p:cNvPr id="31" name="Image 7" descr="preencoded.png">    </p:cNvPr>
+          <p:cNvPr id="32" name="Image 7" descr="preencoded.png">    </p:cNvPr>
           <p:cNvPicPr>
             <a:picLocks noChangeAspect="1"/>
           </p:cNvPicPr>
@@ -8699,7 +8757,7 @@
       </p:pic>
       <p:sp>
         <p:nvSpPr>
-          <p:cNvPr id="32" name="Text 22"/>
+          <p:cNvPr id="33" name="Text 23"/>
           <p:cNvSpPr/>
           <p:nvPr/>
         </p:nvSpPr>
@@ -8763,7 +8821,7 @@
       </p:grpSpPr>
       <p:pic>
         <p:nvPicPr>
-          <p:cNvPr id="2" name="Image 0" descr="/home/user/uwg_raesfeld_erle_website_repo/images_v3/hagia_sophia.jpg">    </p:cNvPr>
+          <p:cNvPr id="2" name="Image 0" descr="/home/user/uwg_raesfeld_erle_website_repo/images_v3/cathedral_wende.jpg">    </p:cNvPr>
           <p:cNvPicPr>
             <a:picLocks noChangeAspect="1"/>
           </p:cNvPicPr>
@@ -8784,9 +8842,38 @@
           </a:prstGeom>
         </p:spPr>
       </p:pic>
+      <p:sp>
+        <p:nvSpPr>
+          <p:cNvPr id="3" name="Shape 0"/>
+          <p:cNvSpPr/>
+          <p:nvPr/>
+        </p:nvSpPr>
+        <p:spPr>
+          <a:xfrm>
+            <a:off x="0" y="0"/>
+            <a:ext cx="12191695" cy="6858000"/>
+          </a:xfrm>
+          <a:prstGeom prst="rect">
+            <a:avLst/>
+          </a:prstGeom>
+          <a:solidFill>
+            <a:srgbClr val="000000">
+              <a:alpha val="45000"/>
+            </a:srgbClr>
+          </a:solidFill>
+          <a:ln w="12700">
+            <a:solidFill>
+              <a:srgbClr val="000000">
+                <a:alpha val="0"/>
+              </a:srgbClr>
+            </a:solidFill>
+            <a:prstDash val="solid"/>
+          </a:ln>
+        </p:spPr>
+      </p:sp>
       <p:pic>
         <p:nvPicPr>
-          <p:cNvPr id="3" name="Image 1" descr="preencoded.png">    </p:cNvPr>
+          <p:cNvPr id="4" name="Image 1" descr="preencoded.png">    </p:cNvPr>
           <p:cNvPicPr>
             <a:picLocks noChangeAspect="1"/>
           </p:cNvPicPr>
@@ -8816,7 +8903,7 @@
       </p:pic>
       <p:pic>
         <p:nvPicPr>
-          <p:cNvPr id="4" name="Image 2" descr="preencoded.png">    </p:cNvPr>
+          <p:cNvPr id="5" name="Image 2" descr="preencoded.png">    </p:cNvPr>
           <p:cNvPicPr>
             <a:picLocks noChangeAspect="1"/>
           </p:cNvPicPr>
@@ -8846,7 +8933,7 @@
       </p:pic>
       <p:pic>
         <p:nvPicPr>
-          <p:cNvPr id="5" name="Image 3" descr="preencoded.png">    </p:cNvPr>
+          <p:cNvPr id="6" name="Image 3" descr="preencoded.png">    </p:cNvPr>
           <p:cNvPicPr>
             <a:picLocks noChangeAspect="1"/>
           </p:cNvPicPr>
@@ -8876,7 +8963,7 @@
       </p:pic>
       <p:sp>
         <p:nvSpPr>
-          <p:cNvPr id="6" name="Text 0"/>
+          <p:cNvPr id="7" name="Text 1"/>
           <p:cNvSpPr/>
           <p:nvPr/>
         </p:nvSpPr>
@@ -8922,7 +9009,7 @@
       </p:sp>
       <p:sp>
         <p:nvSpPr>
-          <p:cNvPr id="7" name="Text 1"/>
+          <p:cNvPr id="8" name="Text 2"/>
           <p:cNvSpPr/>
           <p:nvPr/>
         </p:nvSpPr>
@@ -8985,7 +9072,7 @@
       </p:sp>
       <p:pic>
         <p:nvPicPr>
-          <p:cNvPr id="8" name="Image 4" descr="preencoded.png">    </p:cNvPr>
+          <p:cNvPr id="9" name="Image 4" descr="preencoded.png">    </p:cNvPr>
           <p:cNvPicPr>
             <a:picLocks noChangeAspect="1"/>
           </p:cNvPicPr>
@@ -9015,7 +9102,7 @@
       </p:pic>
       <p:sp>
         <p:nvSpPr>
-          <p:cNvPr id="9" name="Text 2"/>
+          <p:cNvPr id="10" name="Text 3"/>
           <p:cNvSpPr/>
           <p:nvPr/>
         </p:nvSpPr>
@@ -9057,7 +9144,7 @@
       </p:sp>
       <p:sp>
         <p:nvSpPr>
-          <p:cNvPr id="10" name="Shape 3"/>
+          <p:cNvPr id="11" name="Shape 4"/>
           <p:cNvSpPr/>
           <p:nvPr/>
         </p:nvSpPr>
@@ -9086,7 +9173,7 @@
       </p:sp>
       <p:sp>
         <p:nvSpPr>
-          <p:cNvPr id="11" name="Shape 4"/>
+          <p:cNvPr id="12" name="Shape 5"/>
           <p:cNvSpPr/>
           <p:nvPr/>
         </p:nvSpPr>
@@ -9108,7 +9195,7 @@
       </p:sp>
       <p:sp>
         <p:nvSpPr>
-          <p:cNvPr id="12" name="Text 5"/>
+          <p:cNvPr id="13" name="Text 6"/>
           <p:cNvSpPr/>
           <p:nvPr/>
         </p:nvSpPr>
@@ -9147,7 +9234,7 @@
       </p:sp>
       <p:sp>
         <p:nvSpPr>
-          <p:cNvPr id="13" name="Text 6"/>
+          <p:cNvPr id="14" name="Text 7"/>
           <p:cNvSpPr/>
           <p:nvPr/>
         </p:nvSpPr>
@@ -9189,7 +9276,7 @@
       </p:sp>
       <p:sp>
         <p:nvSpPr>
-          <p:cNvPr id="14" name="Text 7"/>
+          <p:cNvPr id="15" name="Text 8"/>
           <p:cNvSpPr/>
           <p:nvPr/>
         </p:nvSpPr>
@@ -9228,7 +9315,7 @@
       </p:sp>
       <p:pic>
         <p:nvPicPr>
-          <p:cNvPr id="15" name="Image 5" descr="preencoded.png">    </p:cNvPr>
+          <p:cNvPr id="16" name="Image 5" descr="preencoded.png">    </p:cNvPr>
           <p:cNvPicPr>
             <a:picLocks noChangeAspect="1"/>
           </p:cNvPicPr>
@@ -9258,7 +9345,7 @@
       </p:pic>
       <p:sp>
         <p:nvSpPr>
-          <p:cNvPr id="16" name="Shape 8"/>
+          <p:cNvPr id="17" name="Shape 9"/>
           <p:cNvSpPr/>
           <p:nvPr/>
         </p:nvSpPr>
@@ -9281,7 +9368,7 @@
       </p:sp>
       <p:sp>
         <p:nvSpPr>
-          <p:cNvPr id="17" name="Text 9"/>
+          <p:cNvPr id="18" name="Text 10"/>
           <p:cNvSpPr/>
           <p:nvPr/>
         </p:nvSpPr>
@@ -9320,7 +9407,7 @@
       </p:sp>
       <p:sp>
         <p:nvSpPr>
-          <p:cNvPr id="18" name="Text 10"/>
+          <p:cNvPr id="19" name="Text 11"/>
           <p:cNvSpPr/>
           <p:nvPr/>
         </p:nvSpPr>
@@ -9362,7 +9449,7 @@
       </p:sp>
       <p:pic>
         <p:nvPicPr>
-          <p:cNvPr id="19" name="Image 6" descr="preencoded.png">    </p:cNvPr>
+          <p:cNvPr id="20" name="Image 6" descr="preencoded.png">    </p:cNvPr>
           <p:cNvPicPr>
             <a:picLocks noChangeAspect="1"/>
           </p:cNvPicPr>
@@ -9392,7 +9479,7 @@
       </p:pic>
       <p:sp>
         <p:nvSpPr>
-          <p:cNvPr id="20" name="Shape 11"/>
+          <p:cNvPr id="21" name="Shape 12"/>
           <p:cNvSpPr/>
           <p:nvPr/>
         </p:nvSpPr>
@@ -9415,7 +9502,7 @@
       </p:sp>
       <p:sp>
         <p:nvSpPr>
-          <p:cNvPr id="21" name="Text 12"/>
+          <p:cNvPr id="22" name="Text 13"/>
           <p:cNvSpPr/>
           <p:nvPr/>
         </p:nvSpPr>
@@ -9454,7 +9541,7 @@
       </p:sp>
       <p:sp>
         <p:nvSpPr>
-          <p:cNvPr id="22" name="Text 13"/>
+          <p:cNvPr id="23" name="Text 14"/>
           <p:cNvSpPr/>
           <p:nvPr/>
         </p:nvSpPr>
@@ -9496,7 +9583,7 @@
       </p:sp>
       <p:pic>
         <p:nvPicPr>
-          <p:cNvPr id="23" name="Image 7" descr="preencoded.png">    </p:cNvPr>
+          <p:cNvPr id="24" name="Image 7" descr="preencoded.png">    </p:cNvPr>
           <p:cNvPicPr>
             <a:picLocks noChangeAspect="1"/>
           </p:cNvPicPr>
@@ -9526,7 +9613,7 @@
       </p:pic>
       <p:sp>
         <p:nvSpPr>
-          <p:cNvPr id="24" name="Shape 14"/>
+          <p:cNvPr id="25" name="Shape 15"/>
           <p:cNvSpPr/>
           <p:nvPr/>
         </p:nvSpPr>
@@ -9549,7 +9636,7 @@
       </p:sp>
       <p:sp>
         <p:nvSpPr>
-          <p:cNvPr id="25" name="Text 15"/>
+          <p:cNvPr id="26" name="Text 16"/>
           <p:cNvSpPr/>
           <p:nvPr/>
         </p:nvSpPr>
@@ -9588,7 +9675,7 @@
       </p:sp>
       <p:sp>
         <p:nvSpPr>
-          <p:cNvPr id="26" name="Text 16"/>
+          <p:cNvPr id="27" name="Text 17"/>
           <p:cNvSpPr/>
           <p:nvPr/>
         </p:nvSpPr>
@@ -9630,7 +9717,7 @@
       </p:sp>
       <p:pic>
         <p:nvPicPr>
-          <p:cNvPr id="27" name="Image 8" descr="preencoded.png">    </p:cNvPr>
+          <p:cNvPr id="28" name="Image 8" descr="preencoded.png">    </p:cNvPr>
           <p:cNvPicPr>
             <a:picLocks noChangeAspect="1"/>
           </p:cNvPicPr>
@@ -9660,7 +9747,7 @@
       </p:pic>
       <p:sp>
         <p:nvSpPr>
-          <p:cNvPr id="28" name="Shape 17"/>
+          <p:cNvPr id="29" name="Shape 18"/>
           <p:cNvSpPr/>
           <p:nvPr/>
         </p:nvSpPr>
@@ -9683,7 +9770,7 @@
       </p:sp>
       <p:sp>
         <p:nvSpPr>
-          <p:cNvPr id="29" name="Text 18"/>
+          <p:cNvPr id="30" name="Text 19"/>
           <p:cNvSpPr/>
           <p:nvPr/>
         </p:nvSpPr>
@@ -9722,7 +9809,7 @@
       </p:sp>
       <p:sp>
         <p:nvSpPr>
-          <p:cNvPr id="30" name="Text 19"/>
+          <p:cNvPr id="31" name="Text 20"/>
           <p:cNvSpPr/>
           <p:nvPr/>
         </p:nvSpPr>
@@ -9764,7 +9851,7 @@
       </p:sp>
       <p:pic>
         <p:nvPicPr>
-          <p:cNvPr id="31" name="Image 9" descr="preencoded.png">    </p:cNvPr>
+          <p:cNvPr id="32" name="Image 9" descr="preencoded.png">    </p:cNvPr>
           <p:cNvPicPr>
             <a:picLocks noChangeAspect="1"/>
           </p:cNvPicPr>
@@ -9794,7 +9881,7 @@
       </p:pic>
       <p:sp>
         <p:nvSpPr>
-          <p:cNvPr id="32" name="Shape 20"/>
+          <p:cNvPr id="33" name="Shape 21"/>
           <p:cNvSpPr/>
           <p:nvPr/>
         </p:nvSpPr>
@@ -9817,7 +9904,7 @@
       </p:sp>
       <p:sp>
         <p:nvSpPr>
-          <p:cNvPr id="33" name="Text 21"/>
+          <p:cNvPr id="34" name="Text 22"/>
           <p:cNvSpPr/>
           <p:nvPr/>
         </p:nvSpPr>
@@ -9856,7 +9943,7 @@
       </p:sp>
       <p:sp>
         <p:nvSpPr>
-          <p:cNvPr id="34" name="Text 22"/>
+          <p:cNvPr id="35" name="Text 23"/>
           <p:cNvSpPr/>
           <p:nvPr/>
         </p:nvSpPr>
@@ -9898,7 +9985,7 @@
       </p:sp>
       <p:pic>
         <p:nvPicPr>
-          <p:cNvPr id="35" name="Image 10" descr="preencoded.png">    </p:cNvPr>
+          <p:cNvPr id="36" name="Image 10" descr="preencoded.png">    </p:cNvPr>
           <p:cNvPicPr>
             <a:picLocks noChangeAspect="1"/>
           </p:cNvPicPr>
@@ -9928,7 +10015,7 @@
       </p:pic>
       <p:sp>
         <p:nvSpPr>
-          <p:cNvPr id="36" name="Shape 23"/>
+          <p:cNvPr id="37" name="Shape 24"/>
           <p:cNvSpPr/>
           <p:nvPr/>
         </p:nvSpPr>
@@ -9951,7 +10038,7 @@
       </p:sp>
       <p:sp>
         <p:nvSpPr>
-          <p:cNvPr id="37" name="Text 24"/>
+          <p:cNvPr id="38" name="Text 25"/>
           <p:cNvSpPr/>
           <p:nvPr/>
         </p:nvSpPr>
@@ -9990,7 +10077,7 @@
       </p:sp>
       <p:sp>
         <p:nvSpPr>
-          <p:cNvPr id="38" name="Text 25"/>
+          <p:cNvPr id="39" name="Text 26"/>
           <p:cNvSpPr/>
           <p:nvPr/>
         </p:nvSpPr>
@@ -10032,7 +10119,7 @@
       </p:sp>
       <p:pic>
         <p:nvPicPr>
-          <p:cNvPr id="39" name="Image 11" descr="preencoded.png">    </p:cNvPr>
+          <p:cNvPr id="40" name="Image 11" descr="preencoded.png">    </p:cNvPr>
           <p:cNvPicPr>
             <a:picLocks noChangeAspect="1"/>
           </p:cNvPicPr>
@@ -10062,7 +10149,7 @@
       </p:pic>
       <p:sp>
         <p:nvSpPr>
-          <p:cNvPr id="40" name="Text 26"/>
+          <p:cNvPr id="41" name="Text 27"/>
           <p:cNvSpPr/>
           <p:nvPr/>
         </p:nvSpPr>
@@ -10101,7 +10188,7 @@
       </p:sp>
       <p:sp>
         <p:nvSpPr>
-          <p:cNvPr id="41" name="Text 27"/>
+          <p:cNvPr id="42" name="Text 28"/>
           <p:cNvSpPr/>
           <p:nvPr/>
         </p:nvSpPr>
@@ -10168,7 +10255,7 @@
       </p:grpSpPr>
       <p:pic>
         <p:nvPicPr>
-          <p:cNvPr id="2" name="Image 0" descr="/home/user/uwg_raesfeld_erle_website_repo/images_v3/basilica.jpg">    </p:cNvPr>
+          <p:cNvPr id="2" name="Image 0" descr="/home/user/uwg_raesfeld_erle_website_repo/images_v3/great_wall_erbe.jpg">    </p:cNvPr>
           <p:cNvPicPr>
             <a:picLocks noChangeAspect="1"/>
           </p:cNvPicPr>
@@ -10189,9 +10276,38 @@
           </a:prstGeom>
         </p:spPr>
       </p:pic>
+      <p:sp>
+        <p:nvSpPr>
+          <p:cNvPr id="3" name="Shape 0"/>
+          <p:cNvSpPr/>
+          <p:nvPr/>
+        </p:nvSpPr>
+        <p:spPr>
+          <a:xfrm>
+            <a:off x="0" y="0"/>
+            <a:ext cx="12191695" cy="6858000"/>
+          </a:xfrm>
+          <a:prstGeom prst="rect">
+            <a:avLst/>
+          </a:prstGeom>
+          <a:solidFill>
+            <a:srgbClr val="000000">
+              <a:alpha val="62000"/>
+            </a:srgbClr>
+          </a:solidFill>
+          <a:ln w="12700">
+            <a:solidFill>
+              <a:srgbClr val="000000">
+                <a:alpha val="0"/>
+              </a:srgbClr>
+            </a:solidFill>
+            <a:prstDash val="solid"/>
+          </a:ln>
+        </p:spPr>
+      </p:sp>
       <p:pic>
         <p:nvPicPr>
-          <p:cNvPr id="3" name="Image 1" descr="preencoded.png">    </p:cNvPr>
+          <p:cNvPr id="4" name="Image 1" descr="preencoded.png">    </p:cNvPr>
           <p:cNvPicPr>
             <a:picLocks noChangeAspect="1"/>
           </p:cNvPicPr>
@@ -10221,7 +10337,7 @@
       </p:pic>
       <p:pic>
         <p:nvPicPr>
-          <p:cNvPr id="4" name="Image 2" descr="preencoded.png">    </p:cNvPr>
+          <p:cNvPr id="5" name="Image 2" descr="preencoded.png">    </p:cNvPr>
           <p:cNvPicPr>
             <a:picLocks noChangeAspect="1"/>
           </p:cNvPicPr>
@@ -10251,7 +10367,7 @@
       </p:pic>
       <p:pic>
         <p:nvPicPr>
-          <p:cNvPr id="5" name="Image 3" descr="preencoded.png">    </p:cNvPr>
+          <p:cNvPr id="6" name="Image 3" descr="preencoded.png">    </p:cNvPr>
           <p:cNvPicPr>
             <a:picLocks noChangeAspect="1"/>
           </p:cNvPicPr>
@@ -10281,7 +10397,7 @@
       </p:pic>
       <p:pic>
         <p:nvPicPr>
-          <p:cNvPr id="6" name="Image 4" descr="preencoded.png">    </p:cNvPr>
+          <p:cNvPr id="7" name="Image 4" descr="preencoded.png">    </p:cNvPr>
           <p:cNvPicPr>
             <a:picLocks noChangeAspect="1"/>
           </p:cNvPicPr>
@@ -10311,7 +10427,7 @@
       </p:pic>
       <p:sp>
         <p:nvSpPr>
-          <p:cNvPr id="7" name="Shape 0"/>
+          <p:cNvPr id="8" name="Shape 1"/>
           <p:cNvSpPr/>
           <p:nvPr/>
         </p:nvSpPr>
@@ -10340,7 +10456,7 @@
       </p:sp>
       <p:sp>
         <p:nvSpPr>
-          <p:cNvPr id="8" name="Shape 1"/>
+          <p:cNvPr id="9" name="Shape 2"/>
           <p:cNvSpPr/>
           <p:nvPr/>
         </p:nvSpPr>
@@ -10362,7 +10478,7 @@
       </p:sp>
       <p:sp>
         <p:nvSpPr>
-          <p:cNvPr id="9" name="Shape 2"/>
+          <p:cNvPr id="10" name="Shape 3"/>
           <p:cNvSpPr/>
           <p:nvPr/>
         </p:nvSpPr>
@@ -10384,7 +10500,7 @@
       </p:sp>
       <p:pic>
         <p:nvPicPr>
-          <p:cNvPr id="10" name="Image 5" descr="preencoded.png">    </p:cNvPr>
+          <p:cNvPr id="11" name="Image 5" descr="preencoded.png">    </p:cNvPr>
           <p:cNvPicPr>
             <a:picLocks noChangeAspect="1"/>
           </p:cNvPicPr>
@@ -10414,7 +10530,7 @@
       </p:pic>
       <p:sp>
         <p:nvSpPr>
-          <p:cNvPr id="11" name="Text 3"/>
+          <p:cNvPr id="12" name="Text 4"/>
           <p:cNvSpPr/>
           <p:nvPr/>
         </p:nvSpPr>
@@ -10453,7 +10569,7 @@
       </p:sp>
       <p:sp>
         <p:nvSpPr>
-          <p:cNvPr id="12" name="Text 4"/>
+          <p:cNvPr id="13" name="Text 5"/>
           <p:cNvSpPr/>
           <p:nvPr/>
         </p:nvSpPr>
@@ -10495,7 +10611,7 @@
       </p:sp>
       <p:sp>
         <p:nvSpPr>
-          <p:cNvPr id="13" name="Shape 5"/>
+          <p:cNvPr id="14" name="Shape 6"/>
           <p:cNvSpPr/>
           <p:nvPr/>
         </p:nvSpPr>
@@ -10524,7 +10640,7 @@
       </p:sp>
       <p:sp>
         <p:nvSpPr>
-          <p:cNvPr id="14" name="Shape 6"/>
+          <p:cNvPr id="15" name="Shape 7"/>
           <p:cNvSpPr/>
           <p:nvPr/>
         </p:nvSpPr>
@@ -10546,7 +10662,7 @@
       </p:sp>
       <p:sp>
         <p:nvSpPr>
-          <p:cNvPr id="15" name="Shape 7"/>
+          <p:cNvPr id="16" name="Shape 8"/>
           <p:cNvSpPr/>
           <p:nvPr/>
         </p:nvSpPr>
@@ -10568,7 +10684,7 @@
       </p:sp>
       <p:pic>
         <p:nvPicPr>
-          <p:cNvPr id="16" name="Image 6" descr="preencoded.png">    </p:cNvPr>
+          <p:cNvPr id="17" name="Image 6" descr="preencoded.png">    </p:cNvPr>
           <p:cNvPicPr>
             <a:picLocks noChangeAspect="1"/>
           </p:cNvPicPr>
@@ -10598,7 +10714,7 @@
       </p:pic>
       <p:sp>
         <p:nvSpPr>
-          <p:cNvPr id="17" name="Text 8"/>
+          <p:cNvPr id="18" name="Text 9"/>
           <p:cNvSpPr/>
           <p:nvPr/>
         </p:nvSpPr>
@@ -10637,7 +10753,7 @@
       </p:sp>
       <p:sp>
         <p:nvSpPr>
-          <p:cNvPr id="18" name="Text 9"/>
+          <p:cNvPr id="19" name="Text 10"/>
           <p:cNvSpPr/>
           <p:nvPr/>
         </p:nvSpPr>
@@ -10679,7 +10795,7 @@
       </p:sp>
       <p:sp>
         <p:nvSpPr>
-          <p:cNvPr id="19" name="Shape 10"/>
+          <p:cNvPr id="20" name="Shape 11"/>
           <p:cNvSpPr/>
           <p:nvPr/>
         </p:nvSpPr>
@@ -10708,7 +10824,7 @@
       </p:sp>
       <p:sp>
         <p:nvSpPr>
-          <p:cNvPr id="20" name="Shape 11"/>
+          <p:cNvPr id="21" name="Shape 12"/>
           <p:cNvSpPr/>
           <p:nvPr/>
         </p:nvSpPr>
@@ -10730,7 +10846,7 @@
       </p:sp>
       <p:sp>
         <p:nvSpPr>
-          <p:cNvPr id="21" name="Shape 12"/>
+          <p:cNvPr id="22" name="Shape 13"/>
           <p:cNvSpPr/>
           <p:nvPr/>
         </p:nvSpPr>
@@ -10752,7 +10868,7 @@
       </p:sp>
       <p:pic>
         <p:nvPicPr>
-          <p:cNvPr id="22" name="Image 7" descr="preencoded.png">    </p:cNvPr>
+          <p:cNvPr id="23" name="Image 7" descr="preencoded.png">    </p:cNvPr>
           <p:cNvPicPr>
             <a:picLocks noChangeAspect="1"/>
           </p:cNvPicPr>
@@ -10782,7 +10898,7 @@
       </p:pic>
       <p:sp>
         <p:nvSpPr>
-          <p:cNvPr id="23" name="Text 13"/>
+          <p:cNvPr id="24" name="Text 14"/>
           <p:cNvSpPr/>
           <p:nvPr/>
         </p:nvSpPr>
@@ -10821,7 +10937,7 @@
       </p:sp>
       <p:sp>
         <p:nvSpPr>
-          <p:cNvPr id="24" name="Text 14"/>
+          <p:cNvPr id="25" name="Text 15"/>
           <p:cNvSpPr/>
           <p:nvPr/>
         </p:nvSpPr>
@@ -10863,7 +10979,7 @@
       </p:sp>
       <p:sp>
         <p:nvSpPr>
-          <p:cNvPr id="25" name="Shape 15"/>
+          <p:cNvPr id="26" name="Shape 16"/>
           <p:cNvSpPr/>
           <p:nvPr/>
         </p:nvSpPr>
@@ -10892,7 +11008,7 @@
       </p:sp>
       <p:sp>
         <p:nvSpPr>
-          <p:cNvPr id="26" name="Shape 16"/>
+          <p:cNvPr id="27" name="Shape 17"/>
           <p:cNvSpPr/>
           <p:nvPr/>
         </p:nvSpPr>
@@ -10914,7 +11030,7 @@
       </p:sp>
       <p:sp>
         <p:nvSpPr>
-          <p:cNvPr id="27" name="Shape 17"/>
+          <p:cNvPr id="28" name="Shape 18"/>
           <p:cNvSpPr/>
           <p:nvPr/>
         </p:nvSpPr>
@@ -10936,7 +11052,7 @@
       </p:sp>
       <p:pic>
         <p:nvPicPr>
-          <p:cNvPr id="28" name="Image 8" descr="preencoded.png">    </p:cNvPr>
+          <p:cNvPr id="29" name="Image 8" descr="preencoded.png">    </p:cNvPr>
           <p:cNvPicPr>
             <a:picLocks noChangeAspect="1"/>
           </p:cNvPicPr>
@@ -10966,7 +11082,7 @@
       </p:pic>
       <p:sp>
         <p:nvSpPr>
-          <p:cNvPr id="29" name="Text 18"/>
+          <p:cNvPr id="30" name="Text 19"/>
           <p:cNvSpPr/>
           <p:nvPr/>
         </p:nvSpPr>
@@ -11005,7 +11121,7 @@
       </p:sp>
       <p:sp>
         <p:nvSpPr>
-          <p:cNvPr id="30" name="Text 19"/>
+          <p:cNvPr id="31" name="Text 20"/>
           <p:cNvSpPr/>
           <p:nvPr/>
         </p:nvSpPr>
@@ -11047,7 +11163,7 @@
       </p:sp>
       <p:pic>
         <p:nvPicPr>
-          <p:cNvPr id="31" name="Image 9" descr="preencoded.png">    </p:cNvPr>
+          <p:cNvPr id="32" name="Image 9" descr="preencoded.png">    </p:cNvPr>
           <p:cNvPicPr>
             <a:picLocks noChangeAspect="1"/>
           </p:cNvPicPr>
@@ -11077,7 +11193,7 @@
       </p:pic>
       <p:sp>
         <p:nvSpPr>
-          <p:cNvPr id="32" name="Text 20"/>
+          <p:cNvPr id="33" name="Text 21"/>
           <p:cNvSpPr/>
           <p:nvPr/>
         </p:nvSpPr>
@@ -11116,7 +11232,7 @@
       </p:sp>
       <p:sp>
         <p:nvSpPr>
-          <p:cNvPr id="33" name="Text 21"/>
+          <p:cNvPr id="34" name="Text 22"/>
           <p:cNvSpPr/>
           <p:nvPr/>
         </p:nvSpPr>
@@ -11179,7 +11295,7 @@
       </p:sp>
       <p:pic>
         <p:nvPicPr>
-          <p:cNvPr id="34" name="Image 10" descr="preencoded.png">    </p:cNvPr>
+          <p:cNvPr id="35" name="Image 10" descr="preencoded.png">    </p:cNvPr>
           <p:cNvPicPr>
             <a:picLocks noChangeAspect="1"/>
           </p:cNvPicPr>
@@ -11209,7 +11325,7 @@
       </p:pic>
       <p:sp>
         <p:nvSpPr>
-          <p:cNvPr id="35" name="Text 22"/>
+          <p:cNvPr id="36" name="Text 23"/>
           <p:cNvSpPr/>
           <p:nvPr/>
         </p:nvSpPr>
@@ -11248,7 +11364,7 @@
       </p:sp>
       <p:sp>
         <p:nvSpPr>
-          <p:cNvPr id="36" name="Text 23"/>
+          <p:cNvPr id="37" name="Text 24"/>
           <p:cNvSpPr/>
           <p:nvPr/>
         </p:nvSpPr>
@@ -11287,7 +11403,7 @@
       </p:sp>
       <p:sp>
         <p:nvSpPr>
-          <p:cNvPr id="37" name="Text 24"/>
+          <p:cNvPr id="38" name="Text 25"/>
           <p:cNvSpPr/>
           <p:nvPr/>
         </p:nvSpPr>
@@ -11326,7 +11442,7 @@
       </p:sp>
       <p:sp>
         <p:nvSpPr>
-          <p:cNvPr id="38" name="Text 25"/>
+          <p:cNvPr id="39" name="Text 26"/>
           <p:cNvSpPr/>
           <p:nvPr/>
         </p:nvSpPr>

--- a/Anfaenge_Kirche_Antike_v3.pptx
+++ b/Anfaenge_Kirche_Antike_v3.pptx
@@ -3798,7 +3798,7 @@
                 <a:ea typeface="Calibri" pitchFamily="34" charset="-122"/>
                 <a:cs typeface="Calibri" pitchFamily="34" charset="-120"/>
               </a:rPr>
-              <a:t>Antiochia · Ephesus · Alexandria. Alexanders Handelsstädte werden Paulus’ Missionsstützpunkte.</a:t>
+              <a:t>Antiochia · Ephesus · Alexandria. Alexanders Handelsstädte werden Paulus' Missionsstützpunkte.</a:t>
             </a:r>
             <a:endParaRPr lang="en-US" sz="1100" dirty="0"/>
           </a:p>
@@ -5286,7 +5286,7 @@
           </a:prstGeom>
           <a:solidFill>
             <a:srgbClr val="000000">
-              <a:alpha val="45000"/>
+              <a:alpha val="50000"/>
             </a:srgbClr>
           </a:solidFill>
           <a:ln w="12700">
@@ -5397,8 +5397,8 @@
         </p:nvSpPr>
         <p:spPr>
           <a:xfrm>
-            <a:off x="292608" y="621792"/>
-            <a:ext cx="5486263" cy="530352"/>
+            <a:off x="274320" y="621792"/>
+            <a:ext cx="5242429" cy="621792"/>
           </a:xfrm>
           <a:prstGeom prst="rect">
             <a:avLst/>
@@ -5406,9 +5406,9 @@
           <a:noFill/>
           <a:ln/>
           <a:effectLst>
-            <a:outerShdw sx="100000" sy="100000" kx="0" ky="0" algn="bl" rotWithShape="0" blurRad="203200" dist="50800" dir="16200000">
+            <a:outerShdw sx="100000" sy="100000" kx="0" ky="0" algn="bl" rotWithShape="0" blurRad="254000" dist="50800" dir="16200000">
               <a:srgbClr val="C8820A">
-                <a:alpha val="50000"/>
+                <a:alpha val="65000"/>
               </a:srgbClr>
             </a:outerShdw>
           </a:effectLst>
@@ -5421,7 +5421,7 @@
               <a:buNone/>
             </a:pPr>
             <a:r>
-              <a:rPr lang="en-US" sz="3600" b="1" i="1" dirty="0">
+              <a:rPr lang="en-US" sz="3200" b="1" i="1" dirty="0">
                 <a:solidFill>
                   <a:srgbClr val="F5EBD8"/>
                 </a:solidFill>
@@ -5429,15 +5429,57 @@
                 <a:ea typeface="Georgia" pitchFamily="34" charset="-122"/>
                 <a:cs typeface="Georgia" pitchFamily="34" charset="-120"/>
               </a:rPr>
-              <a:t>Der Architekt.</a:t>
-            </a:r>
-            <a:endParaRPr lang="en-US" sz="3600" dirty="0"/>
+              <a:t>Der erste Missionar.</a:t>
+            </a:r>
+            <a:endParaRPr lang="en-US" sz="3200" dirty="0"/>
+          </a:p>
+        </p:txBody>
+      </p:sp>
+      <p:sp>
+        <p:nvSpPr>
+          <p:cNvPr id="8" name="Text 2"/>
+          <p:cNvSpPr/>
+          <p:nvPr/>
+        </p:nvSpPr>
+        <p:spPr>
+          <a:xfrm>
+            <a:off x="274320" y="1316736"/>
+            <a:ext cx="5242429" cy="896112"/>
+          </a:xfrm>
+          <a:prstGeom prst="rect">
+            <a:avLst/>
+          </a:prstGeom>
+          <a:noFill/>
+          <a:ln/>
+        </p:spPr>
+        <p:txBody>
+          <a:bodyPr wrap="square" rtlCol="0" anchor="ctr"/>
+          <a:lstStyle/>
+          <a:p>
+            <a:pPr indent="0" marL="0">
+              <a:lnSpc>
+                <a:spcPct val="140000"/>
+              </a:lnSpc>
+              <a:buNone/>
+            </a:pPr>
+            <a:r>
+              <a:rPr lang="en-US" sz="1250" dirty="0">
+                <a:solidFill>
+                  <a:srgbClr val="C4A882"/>
+                </a:solidFill>
+                <a:latin typeface="Calibri" pitchFamily="34" charset="0"/>
+                <a:ea typeface="Calibri" pitchFamily="34" charset="-122"/>
+                <a:cs typeface="Calibri" pitchFamily="34" charset="-120"/>
+              </a:rPr>
+              <a:t>Saulus von Tarsus (ca. 5–67 n. Chr.) — gebildeter Jude, römischer Bürger, zunächst Christenverfolger. Eine Vision auf dem Weg nach Damaskus verändert ihn und mit ihm die Welt.</a:t>
+            </a:r>
+            <a:endParaRPr lang="en-US" sz="1250" dirty="0"/>
           </a:p>
         </p:txBody>
       </p:sp>
       <p:pic>
         <p:nvPicPr>
-          <p:cNvPr id="8" name="Image 4" descr="preencoded.png">    </p:cNvPr>
+          <p:cNvPr id="9" name="Image 4" descr="preencoded.png">    </p:cNvPr>
           <p:cNvPicPr>
             <a:picLocks noChangeAspect="1"/>
           </p:cNvPicPr>
@@ -5457,8 +5499,8 @@
         </p:blipFill>
         <p:spPr>
           <a:xfrm>
-            <a:off x="292608" y="1234440"/>
-            <a:ext cx="5364346" cy="32004"/>
+            <a:off x="274320" y="2286000"/>
+            <a:ext cx="5242429" cy="32004"/>
           </a:xfrm>
           <a:prstGeom prst="rect">
             <a:avLst/>
@@ -5467,108 +5509,27 @@
       </p:pic>
       <p:sp>
         <p:nvSpPr>
-          <p:cNvPr id="9" name="Text 2"/>
-          <p:cNvSpPr/>
-          <p:nvPr/>
-        </p:nvSpPr>
-        <p:spPr>
-          <a:xfrm>
-            <a:off x="292608" y="1353312"/>
-            <a:ext cx="5364346" cy="960120"/>
-          </a:xfrm>
-          <a:prstGeom prst="rect">
-            <a:avLst/>
-          </a:prstGeom>
-          <a:noFill/>
-          <a:ln/>
-        </p:spPr>
-        <p:txBody>
-          <a:bodyPr wrap="square" rtlCol="0" anchor="ctr"/>
-          <a:lstStyle/>
-          <a:p>
-            <a:pPr indent="0" marL="0">
-              <a:lnSpc>
-                <a:spcPct val="140000"/>
-              </a:lnSpc>
-              <a:buNone/>
-            </a:pPr>
-            <a:r>
-              <a:rPr lang="en-US" sz="1200" dirty="0">
-                <a:solidFill>
-                  <a:srgbClr val="C4A882"/>
-                </a:solidFill>
-                <a:latin typeface="Calibri" pitchFamily="34" charset="0"/>
-                <a:ea typeface="Calibri" pitchFamily="34" charset="-122"/>
-                <a:cs typeface="Calibri" pitchFamily="34" charset="-120"/>
-              </a:rPr>
-              <a:t>Saulus von Tarsus (ca. 5–67 n. Chr.) — gebildeter Jude, römischer Bürger, zunächst Christenverfolger. Nach einer Vision auf dem Weg nach Damaskus (ca. 35 n. Chr.) schreibt er 13 NT-Bücher und bereist das halbe Mittelmeer. Ohne je Jesus persönlich getroffen zu haben.</a:t>
-            </a:r>
-            <a:endParaRPr lang="en-US" sz="1200" dirty="0"/>
-          </a:p>
-        </p:txBody>
-      </p:sp>
-      <p:sp>
-        <p:nvSpPr>
-          <p:cNvPr id="10" name="Text 3"/>
-          <p:cNvSpPr/>
-          <p:nvPr/>
-        </p:nvSpPr>
-        <p:spPr>
-          <a:xfrm>
-            <a:off x="292608" y="2423160"/>
-            <a:ext cx="5364346" cy="292608"/>
-          </a:xfrm>
-          <a:prstGeom prst="rect">
-            <a:avLst/>
-          </a:prstGeom>
-          <a:noFill/>
-          <a:ln/>
-        </p:spPr>
-        <p:txBody>
-          <a:bodyPr wrap="square" rtlCol="0" anchor="ctr"/>
-          <a:lstStyle/>
-          <a:p>
-            <a:pPr algn="ctr" indent="0" marL="0">
-              <a:buNone/>
-            </a:pPr>
-            <a:r>
-              <a:rPr lang="en-US" sz="1200" i="1" dirty="0">
-                <a:solidFill>
-                  <a:srgbClr val="D9A441"/>
-                </a:solidFill>
-                <a:latin typeface="Georgia" pitchFamily="34" charset="0"/>
-                <a:ea typeface="Georgia" pitchFamily="34" charset="-122"/>
-                <a:cs typeface="Georgia" pitchFamily="34" charset="-120"/>
-              </a:rPr>
-              <a:t>3 Missionsreisen · 13 NT-Briefe · nie Jesus persönlich getroffen</a:t>
-            </a:r>
-            <a:endParaRPr lang="en-US" sz="1200" dirty="0"/>
-          </a:p>
-        </p:txBody>
-      </p:sp>
-      <p:sp>
-        <p:nvSpPr>
-          <p:cNvPr id="11" name="Shape 4"/>
-          <p:cNvSpPr/>
-          <p:nvPr/>
-        </p:nvSpPr>
-        <p:spPr>
-          <a:xfrm>
-            <a:off x="292608" y="2788920"/>
-            <a:ext cx="5364346" cy="1170432"/>
+          <p:cNvPr id="10" name="Shape 3"/>
+          <p:cNvSpPr/>
+          <p:nvPr/>
+        </p:nvSpPr>
+        <p:spPr>
+          <a:xfrm>
+            <a:off x="274320" y="2423160"/>
+            <a:ext cx="1710900" cy="1024128"/>
           </a:xfrm>
           <a:prstGeom prst="rect">
             <a:avLst/>
           </a:prstGeom>
           <a:solidFill>
             <a:srgbClr val="0F0B07">
-              <a:alpha val="90000"/>
+              <a:alpha val="82000"/>
             </a:srgbClr>
           </a:solidFill>
           <a:ln w="10160">
             <a:solidFill>
               <a:srgbClr val="C8820A">
-                <a:alpha val="40000"/>
+                <a:alpha val="35000"/>
               </a:srgbClr>
             </a:solidFill>
             <a:prstDash val="solid"/>
@@ -5577,14 +5538,14 @@
       </p:sp>
       <p:sp>
         <p:nvSpPr>
-          <p:cNvPr id="12" name="Shape 5"/>
-          <p:cNvSpPr/>
-          <p:nvPr/>
-        </p:nvSpPr>
-        <p:spPr>
-          <a:xfrm>
-            <a:off x="292608" y="2788920"/>
-            <a:ext cx="5364346" cy="18288"/>
+          <p:cNvPr id="11" name="Shape 4"/>
+          <p:cNvSpPr/>
+          <p:nvPr/>
+        </p:nvSpPr>
+        <p:spPr>
+          <a:xfrm>
+            <a:off x="274320" y="2423160"/>
+            <a:ext cx="1710900" cy="18288"/>
           </a:xfrm>
           <a:prstGeom prst="rect">
             <a:avLst/>
@@ -5599,159 +5560,356 @@
       </p:sp>
       <p:sp>
         <p:nvSpPr>
+          <p:cNvPr id="12" name="Text 5"/>
+          <p:cNvSpPr/>
+          <p:nvPr/>
+        </p:nvSpPr>
+        <p:spPr>
+          <a:xfrm>
+            <a:off x="274320" y="2487168"/>
+            <a:ext cx="1710900" cy="512064"/>
+          </a:xfrm>
+          <a:prstGeom prst="rect">
+            <a:avLst/>
+          </a:prstGeom>
+          <a:noFill/>
+          <a:ln/>
+          <a:effectLst>
+            <a:outerShdw sx="100000" sy="100000" kx="0" ky="0" algn="bl" rotWithShape="0" blurRad="127000" dist="50800" dir="16200000">
+              <a:srgbClr val="C8820A">
+                <a:alpha val="50000"/>
+              </a:srgbClr>
+            </a:outerShdw>
+          </a:effectLst>
+        </p:spPr>
+        <p:txBody>
+          <a:bodyPr wrap="square" rtlCol="0" anchor="ctr"/>
+          <a:lstStyle/>
+          <a:p>
+            <a:pPr algn="ctr" indent="0" marL="0">
+              <a:buNone/>
+            </a:pPr>
+            <a:r>
+              <a:rPr lang="en-US" sz="2800" b="1" dirty="0">
+                <a:solidFill>
+                  <a:srgbClr val="F0C060"/>
+                </a:solidFill>
+                <a:latin typeface="Georgia" pitchFamily="34" charset="0"/>
+                <a:ea typeface="Georgia" pitchFamily="34" charset="-122"/>
+                <a:cs typeface="Georgia" pitchFamily="34" charset="-120"/>
+              </a:rPr>
+              <a:t>13</a:t>
+            </a:r>
+            <a:endParaRPr lang="en-US" sz="2800" dirty="0"/>
+          </a:p>
+        </p:txBody>
+      </p:sp>
+      <p:sp>
+        <p:nvSpPr>
           <p:cNvPr id="13" name="Text 6"/>
           <p:cNvSpPr/>
           <p:nvPr/>
         </p:nvSpPr>
         <p:spPr>
           <a:xfrm>
-            <a:off x="411480" y="2852928"/>
-            <a:ext cx="4876678" cy="237744"/>
-          </a:xfrm>
-          <a:prstGeom prst="rect">
-            <a:avLst/>
-          </a:prstGeom>
-          <a:noFill/>
-          <a:ln/>
-        </p:spPr>
-        <p:txBody>
-          <a:bodyPr wrap="square" rtlCol="0" anchor="ctr"/>
-          <a:lstStyle/>
-          <a:p>
-            <a:pPr indent="0" marL="0">
-              <a:buNone/>
-            </a:pPr>
-            <a:r>
-              <a:rPr lang="en-US" sz="950" b="1" spc="150" kern="0" dirty="0">
-                <a:solidFill>
-                  <a:srgbClr val="C8820A"/>
+            <a:off x="274320" y="2999232"/>
+            <a:ext cx="1710900" cy="365760"/>
+          </a:xfrm>
+          <a:prstGeom prst="rect">
+            <a:avLst/>
+          </a:prstGeom>
+          <a:noFill/>
+          <a:ln/>
+        </p:spPr>
+        <p:txBody>
+          <a:bodyPr wrap="square" rtlCol="0" anchor="ctr"/>
+          <a:lstStyle/>
+          <a:p>
+            <a:pPr algn="ctr" indent="0" marL="0">
+              <a:buNone/>
+            </a:pPr>
+            <a:r>
+              <a:rPr lang="en-US" sz="1000" spc="50" kern="0" dirty="0">
+                <a:solidFill>
+                  <a:srgbClr val="8A7055"/>
                 </a:solidFill>
                 <a:latin typeface="Calibri" pitchFamily="34" charset="0"/>
                 <a:ea typeface="Calibri" pitchFamily="34" charset="-122"/>
                 <a:cs typeface="Calibri" pitchFamily="34" charset="-120"/>
               </a:rPr>
-              <a:t>WARUM PAULUS ENTSCHEIDEND WAR</a:t>
-            </a:r>
-            <a:endParaRPr lang="en-US" sz="950" dirty="0"/>
-          </a:p>
-        </p:txBody>
-      </p:sp>
-      <p:sp>
-        <p:nvSpPr>
-          <p:cNvPr id="14" name="Text 7"/>
-          <p:cNvSpPr/>
-          <p:nvPr/>
-        </p:nvSpPr>
-        <p:spPr>
-          <a:xfrm>
-            <a:off x="411480" y="3127248"/>
-            <a:ext cx="4998595" cy="768096"/>
-          </a:xfrm>
-          <a:prstGeom prst="rect">
-            <a:avLst/>
-          </a:prstGeom>
-          <a:noFill/>
-          <a:ln/>
-        </p:spPr>
-        <p:txBody>
-          <a:bodyPr wrap="square" rtlCol="0" anchor="ctr"/>
-          <a:lstStyle/>
-          <a:p>
-            <a:pPr indent="0" marL="0">
-              <a:lnSpc>
-                <a:spcPct val="135000"/>
-              </a:lnSpc>
-              <a:buNone/>
-            </a:pPr>
-            <a:r>
-              <a:rPr lang="en-US" sz="1150" dirty="0">
-                <a:solidFill>
-                  <a:srgbClr val="C4A882"/>
+              <a:t>NT-Bücher</a:t>
+            </a:r>
+            <a:endParaRPr lang="en-US" sz="1000" dirty="0"/>
+          </a:p>
+        </p:txBody>
+      </p:sp>
+      <p:sp>
+        <p:nvSpPr>
+          <p:cNvPr id="14" name="Shape 7"/>
+          <p:cNvSpPr/>
+          <p:nvPr/>
+        </p:nvSpPr>
+        <p:spPr>
+          <a:xfrm>
+            <a:off x="2040084" y="2423160"/>
+            <a:ext cx="1710900" cy="1024128"/>
+          </a:xfrm>
+          <a:prstGeom prst="rect">
+            <a:avLst/>
+          </a:prstGeom>
+          <a:solidFill>
+            <a:srgbClr val="0F0B07">
+              <a:alpha val="82000"/>
+            </a:srgbClr>
+          </a:solidFill>
+          <a:ln w="10160">
+            <a:solidFill>
+              <a:srgbClr val="C8820A">
+                <a:alpha val="35000"/>
+              </a:srgbClr>
+            </a:solidFill>
+            <a:prstDash val="solid"/>
+          </a:ln>
+        </p:spPr>
+      </p:sp>
+      <p:sp>
+        <p:nvSpPr>
+          <p:cNvPr id="15" name="Shape 8"/>
+          <p:cNvSpPr/>
+          <p:nvPr/>
+        </p:nvSpPr>
+        <p:spPr>
+          <a:xfrm>
+            <a:off x="2040084" y="2423160"/>
+            <a:ext cx="1710900" cy="18288"/>
+          </a:xfrm>
+          <a:prstGeom prst="rect">
+            <a:avLst/>
+          </a:prstGeom>
+          <a:solidFill>
+            <a:srgbClr val="C8820A">
+              <a:alpha val="50000"/>
+            </a:srgbClr>
+          </a:solidFill>
+          <a:ln/>
+        </p:spPr>
+      </p:sp>
+      <p:sp>
+        <p:nvSpPr>
+          <p:cNvPr id="16" name="Text 9"/>
+          <p:cNvSpPr/>
+          <p:nvPr/>
+        </p:nvSpPr>
+        <p:spPr>
+          <a:xfrm>
+            <a:off x="2040084" y="2487168"/>
+            <a:ext cx="1710900" cy="512064"/>
+          </a:xfrm>
+          <a:prstGeom prst="rect">
+            <a:avLst/>
+          </a:prstGeom>
+          <a:noFill/>
+          <a:ln/>
+          <a:effectLst>
+            <a:outerShdw sx="100000" sy="100000" kx="0" ky="0" algn="bl" rotWithShape="0" blurRad="127000" dist="50800" dir="16200000">
+              <a:srgbClr val="C8820A">
+                <a:alpha val="50000"/>
+              </a:srgbClr>
+            </a:outerShdw>
+          </a:effectLst>
+        </p:spPr>
+        <p:txBody>
+          <a:bodyPr wrap="square" rtlCol="0" anchor="ctr"/>
+          <a:lstStyle/>
+          <a:p>
+            <a:pPr algn="ctr" indent="0" marL="0">
+              <a:buNone/>
+            </a:pPr>
+            <a:r>
+              <a:rPr lang="en-US" sz="2800" b="1" dirty="0">
+                <a:solidFill>
+                  <a:srgbClr val="F0C060"/>
+                </a:solidFill>
+                <a:latin typeface="Georgia" pitchFamily="34" charset="0"/>
+                <a:ea typeface="Georgia" pitchFamily="34" charset="-122"/>
+                <a:cs typeface="Georgia" pitchFamily="34" charset="-120"/>
+              </a:rPr>
+              <a:t>3</a:t>
+            </a:r>
+            <a:endParaRPr lang="en-US" sz="2800" dirty="0"/>
+          </a:p>
+        </p:txBody>
+      </p:sp>
+      <p:sp>
+        <p:nvSpPr>
+          <p:cNvPr id="17" name="Text 10"/>
+          <p:cNvSpPr/>
+          <p:nvPr/>
+        </p:nvSpPr>
+        <p:spPr>
+          <a:xfrm>
+            <a:off x="2040084" y="2999232"/>
+            <a:ext cx="1710900" cy="365760"/>
+          </a:xfrm>
+          <a:prstGeom prst="rect">
+            <a:avLst/>
+          </a:prstGeom>
+          <a:noFill/>
+          <a:ln/>
+        </p:spPr>
+        <p:txBody>
+          <a:bodyPr wrap="square" rtlCol="0" anchor="ctr"/>
+          <a:lstStyle/>
+          <a:p>
+            <a:pPr algn="ctr" indent="0" marL="0">
+              <a:buNone/>
+            </a:pPr>
+            <a:r>
+              <a:rPr lang="en-US" sz="1000" spc="50" kern="0" dirty="0">
+                <a:solidFill>
+                  <a:srgbClr val="8A7055"/>
                 </a:solidFill>
                 <a:latin typeface="Calibri" pitchFamily="34" charset="0"/>
                 <a:ea typeface="Calibri" pitchFamily="34" charset="-122"/>
                 <a:cs typeface="Calibri" pitchFamily="34" charset="-120"/>
               </a:rPr>
-              <a:t>Vor Paulus: Christentum = jüdische Sekte in Judäa.</a:t>
-            </a:r>
-            <a:endParaRPr lang="en-US" sz="1150" dirty="0"/>
-          </a:p>
-          <a:p>
-            <a:pPr indent="0" marL="0">
-              <a:lnSpc>
-                <a:spcPct val="135000"/>
-              </a:lnSpc>
-              <a:buNone/>
-            </a:pPr>
-            <a:r>
-              <a:rPr lang="en-US" sz="1150" dirty="0">
-                <a:solidFill>
-                  <a:srgbClr val="C4A882"/>
+              <a:t>Missionsreisen</a:t>
+            </a:r>
+            <a:endParaRPr lang="en-US" sz="1000" dirty="0"/>
+          </a:p>
+        </p:txBody>
+      </p:sp>
+      <p:sp>
+        <p:nvSpPr>
+          <p:cNvPr id="18" name="Shape 11"/>
+          <p:cNvSpPr/>
+          <p:nvPr/>
+        </p:nvSpPr>
+        <p:spPr>
+          <a:xfrm>
+            <a:off x="3805849" y="2423160"/>
+            <a:ext cx="1710900" cy="1024128"/>
+          </a:xfrm>
+          <a:prstGeom prst="rect">
+            <a:avLst/>
+          </a:prstGeom>
+          <a:solidFill>
+            <a:srgbClr val="0F0B07">
+              <a:alpha val="82000"/>
+            </a:srgbClr>
+          </a:solidFill>
+          <a:ln w="10160">
+            <a:solidFill>
+              <a:srgbClr val="C8820A">
+                <a:alpha val="35000"/>
+              </a:srgbClr>
+            </a:solidFill>
+            <a:prstDash val="solid"/>
+          </a:ln>
+        </p:spPr>
+      </p:sp>
+      <p:sp>
+        <p:nvSpPr>
+          <p:cNvPr id="19" name="Shape 12"/>
+          <p:cNvSpPr/>
+          <p:nvPr/>
+        </p:nvSpPr>
+        <p:spPr>
+          <a:xfrm>
+            <a:off x="3805849" y="2423160"/>
+            <a:ext cx="1710900" cy="18288"/>
+          </a:xfrm>
+          <a:prstGeom prst="rect">
+            <a:avLst/>
+          </a:prstGeom>
+          <a:solidFill>
+            <a:srgbClr val="C8820A">
+              <a:alpha val="50000"/>
+            </a:srgbClr>
+          </a:solidFill>
+          <a:ln/>
+        </p:spPr>
+      </p:sp>
+      <p:sp>
+        <p:nvSpPr>
+          <p:cNvPr id="20" name="Text 13"/>
+          <p:cNvSpPr/>
+          <p:nvPr/>
+        </p:nvSpPr>
+        <p:spPr>
+          <a:xfrm>
+            <a:off x="3805849" y="2487168"/>
+            <a:ext cx="1710900" cy="512064"/>
+          </a:xfrm>
+          <a:prstGeom prst="rect">
+            <a:avLst/>
+          </a:prstGeom>
+          <a:noFill/>
+          <a:ln/>
+          <a:effectLst>
+            <a:outerShdw sx="100000" sy="100000" kx="0" ky="0" algn="bl" rotWithShape="0" blurRad="127000" dist="50800" dir="16200000">
+              <a:srgbClr val="C8820A">
+                <a:alpha val="50000"/>
+              </a:srgbClr>
+            </a:outerShdw>
+          </a:effectLst>
+        </p:spPr>
+        <p:txBody>
+          <a:bodyPr wrap="square" rtlCol="0" anchor="ctr"/>
+          <a:lstStyle/>
+          <a:p>
+            <a:pPr algn="ctr" indent="0" marL="0">
+              <a:buNone/>
+            </a:pPr>
+            <a:r>
+              <a:rPr lang="en-US" sz="2800" b="1" dirty="0">
+                <a:solidFill>
+                  <a:srgbClr val="F0C060"/>
+                </a:solidFill>
+                <a:latin typeface="Georgia" pitchFamily="34" charset="0"/>
+                <a:ea typeface="Georgia" pitchFamily="34" charset="-122"/>
+                <a:cs typeface="Georgia" pitchFamily="34" charset="-120"/>
+              </a:rPr>
+              <a:t>~30 J.</a:t>
+            </a:r>
+            <a:endParaRPr lang="en-US" sz="2800" dirty="0"/>
+          </a:p>
+        </p:txBody>
+      </p:sp>
+      <p:sp>
+        <p:nvSpPr>
+          <p:cNvPr id="21" name="Text 14"/>
+          <p:cNvSpPr/>
+          <p:nvPr/>
+        </p:nvSpPr>
+        <p:spPr>
+          <a:xfrm>
+            <a:off x="3805849" y="2999232"/>
+            <a:ext cx="1710900" cy="365760"/>
+          </a:xfrm>
+          <a:prstGeom prst="rect">
+            <a:avLst/>
+          </a:prstGeom>
+          <a:noFill/>
+          <a:ln/>
+        </p:spPr>
+        <p:txBody>
+          <a:bodyPr wrap="square" rtlCol="0" anchor="ctr"/>
+          <a:lstStyle/>
+          <a:p>
+            <a:pPr algn="ctr" indent="0" marL="0">
+              <a:buNone/>
+            </a:pPr>
+            <a:r>
+              <a:rPr lang="en-US" sz="1000" spc="50" kern="0" dirty="0">
+                <a:solidFill>
+                  <a:srgbClr val="8A7055"/>
                 </a:solidFill>
                 <a:latin typeface="Calibri" pitchFamily="34" charset="0"/>
                 <a:ea typeface="Calibri" pitchFamily="34" charset="-122"/>
                 <a:cs typeface="Calibri" pitchFamily="34" charset="-120"/>
               </a:rPr>
-              <a:t>Nach Paulus: Weltweite Bewegung mit Gemeinden von Jerusalem bis Rom.</a:t>
-            </a:r>
-            <a:endParaRPr lang="en-US" sz="1150" dirty="0"/>
-          </a:p>
-          <a:p>
-            <a:pPr indent="0" marL="0">
-              <a:lnSpc>
-                <a:spcPct val="135000"/>
-              </a:lnSpc>
-              <a:buNone/>
-            </a:pPr>
-            <a:r>
-              <a:rPr lang="en-US" sz="1150" dirty="0">
-                <a:solidFill>
-                  <a:srgbClr val="C4A882"/>
-                </a:solidFill>
-                <a:latin typeface="Calibri" pitchFamily="34" charset="0"/>
-                <a:ea typeface="Calibri" pitchFamily="34" charset="-122"/>
-                <a:cs typeface="Calibri" pitchFamily="34" charset="-120"/>
-              </a:rPr>
-              <a:t>Areopag-Rede in Athen: Er zitiert griechische Dichter, um Griechen zu erreichen — Inkulturation als Methode.</a:t>
-            </a:r>
-            <a:endParaRPr lang="en-US" sz="1150" dirty="0"/>
-          </a:p>
-        </p:txBody>
-      </p:sp>
-      <p:sp>
-        <p:nvSpPr>
-          <p:cNvPr id="15" name="Text 8"/>
-          <p:cNvSpPr/>
-          <p:nvPr/>
-        </p:nvSpPr>
-        <p:spPr>
-          <a:xfrm>
-            <a:off x="6095848" y="256032"/>
-            <a:ext cx="5821528" cy="320040"/>
-          </a:xfrm>
-          <a:prstGeom prst="rect">
-            <a:avLst/>
-          </a:prstGeom>
-          <a:noFill/>
-          <a:ln/>
-        </p:spPr>
-        <p:txBody>
-          <a:bodyPr wrap="square" rtlCol="0" anchor="ctr"/>
-          <a:lstStyle/>
-          <a:p>
-            <a:pPr indent="0" marL="0">
-              <a:buNone/>
-            </a:pPr>
-            <a:r>
-              <a:rPr lang="en-US" sz="1000" b="1" spc="150" kern="0" dirty="0">
-                <a:solidFill>
-                  <a:srgbClr val="C8820A"/>
-                </a:solidFill>
-                <a:latin typeface="Calibri" pitchFamily="34" charset="0"/>
-                <a:ea typeface="Calibri" pitchFamily="34" charset="-122"/>
-                <a:cs typeface="Calibri" pitchFamily="34" charset="-120"/>
-              </a:rPr>
-              <a:t>PAULUS’ MISSIONSSTATIONEN (45–67 n. Chr.)</a:t>
+              <a:t>aktiv als Missionar</a:t>
             </a:r>
             <a:endParaRPr lang="en-US" sz="1000" dirty="0"/>
           </a:p>
@@ -5759,7 +5917,7 @@
       </p:sp>
       <p:pic>
         <p:nvPicPr>
-          <p:cNvPr id="16" name="Image 5" descr="preencoded.png">    </p:cNvPr>
+          <p:cNvPr id="22" name="Image 5" descr="preencoded.png">    </p:cNvPr>
           <p:cNvPicPr>
             <a:picLocks noChangeAspect="1"/>
           </p:cNvPicPr>
@@ -5779,8 +5937,8 @@
         </p:blipFill>
         <p:spPr>
           <a:xfrm>
-            <a:off x="6169000" y="713232"/>
-            <a:ext cx="329184" cy="329184"/>
+            <a:off x="274320" y="3566160"/>
+            <a:ext cx="5242429" cy="32004"/>
           </a:xfrm>
           <a:prstGeom prst="rect">
             <a:avLst/>
@@ -5789,37 +5947,65 @@
       </p:pic>
       <p:sp>
         <p:nvSpPr>
-          <p:cNvPr id="17" name="Shape 9"/>
-          <p:cNvSpPr/>
-          <p:nvPr/>
-        </p:nvSpPr>
-        <p:spPr>
-          <a:xfrm>
-            <a:off x="6333592" y="1042416"/>
-            <a:ext cx="0" cy="768096"/>
-          </a:xfrm>
-          <a:prstGeom prst="line">
-            <a:avLst/>
-          </a:prstGeom>
-          <a:noFill/>
-          <a:ln w="12700">
+          <p:cNvPr id="23" name="Shape 15"/>
+          <p:cNvSpPr/>
+          <p:nvPr/>
+        </p:nvSpPr>
+        <p:spPr>
+          <a:xfrm>
+            <a:off x="274320" y="3694176"/>
+            <a:ext cx="5242429" cy="2560320"/>
+          </a:xfrm>
+          <a:prstGeom prst="rect">
+            <a:avLst/>
+          </a:prstGeom>
+          <a:solidFill>
+            <a:srgbClr val="0F0B07">
+              <a:alpha val="82000"/>
+            </a:srgbClr>
+          </a:solidFill>
+          <a:ln w="10160">
             <a:solidFill>
-              <a:srgbClr val="6B4A0F"/>
+              <a:srgbClr val="C8820A">
+                <a:alpha val="38000"/>
+              </a:srgbClr>
             </a:solidFill>
-            <a:prstDash val="dash"/>
+            <a:prstDash val="solid"/>
           </a:ln>
         </p:spPr>
       </p:sp>
       <p:sp>
         <p:nvSpPr>
-          <p:cNvPr id="18" name="Text 10"/>
-          <p:cNvSpPr/>
-          <p:nvPr/>
-        </p:nvSpPr>
-        <p:spPr>
-          <a:xfrm>
-            <a:off x="6598768" y="694944"/>
-            <a:ext cx="2286000" cy="274320"/>
+          <p:cNvPr id="24" name="Shape 16"/>
+          <p:cNvSpPr/>
+          <p:nvPr/>
+        </p:nvSpPr>
+        <p:spPr>
+          <a:xfrm>
+            <a:off x="274320" y="3694176"/>
+            <a:ext cx="5242429" cy="18288"/>
+          </a:xfrm>
+          <a:prstGeom prst="rect">
+            <a:avLst/>
+          </a:prstGeom>
+          <a:solidFill>
+            <a:srgbClr val="C8820A">
+              <a:alpha val="50000"/>
+            </a:srgbClr>
+          </a:solidFill>
+          <a:ln/>
+        </p:spPr>
+      </p:sp>
+      <p:sp>
+        <p:nvSpPr>
+          <p:cNvPr id="25" name="Text 17"/>
+          <p:cNvSpPr/>
+          <p:nvPr/>
+        </p:nvSpPr>
+        <p:spPr>
+          <a:xfrm>
+            <a:off x="402336" y="3767328"/>
+            <a:ext cx="4986397" cy="237744"/>
           </a:xfrm>
           <a:prstGeom prst="rect">
             <a:avLst/>
@@ -5835,65 +6021,23 @@
               <a:buNone/>
             </a:pPr>
             <a:r>
-              <a:rPr lang="en-US" sz="1250" b="1" spc="150" kern="0" dirty="0">
-                <a:solidFill>
-                  <a:srgbClr val="F5EBD8"/>
-                </a:solidFill>
-                <a:latin typeface="Georgia" pitchFamily="34" charset="0"/>
-                <a:ea typeface="Georgia" pitchFamily="34" charset="-122"/>
-                <a:cs typeface="Georgia" pitchFamily="34" charset="-120"/>
-              </a:rPr>
-              <a:t>ANTIOCHIA</a:t>
-            </a:r>
-            <a:endParaRPr lang="en-US" sz="1250" dirty="0"/>
-          </a:p>
-        </p:txBody>
-      </p:sp>
-      <p:sp>
-        <p:nvSpPr>
-          <p:cNvPr id="19" name="Text 11"/>
-          <p:cNvSpPr/>
-          <p:nvPr/>
-        </p:nvSpPr>
-        <p:spPr>
-          <a:xfrm>
-            <a:off x="6598768" y="969264"/>
-            <a:ext cx="5318608" cy="713232"/>
-          </a:xfrm>
-          <a:prstGeom prst="rect">
-            <a:avLst/>
-          </a:prstGeom>
-          <a:noFill/>
-          <a:ln/>
-        </p:spPr>
-        <p:txBody>
-          <a:bodyPr wrap="square" rtlCol="0" anchor="ctr"/>
-          <a:lstStyle/>
-          <a:p>
-            <a:pPr indent="0" marL="0">
-              <a:lnSpc>
-                <a:spcPct val="132000"/>
-              </a:lnSpc>
-              <a:buNone/>
-            </a:pPr>
-            <a:r>
-              <a:rPr lang="en-US" sz="1150" dirty="0">
-                <a:solidFill>
-                  <a:srgbClr val="C4A882"/>
+              <a:rPr lang="en-US" sz="950" b="1" spc="150" kern="0" dirty="0">
+                <a:solidFill>
+                  <a:srgbClr val="C8820A"/>
                 </a:solidFill>
                 <a:latin typeface="Calibri" pitchFamily="34" charset="0"/>
                 <a:ea typeface="Calibri" pitchFamily="34" charset="-122"/>
                 <a:cs typeface="Calibri" pitchFamily="34" charset="-120"/>
               </a:rPr>
-              <a:t>Hier werden Anhänger Jesu erstmals "Christen" genannt (~45 n. Chr.).</a:t>
-            </a:r>
-            <a:endParaRPr lang="en-US" sz="1150" dirty="0"/>
+              <a:t>WAS PAULUS VERÄNDERTE</a:t>
+            </a:r>
+            <a:endParaRPr lang="en-US" sz="950" dirty="0"/>
           </a:p>
         </p:txBody>
       </p:sp>
       <p:pic>
         <p:nvPicPr>
-          <p:cNvPr id="20" name="Image 6" descr="preencoded.png">    </p:cNvPr>
+          <p:cNvPr id="26" name="Image 6" descr="preencoded.png">    </p:cNvPr>
           <p:cNvPicPr>
             <a:picLocks noChangeAspect="1"/>
           </p:cNvPicPr>
@@ -5913,8 +6057,8 @@
         </p:blipFill>
         <p:spPr>
           <a:xfrm>
-            <a:off x="6169000" y="1847088"/>
-            <a:ext cx="329184" cy="329184"/>
+            <a:off x="402336" y="4041648"/>
+            <a:ext cx="4986397" cy="18288"/>
           </a:xfrm>
           <a:prstGeom prst="rect">
             <a:avLst/>
@@ -5923,37 +6067,14 @@
       </p:pic>
       <p:sp>
         <p:nvSpPr>
-          <p:cNvPr id="21" name="Shape 12"/>
-          <p:cNvSpPr/>
-          <p:nvPr/>
-        </p:nvSpPr>
-        <p:spPr>
-          <a:xfrm>
-            <a:off x="6333592" y="2176272"/>
-            <a:ext cx="0" cy="768096"/>
-          </a:xfrm>
-          <a:prstGeom prst="line">
-            <a:avLst/>
-          </a:prstGeom>
-          <a:noFill/>
-          <a:ln w="12700">
-            <a:solidFill>
-              <a:srgbClr val="6B4A0F"/>
-            </a:solidFill>
-            <a:prstDash val="dash"/>
-          </a:ln>
-        </p:spPr>
-      </p:sp>
-      <p:sp>
-        <p:nvSpPr>
-          <p:cNvPr id="22" name="Text 13"/>
-          <p:cNvSpPr/>
-          <p:nvPr/>
-        </p:nvSpPr>
-        <p:spPr>
-          <a:xfrm>
-            <a:off x="6598768" y="1828800"/>
-            <a:ext cx="2286000" cy="274320"/>
+          <p:cNvPr id="27" name="Text 18"/>
+          <p:cNvSpPr/>
+          <p:nvPr/>
+        </p:nvSpPr>
+        <p:spPr>
+          <a:xfrm>
+            <a:off x="402336" y="4169664"/>
+            <a:ext cx="274320" cy="274320"/>
           </a:xfrm>
           <a:prstGeom prst="rect">
             <a:avLst/>
@@ -5969,30 +6090,30 @@
               <a:buNone/>
             </a:pPr>
             <a:r>
-              <a:rPr lang="en-US" sz="1250" b="1" spc="150" kern="0" dirty="0">
-                <a:solidFill>
-                  <a:srgbClr val="F5EBD8"/>
+              <a:rPr lang="en-US" sz="1300" dirty="0">
+                <a:solidFill>
+                  <a:srgbClr val="C8820A"/>
                 </a:solidFill>
                 <a:latin typeface="Georgia" pitchFamily="34" charset="0"/>
                 <a:ea typeface="Georgia" pitchFamily="34" charset="-122"/>
                 <a:cs typeface="Georgia" pitchFamily="34" charset="-120"/>
               </a:rPr>
-              <a:t>ATHEN</a:t>
-            </a:r>
-            <a:endParaRPr lang="en-US" sz="1250" dirty="0"/>
-          </a:p>
-        </p:txBody>
-      </p:sp>
-      <p:sp>
-        <p:nvSpPr>
-          <p:cNvPr id="23" name="Text 14"/>
-          <p:cNvSpPr/>
-          <p:nvPr/>
-        </p:nvSpPr>
-        <p:spPr>
-          <a:xfrm>
-            <a:off x="6598768" y="2103120"/>
-            <a:ext cx="5318608" cy="713232"/>
+              <a:t>→</a:t>
+            </a:r>
+            <a:endParaRPr lang="en-US" sz="1300" dirty="0"/>
+          </a:p>
+        </p:txBody>
+      </p:sp>
+      <p:sp>
+        <p:nvSpPr>
+          <p:cNvPr id="28" name="Text 19"/>
+          <p:cNvSpPr/>
+          <p:nvPr/>
+        </p:nvSpPr>
+        <p:spPr>
+          <a:xfrm>
+            <a:off x="694944" y="4169664"/>
+            <a:ext cx="2201820" cy="274320"/>
           </a:xfrm>
           <a:prstGeom prst="rect">
             <a:avLst/>
@@ -6005,89 +6126,33 @@
           <a:lstStyle/>
           <a:p>
             <a:pPr indent="0" marL="0">
-              <a:lnSpc>
-                <a:spcPct val="132000"/>
-              </a:lnSpc>
-              <a:buNone/>
-            </a:pPr>
-            <a:r>
-              <a:rPr lang="en-US" sz="1150" dirty="0">
-                <a:solidFill>
-                  <a:srgbClr val="C4A882"/>
+              <a:buNone/>
+            </a:pPr>
+            <a:r>
+              <a:rPr lang="en-US" sz="1150" i="1" dirty="0">
+                <a:solidFill>
+                  <a:srgbClr val="8A7055"/>
                 </a:solidFill>
                 <a:latin typeface="Calibri" pitchFamily="34" charset="0"/>
                 <a:ea typeface="Calibri" pitchFamily="34" charset="-122"/>
                 <a:cs typeface="Calibri" pitchFamily="34" charset="-120"/>
               </a:rPr>
-              <a:t>Areopag-Rede: zitiert Epimenides &amp; Aratos. Trifft Philosophen auf ihrem eigenen Terrain.</a:t>
+              <a:t>Jüdische Sekte in Judäa</a:t>
             </a:r>
             <a:endParaRPr lang="en-US" sz="1150" dirty="0"/>
           </a:p>
         </p:txBody>
       </p:sp>
-      <p:pic>
-        <p:nvPicPr>
-          <p:cNvPr id="24" name="Image 7" descr="preencoded.png">    </p:cNvPr>
-          <p:cNvPicPr>
-            <a:picLocks noChangeAspect="1"/>
-          </p:cNvPicPr>
-          <p:nvPr/>
-        </p:nvPicPr>
-        <p:blipFill>
-          <a:blip r:embed="rId14">
-            <a:extLst>
-              <a:ext uri="{96DAC541-7B7A-43D3-8B79-37D633B846F1}">
-                <asvg:svgBlip xmlns:asvg="http://schemas.microsoft.com/office/drawing/2016/SVG/main" r:embed="rId15"/>
-              </a:ext>
-            </a:extLst>
-          </a:blip>
-          <a:stretch>
-            <a:fillRect/>
-          </a:stretch>
-        </p:blipFill>
-        <p:spPr>
-          <a:xfrm>
-            <a:off x="6169000" y="2980944"/>
-            <a:ext cx="329184" cy="329184"/>
-          </a:xfrm>
-          <a:prstGeom prst="rect">
-            <a:avLst/>
-          </a:prstGeom>
-        </p:spPr>
-      </p:pic>
-      <p:sp>
-        <p:nvSpPr>
-          <p:cNvPr id="25" name="Shape 15"/>
-          <p:cNvSpPr/>
-          <p:nvPr/>
-        </p:nvSpPr>
-        <p:spPr>
-          <a:xfrm>
-            <a:off x="6333592" y="3310128"/>
-            <a:ext cx="0" cy="768096"/>
-          </a:xfrm>
-          <a:prstGeom prst="line">
-            <a:avLst/>
-          </a:prstGeom>
-          <a:noFill/>
-          <a:ln w="12700">
-            <a:solidFill>
-              <a:srgbClr val="6B4A0F"/>
-            </a:solidFill>
-            <a:prstDash val="dash"/>
-          </a:ln>
-        </p:spPr>
-      </p:sp>
-      <p:sp>
-        <p:nvSpPr>
-          <p:cNvPr id="26" name="Text 16"/>
-          <p:cNvSpPr/>
-          <p:nvPr/>
-        </p:nvSpPr>
-        <p:spPr>
-          <a:xfrm>
-            <a:off x="6598768" y="2962656"/>
-            <a:ext cx="2286000" cy="274320"/>
+      <p:sp>
+        <p:nvSpPr>
+          <p:cNvPr id="29" name="Text 20"/>
+          <p:cNvSpPr/>
+          <p:nvPr/>
+        </p:nvSpPr>
+        <p:spPr>
+          <a:xfrm>
+            <a:off x="3001613" y="4169664"/>
+            <a:ext cx="2306669" cy="274320"/>
           </a:xfrm>
           <a:prstGeom prst="rect">
             <a:avLst/>
@@ -6103,30 +6168,69 @@
               <a:buNone/>
             </a:pPr>
             <a:r>
-              <a:rPr lang="en-US" sz="1250" b="1" spc="150" kern="0" dirty="0">
-                <a:solidFill>
-                  <a:srgbClr val="F5EBD8"/>
+              <a:rPr lang="en-US" sz="1150" b="1" dirty="0">
+                <a:solidFill>
+                  <a:srgbClr val="C4A882"/>
+                </a:solidFill>
+                <a:latin typeface="Calibri" pitchFamily="34" charset="0"/>
+                <a:ea typeface="Calibri" pitchFamily="34" charset="-122"/>
+                <a:cs typeface="Calibri" pitchFamily="34" charset="-120"/>
+              </a:rPr>
+              <a:t>Weltweite Bewegung</a:t>
+            </a:r>
+            <a:endParaRPr lang="en-US" sz="1150" dirty="0"/>
+          </a:p>
+        </p:txBody>
+      </p:sp>
+      <p:sp>
+        <p:nvSpPr>
+          <p:cNvPr id="30" name="Text 21"/>
+          <p:cNvSpPr/>
+          <p:nvPr/>
+        </p:nvSpPr>
+        <p:spPr>
+          <a:xfrm>
+            <a:off x="402336" y="4882896"/>
+            <a:ext cx="274320" cy="274320"/>
+          </a:xfrm>
+          <a:prstGeom prst="rect">
+            <a:avLst/>
+          </a:prstGeom>
+          <a:noFill/>
+          <a:ln/>
+        </p:spPr>
+        <p:txBody>
+          <a:bodyPr wrap="square" rtlCol="0" anchor="ctr"/>
+          <a:lstStyle/>
+          <a:p>
+            <a:pPr indent="0" marL="0">
+              <a:buNone/>
+            </a:pPr>
+            <a:r>
+              <a:rPr lang="en-US" sz="1300" dirty="0">
+                <a:solidFill>
+                  <a:srgbClr val="C8820A"/>
                 </a:solidFill>
                 <a:latin typeface="Georgia" pitchFamily="34" charset="0"/>
                 <a:ea typeface="Georgia" pitchFamily="34" charset="-122"/>
                 <a:cs typeface="Georgia" pitchFamily="34" charset="-120"/>
               </a:rPr>
-              <a:t>KORINTH</a:t>
-            </a:r>
-            <a:endParaRPr lang="en-US" sz="1250" dirty="0"/>
-          </a:p>
-        </p:txBody>
-      </p:sp>
-      <p:sp>
-        <p:nvSpPr>
-          <p:cNvPr id="27" name="Text 17"/>
-          <p:cNvSpPr/>
-          <p:nvPr/>
-        </p:nvSpPr>
-        <p:spPr>
-          <a:xfrm>
-            <a:off x="6598768" y="3236976"/>
-            <a:ext cx="5318608" cy="713232"/>
+              <a:t>→</a:t>
+            </a:r>
+            <a:endParaRPr lang="en-US" sz="1300" dirty="0"/>
+          </a:p>
+        </p:txBody>
+      </p:sp>
+      <p:sp>
+        <p:nvSpPr>
+          <p:cNvPr id="31" name="Text 22"/>
+          <p:cNvSpPr/>
+          <p:nvPr/>
+        </p:nvSpPr>
+        <p:spPr>
+          <a:xfrm>
+            <a:off x="694944" y="4882896"/>
+            <a:ext cx="2201820" cy="274320"/>
           </a:xfrm>
           <a:prstGeom prst="rect">
             <a:avLst/>
@@ -6139,89 +6243,33 @@
           <a:lstStyle/>
           <a:p>
             <a:pPr indent="0" marL="0">
-              <a:lnSpc>
-                <a:spcPct val="132000"/>
-              </a:lnSpc>
-              <a:buNone/>
-            </a:pPr>
-            <a:r>
-              <a:rPr lang="en-US" sz="1150" dirty="0">
-                <a:solidFill>
-                  <a:srgbClr val="C4A882"/>
+              <a:buNone/>
+            </a:pPr>
+            <a:r>
+              <a:rPr lang="en-US" sz="1150" i="1" dirty="0">
+                <a:solidFill>
+                  <a:srgbClr val="8A7055"/>
                 </a:solidFill>
                 <a:latin typeface="Calibri" pitchFamily="34" charset="0"/>
                 <a:ea typeface="Calibri" pitchFamily="34" charset="-122"/>
                 <a:cs typeface="Calibri" pitchFamily="34" charset="-120"/>
               </a:rPr>
-              <a:t>18 Monate. Wichtigste Handelsstadt. Brief an die Korinther folgt Jahre später.</a:t>
+              <a:t>Nur für Beschnittene</a:t>
             </a:r>
             <a:endParaRPr lang="en-US" sz="1150" dirty="0"/>
           </a:p>
         </p:txBody>
       </p:sp>
-      <p:pic>
-        <p:nvPicPr>
-          <p:cNvPr id="28" name="Image 8" descr="preencoded.png">    </p:cNvPr>
-          <p:cNvPicPr>
-            <a:picLocks noChangeAspect="1"/>
-          </p:cNvPicPr>
-          <p:nvPr/>
-        </p:nvPicPr>
-        <p:blipFill>
-          <a:blip r:embed="rId16">
-            <a:extLst>
-              <a:ext uri="{96DAC541-7B7A-43D3-8B79-37D633B846F1}">
-                <asvg:svgBlip xmlns:asvg="http://schemas.microsoft.com/office/drawing/2016/SVG/main" r:embed="rId17"/>
-              </a:ext>
-            </a:extLst>
-          </a:blip>
-          <a:stretch>
-            <a:fillRect/>
-          </a:stretch>
-        </p:blipFill>
-        <p:spPr>
-          <a:xfrm>
-            <a:off x="6169000" y="4114800"/>
-            <a:ext cx="329184" cy="329184"/>
-          </a:xfrm>
-          <a:prstGeom prst="rect">
-            <a:avLst/>
-          </a:prstGeom>
-        </p:spPr>
-      </p:pic>
-      <p:sp>
-        <p:nvSpPr>
-          <p:cNvPr id="29" name="Shape 18"/>
-          <p:cNvSpPr/>
-          <p:nvPr/>
-        </p:nvSpPr>
-        <p:spPr>
-          <a:xfrm>
-            <a:off x="6333592" y="4443984"/>
-            <a:ext cx="0" cy="768096"/>
-          </a:xfrm>
-          <a:prstGeom prst="line">
-            <a:avLst/>
-          </a:prstGeom>
-          <a:noFill/>
-          <a:ln w="12700">
-            <a:solidFill>
-              <a:srgbClr val="6B4A0F"/>
-            </a:solidFill>
-            <a:prstDash val="dash"/>
-          </a:ln>
-        </p:spPr>
-      </p:sp>
-      <p:sp>
-        <p:nvSpPr>
-          <p:cNvPr id="30" name="Text 19"/>
-          <p:cNvSpPr/>
-          <p:nvPr/>
-        </p:nvSpPr>
-        <p:spPr>
-          <a:xfrm>
-            <a:off x="6598768" y="4096512"/>
-            <a:ext cx="2286000" cy="274320"/>
+      <p:sp>
+        <p:nvSpPr>
+          <p:cNvPr id="32" name="Text 23"/>
+          <p:cNvSpPr/>
+          <p:nvPr/>
+        </p:nvSpPr>
+        <p:spPr>
+          <a:xfrm>
+            <a:off x="3001613" y="4882896"/>
+            <a:ext cx="2306669" cy="274320"/>
           </a:xfrm>
           <a:prstGeom prst="rect">
             <a:avLst/>
@@ -6237,30 +6285,69 @@
               <a:buNone/>
             </a:pPr>
             <a:r>
-              <a:rPr lang="en-US" sz="1250" b="1" spc="150" kern="0" dirty="0">
-                <a:solidFill>
-                  <a:srgbClr val="F5EBD8"/>
+              <a:rPr lang="en-US" sz="1150" b="1" dirty="0">
+                <a:solidFill>
+                  <a:srgbClr val="C4A882"/>
+                </a:solidFill>
+                <a:latin typeface="Calibri" pitchFamily="34" charset="0"/>
+                <a:ea typeface="Calibri" pitchFamily="34" charset="-122"/>
+                <a:cs typeface="Calibri" pitchFamily="34" charset="-120"/>
+              </a:rPr>
+              <a:t>Offen für alle Völker</a:t>
+            </a:r>
+            <a:endParaRPr lang="en-US" sz="1150" dirty="0"/>
+          </a:p>
+        </p:txBody>
+      </p:sp>
+      <p:sp>
+        <p:nvSpPr>
+          <p:cNvPr id="33" name="Text 24"/>
+          <p:cNvSpPr/>
+          <p:nvPr/>
+        </p:nvSpPr>
+        <p:spPr>
+          <a:xfrm>
+            <a:off x="402336" y="5596128"/>
+            <a:ext cx="274320" cy="274320"/>
+          </a:xfrm>
+          <a:prstGeom prst="rect">
+            <a:avLst/>
+          </a:prstGeom>
+          <a:noFill/>
+          <a:ln/>
+        </p:spPr>
+        <p:txBody>
+          <a:bodyPr wrap="square" rtlCol="0" anchor="ctr"/>
+          <a:lstStyle/>
+          <a:p>
+            <a:pPr indent="0" marL="0">
+              <a:buNone/>
+            </a:pPr>
+            <a:r>
+              <a:rPr lang="en-US" sz="1300" dirty="0">
+                <a:solidFill>
+                  <a:srgbClr val="C8820A"/>
                 </a:solidFill>
                 <a:latin typeface="Georgia" pitchFamily="34" charset="0"/>
                 <a:ea typeface="Georgia" pitchFamily="34" charset="-122"/>
                 <a:cs typeface="Georgia" pitchFamily="34" charset="-120"/>
               </a:rPr>
-              <a:t>EPHESUS</a:t>
-            </a:r>
-            <a:endParaRPr lang="en-US" sz="1250" dirty="0"/>
-          </a:p>
-        </p:txBody>
-      </p:sp>
-      <p:sp>
-        <p:nvSpPr>
-          <p:cNvPr id="31" name="Text 20"/>
-          <p:cNvSpPr/>
-          <p:nvPr/>
-        </p:nvSpPr>
-        <p:spPr>
-          <a:xfrm>
-            <a:off x="6598768" y="4370832"/>
-            <a:ext cx="5318608" cy="713232"/>
+              <a:t>→</a:t>
+            </a:r>
+            <a:endParaRPr lang="en-US" sz="1300" dirty="0"/>
+          </a:p>
+        </p:txBody>
+      </p:sp>
+      <p:sp>
+        <p:nvSpPr>
+          <p:cNvPr id="34" name="Text 25"/>
+          <p:cNvSpPr/>
+          <p:nvPr/>
+        </p:nvSpPr>
+        <p:spPr>
+          <a:xfrm>
+            <a:off x="694944" y="5596128"/>
+            <a:ext cx="2201820" cy="274320"/>
           </a:xfrm>
           <a:prstGeom prst="rect">
             <a:avLst/>
@@ -6273,66 +6360,33 @@
           <a:lstStyle/>
           <a:p>
             <a:pPr indent="0" marL="0">
-              <a:lnSpc>
-                <a:spcPct val="132000"/>
-              </a:lnSpc>
-              <a:buNone/>
-            </a:pPr>
-            <a:r>
-              <a:rPr lang="en-US" sz="1150" dirty="0">
-                <a:solidFill>
-                  <a:srgbClr val="C4A882"/>
+              <a:buNone/>
+            </a:pPr>
+            <a:r>
+              <a:rPr lang="en-US" sz="1150" i="1" dirty="0">
+                <a:solidFill>
+                  <a:srgbClr val="8A7055"/>
                 </a:solidFill>
                 <a:latin typeface="Calibri" pitchFamily="34" charset="0"/>
                 <a:ea typeface="Calibri" pitchFamily="34" charset="-122"/>
                 <a:cs typeface="Calibri" pitchFamily="34" charset="-120"/>
               </a:rPr>
-              <a:t>3 Jahre Mission gegen den Artemis-Kult. Beinahe-Aufstand der Silberschmiede.</a:t>
+              <a:t>Aramäisch &amp; Hebräisch</a:t>
             </a:r>
             <a:endParaRPr lang="en-US" sz="1150" dirty="0"/>
           </a:p>
         </p:txBody>
       </p:sp>
-      <p:pic>
-        <p:nvPicPr>
-          <p:cNvPr id="32" name="Image 9" descr="preencoded.png">    </p:cNvPr>
-          <p:cNvPicPr>
-            <a:picLocks noChangeAspect="1"/>
-          </p:cNvPicPr>
-          <p:nvPr/>
-        </p:nvPicPr>
-        <p:blipFill>
-          <a:blip r:embed="rId18">
-            <a:extLst>
-              <a:ext uri="{96DAC541-7B7A-43D3-8B79-37D633B846F1}">
-                <asvg:svgBlip xmlns:asvg="http://schemas.microsoft.com/office/drawing/2016/SVG/main" r:embed="rId19"/>
-              </a:ext>
-            </a:extLst>
-          </a:blip>
-          <a:stretch>
-            <a:fillRect/>
-          </a:stretch>
-        </p:blipFill>
-        <p:spPr>
-          <a:xfrm>
-            <a:off x="6169000" y="5248656"/>
-            <a:ext cx="329184" cy="329184"/>
-          </a:xfrm>
-          <a:prstGeom prst="rect">
-            <a:avLst/>
-          </a:prstGeom>
-        </p:spPr>
-      </p:pic>
-      <p:sp>
-        <p:nvSpPr>
-          <p:cNvPr id="33" name="Text 21"/>
-          <p:cNvSpPr/>
-          <p:nvPr/>
-        </p:nvSpPr>
-        <p:spPr>
-          <a:xfrm>
-            <a:off x="6598768" y="5230368"/>
-            <a:ext cx="2286000" cy="274320"/>
+      <p:sp>
+        <p:nvSpPr>
+          <p:cNvPr id="35" name="Text 26"/>
+          <p:cNvSpPr/>
+          <p:nvPr/>
+        </p:nvSpPr>
+        <p:spPr>
+          <a:xfrm>
+            <a:off x="3001613" y="5596128"/>
+            <a:ext cx="2306669" cy="274320"/>
           </a:xfrm>
           <a:prstGeom prst="rect">
             <a:avLst/>
@@ -6348,30 +6402,72 @@
               <a:buNone/>
             </a:pPr>
             <a:r>
-              <a:rPr lang="en-US" sz="1250" b="1" spc="150" kern="0" dirty="0">
-                <a:solidFill>
-                  <a:srgbClr val="F5EBD8"/>
+              <a:rPr lang="en-US" sz="1150" b="1" dirty="0">
+                <a:solidFill>
+                  <a:srgbClr val="C4A882"/>
+                </a:solidFill>
+                <a:latin typeface="Calibri" pitchFamily="34" charset="0"/>
+                <a:ea typeface="Calibri" pitchFamily="34" charset="-122"/>
+                <a:cs typeface="Calibri" pitchFamily="34" charset="-120"/>
+              </a:rPr>
+              <a:t>Griechisch als Missionssprache</a:t>
+            </a:r>
+            <a:endParaRPr lang="en-US" sz="1150" dirty="0"/>
+          </a:p>
+        </p:txBody>
+      </p:sp>
+      <p:sp>
+        <p:nvSpPr>
+          <p:cNvPr id="36" name="Text 27"/>
+          <p:cNvSpPr/>
+          <p:nvPr/>
+        </p:nvSpPr>
+        <p:spPr>
+          <a:xfrm>
+            <a:off x="402336" y="5431536"/>
+            <a:ext cx="4986397" cy="658368"/>
+          </a:xfrm>
+          <a:prstGeom prst="rect">
+            <a:avLst/>
+          </a:prstGeom>
+          <a:noFill/>
+          <a:ln/>
+        </p:spPr>
+        <p:txBody>
+          <a:bodyPr wrap="square" rtlCol="0" anchor="ctr"/>
+          <a:lstStyle/>
+          <a:p>
+            <a:pPr indent="0" marL="0">
+              <a:lnSpc>
+                <a:spcPct val="138000"/>
+              </a:lnSpc>
+              <a:buNone/>
+            </a:pPr>
+            <a:r>
+              <a:rPr lang="en-US" sz="1150" i="1" dirty="0">
+                <a:solidFill>
+                  <a:srgbClr val="D9A441"/>
                 </a:solidFill>
                 <a:latin typeface="Georgia" pitchFamily="34" charset="0"/>
                 <a:ea typeface="Georgia" pitchFamily="34" charset="-122"/>
                 <a:cs typeface="Georgia" pitchFamily="34" charset="-120"/>
               </a:rPr>
-              <a:t>ROM</a:t>
-            </a:r>
-            <a:endParaRPr lang="en-US" sz="1250" dirty="0"/>
-          </a:p>
-        </p:txBody>
-      </p:sp>
-      <p:sp>
-        <p:nvSpPr>
-          <p:cNvPr id="34" name="Text 22"/>
-          <p:cNvSpPr/>
-          <p:nvPr/>
-        </p:nvSpPr>
-        <p:spPr>
-          <a:xfrm>
-            <a:off x="6598768" y="5504688"/>
-            <a:ext cx="5318608" cy="713232"/>
+              <a:t>"Ich bin allen alles geworden, damit ich auf jeden Fall einige rette." — 1 Kor 9,22</a:t>
+            </a:r>
+            <a:endParaRPr lang="en-US" sz="1150" dirty="0"/>
+          </a:p>
+        </p:txBody>
+      </p:sp>
+      <p:sp>
+        <p:nvSpPr>
+          <p:cNvPr id="37" name="Text 28"/>
+          <p:cNvSpPr/>
+          <p:nvPr/>
+        </p:nvSpPr>
+        <p:spPr>
+          <a:xfrm>
+            <a:off x="6034889" y="256032"/>
+            <a:ext cx="5900774" cy="320040"/>
           </a:xfrm>
           <a:prstGeom prst="rect">
             <a:avLst/>
@@ -6384,21 +6480,998 @@
           <a:lstStyle/>
           <a:p>
             <a:pPr indent="0" marL="0">
-              <a:lnSpc>
-                <a:spcPct val="132000"/>
-              </a:lnSpc>
-              <a:buNone/>
-            </a:pPr>
-            <a:r>
-              <a:rPr lang="en-US" sz="1150" dirty="0">
-                <a:solidFill>
-                  <a:srgbClr val="C4A882"/>
+              <a:buNone/>
+            </a:pPr>
+            <a:r>
+              <a:rPr lang="en-US" sz="1000" b="1" spc="150" kern="0" dirty="0">
+                <a:solidFill>
+                  <a:srgbClr val="C8820A"/>
                 </a:solidFill>
                 <a:latin typeface="Calibri" pitchFamily="34" charset="0"/>
                 <a:ea typeface="Calibri" pitchFamily="34" charset="-122"/>
                 <a:cs typeface="Calibri" pitchFamily="34" charset="-120"/>
               </a:rPr>
-              <a:t>Stirbt dort ~67 n. Chr. unter Kaiser Nero. Sein Grab: unter dem Petersdom.</a:t>
+              <a:t>FÜNF STATIONEN SEINER REISE</a:t>
+            </a:r>
+            <a:endParaRPr lang="en-US" sz="1000" dirty="0"/>
+          </a:p>
+        </p:txBody>
+      </p:sp>
+      <p:sp>
+        <p:nvSpPr>
+          <p:cNvPr id="38" name="Shape 29"/>
+          <p:cNvSpPr/>
+          <p:nvPr/>
+        </p:nvSpPr>
+        <p:spPr>
+          <a:xfrm>
+            <a:off x="6034889" y="658368"/>
+            <a:ext cx="5900774" cy="1042416"/>
+          </a:xfrm>
+          <a:prstGeom prst="rect">
+            <a:avLst/>
+          </a:prstGeom>
+          <a:solidFill>
+            <a:srgbClr val="0F0B07">
+              <a:alpha val="80000"/>
+            </a:srgbClr>
+          </a:solidFill>
+          <a:ln w="10160">
+            <a:solidFill>
+              <a:srgbClr val="C8820A">
+                <a:alpha val="40000"/>
+              </a:srgbClr>
+            </a:solidFill>
+            <a:prstDash val="solid"/>
+          </a:ln>
+        </p:spPr>
+      </p:sp>
+      <p:sp>
+        <p:nvSpPr>
+          <p:cNvPr id="39" name="Shape 30"/>
+          <p:cNvSpPr/>
+          <p:nvPr/>
+        </p:nvSpPr>
+        <p:spPr>
+          <a:xfrm>
+            <a:off x="6034889" y="658368"/>
+            <a:ext cx="5900774" cy="18288"/>
+          </a:xfrm>
+          <a:prstGeom prst="rect">
+            <a:avLst/>
+          </a:prstGeom>
+          <a:solidFill>
+            <a:srgbClr val="C8820A">
+              <a:alpha val="50000"/>
+            </a:srgbClr>
+          </a:solidFill>
+          <a:ln/>
+        </p:spPr>
+      </p:sp>
+      <p:sp>
+        <p:nvSpPr>
+          <p:cNvPr id="40" name="Text 31"/>
+          <p:cNvSpPr/>
+          <p:nvPr/>
+        </p:nvSpPr>
+        <p:spPr>
+          <a:xfrm>
+            <a:off x="6162905" y="749808"/>
+            <a:ext cx="1572768" cy="329184"/>
+          </a:xfrm>
+          <a:prstGeom prst="rect">
+            <a:avLst/>
+          </a:prstGeom>
+          <a:noFill/>
+          <a:ln/>
+        </p:spPr>
+        <p:txBody>
+          <a:bodyPr wrap="square" rtlCol="0" anchor="ctr"/>
+          <a:lstStyle/>
+          <a:p>
+            <a:pPr indent="0" marL="0">
+              <a:buNone/>
+            </a:pPr>
+            <a:r>
+              <a:rPr lang="en-US" sz="1350" b="1" spc="100" kern="0" dirty="0">
+                <a:solidFill>
+                  <a:srgbClr val="F5EBD8"/>
+                </a:solidFill>
+                <a:latin typeface="Georgia" pitchFamily="34" charset="0"/>
+                <a:ea typeface="Georgia" pitchFamily="34" charset="-122"/>
+                <a:cs typeface="Georgia" pitchFamily="34" charset="-120"/>
+              </a:rPr>
+              <a:t>ANTIOCHIA</a:t>
+            </a:r>
+            <a:endParaRPr lang="en-US" sz="1350" dirty="0"/>
+          </a:p>
+        </p:txBody>
+      </p:sp>
+      <p:sp>
+        <p:nvSpPr>
+          <p:cNvPr id="41" name="Text 32"/>
+          <p:cNvSpPr/>
+          <p:nvPr/>
+        </p:nvSpPr>
+        <p:spPr>
+          <a:xfrm>
+            <a:off x="6162905" y="1115568"/>
+            <a:ext cx="1572768" cy="237744"/>
+          </a:xfrm>
+          <a:prstGeom prst="rect">
+            <a:avLst/>
+          </a:prstGeom>
+          <a:noFill/>
+          <a:ln/>
+        </p:spPr>
+        <p:txBody>
+          <a:bodyPr wrap="square" rtlCol="0" anchor="ctr"/>
+          <a:lstStyle/>
+          <a:p>
+            <a:pPr indent="0" marL="0">
+              <a:buNone/>
+            </a:pPr>
+            <a:r>
+              <a:rPr lang="en-US" sz="1000" dirty="0">
+                <a:solidFill>
+                  <a:srgbClr val="D9A441"/>
+                </a:solidFill>
+                <a:latin typeface="Calibri" pitchFamily="34" charset="0"/>
+                <a:ea typeface="Calibri" pitchFamily="34" charset="-122"/>
+                <a:cs typeface="Calibri" pitchFamily="34" charset="-120"/>
+              </a:rPr>
+              <a:t>~45 n. Chr.</a:t>
+            </a:r>
+            <a:endParaRPr lang="en-US" sz="1000" dirty="0"/>
+          </a:p>
+        </p:txBody>
+      </p:sp>
+      <p:sp>
+        <p:nvSpPr>
+          <p:cNvPr id="42" name="Shape 33"/>
+          <p:cNvSpPr/>
+          <p:nvPr/>
+        </p:nvSpPr>
+        <p:spPr>
+          <a:xfrm>
+            <a:off x="7900265" y="768096"/>
+            <a:ext cx="0" cy="822960"/>
+          </a:xfrm>
+          <a:prstGeom prst="line">
+            <a:avLst/>
+          </a:prstGeom>
+          <a:noFill/>
+          <a:ln w="10160">
+            <a:solidFill>
+              <a:srgbClr val="6B4A0F">
+                <a:alpha val="50000"/>
+              </a:srgbClr>
+            </a:solidFill>
+            <a:prstDash val="solid"/>
+          </a:ln>
+        </p:spPr>
+      </p:sp>
+      <p:sp>
+        <p:nvSpPr>
+          <p:cNvPr id="43" name="Text 34"/>
+          <p:cNvSpPr/>
+          <p:nvPr/>
+        </p:nvSpPr>
+        <p:spPr>
+          <a:xfrm>
+            <a:off x="8046569" y="749808"/>
+            <a:ext cx="3724502" cy="859536"/>
+          </a:xfrm>
+          <a:prstGeom prst="rect">
+            <a:avLst/>
+          </a:prstGeom>
+          <a:noFill/>
+          <a:ln/>
+        </p:spPr>
+        <p:txBody>
+          <a:bodyPr wrap="square" rtlCol="0" anchor="ctr"/>
+          <a:lstStyle/>
+          <a:p>
+            <a:pPr indent="0" marL="0">
+              <a:lnSpc>
+                <a:spcPct val="134000"/>
+              </a:lnSpc>
+              <a:buNone/>
+            </a:pPr>
+            <a:r>
+              <a:rPr lang="en-US" sz="1150" dirty="0">
+                <a:solidFill>
+                  <a:srgbClr val="C4A882"/>
+                </a:solidFill>
+                <a:latin typeface="Calibri" pitchFamily="34" charset="0"/>
+                <a:ea typeface="Calibri" pitchFamily="34" charset="-122"/>
+                <a:cs typeface="Calibri" pitchFamily="34" charset="-120"/>
+              </a:rPr>
+              <a:t>Hier werden Jesu-Anhänger erstmals „Christen" genannt. Ausgangspunkt aller Missionsreisen.</a:t>
+            </a:r>
+            <a:endParaRPr lang="en-US" sz="1150" dirty="0"/>
+          </a:p>
+        </p:txBody>
+      </p:sp>
+      <p:sp>
+        <p:nvSpPr>
+          <p:cNvPr id="44" name="Shape 35"/>
+          <p:cNvSpPr/>
+          <p:nvPr/>
+        </p:nvSpPr>
+        <p:spPr>
+          <a:xfrm>
+            <a:off x="6034889" y="1773936"/>
+            <a:ext cx="5900774" cy="1042416"/>
+          </a:xfrm>
+          <a:prstGeom prst="rect">
+            <a:avLst/>
+          </a:prstGeom>
+          <a:solidFill>
+            <a:srgbClr val="0F0B07">
+              <a:alpha val="80000"/>
+            </a:srgbClr>
+          </a:solidFill>
+          <a:ln w="10160">
+            <a:solidFill>
+              <a:srgbClr val="C8820A">
+                <a:alpha val="40000"/>
+              </a:srgbClr>
+            </a:solidFill>
+            <a:prstDash val="solid"/>
+          </a:ln>
+        </p:spPr>
+      </p:sp>
+      <p:sp>
+        <p:nvSpPr>
+          <p:cNvPr id="45" name="Shape 36"/>
+          <p:cNvSpPr/>
+          <p:nvPr/>
+        </p:nvSpPr>
+        <p:spPr>
+          <a:xfrm>
+            <a:off x="6034889" y="1773936"/>
+            <a:ext cx="5900774" cy="18288"/>
+          </a:xfrm>
+          <a:prstGeom prst="rect">
+            <a:avLst/>
+          </a:prstGeom>
+          <a:solidFill>
+            <a:srgbClr val="C8820A">
+              <a:alpha val="50000"/>
+            </a:srgbClr>
+          </a:solidFill>
+          <a:ln/>
+        </p:spPr>
+      </p:sp>
+      <p:sp>
+        <p:nvSpPr>
+          <p:cNvPr id="46" name="Text 37"/>
+          <p:cNvSpPr/>
+          <p:nvPr/>
+        </p:nvSpPr>
+        <p:spPr>
+          <a:xfrm>
+            <a:off x="6162905" y="1865376"/>
+            <a:ext cx="1572768" cy="329184"/>
+          </a:xfrm>
+          <a:prstGeom prst="rect">
+            <a:avLst/>
+          </a:prstGeom>
+          <a:noFill/>
+          <a:ln/>
+        </p:spPr>
+        <p:txBody>
+          <a:bodyPr wrap="square" rtlCol="0" anchor="ctr"/>
+          <a:lstStyle/>
+          <a:p>
+            <a:pPr indent="0" marL="0">
+              <a:buNone/>
+            </a:pPr>
+            <a:r>
+              <a:rPr lang="en-US" sz="1350" b="1" spc="100" kern="0" dirty="0">
+                <a:solidFill>
+                  <a:srgbClr val="F5EBD8"/>
+                </a:solidFill>
+                <a:latin typeface="Georgia" pitchFamily="34" charset="0"/>
+                <a:ea typeface="Georgia" pitchFamily="34" charset="-122"/>
+                <a:cs typeface="Georgia" pitchFamily="34" charset="-120"/>
+              </a:rPr>
+              <a:t>ATHEN</a:t>
+            </a:r>
+            <a:endParaRPr lang="en-US" sz="1350" dirty="0"/>
+          </a:p>
+        </p:txBody>
+      </p:sp>
+      <p:sp>
+        <p:nvSpPr>
+          <p:cNvPr id="47" name="Text 38"/>
+          <p:cNvSpPr/>
+          <p:nvPr/>
+        </p:nvSpPr>
+        <p:spPr>
+          <a:xfrm>
+            <a:off x="6162905" y="2231136"/>
+            <a:ext cx="1572768" cy="237744"/>
+          </a:xfrm>
+          <a:prstGeom prst="rect">
+            <a:avLst/>
+          </a:prstGeom>
+          <a:noFill/>
+          <a:ln/>
+        </p:spPr>
+        <p:txBody>
+          <a:bodyPr wrap="square" rtlCol="0" anchor="ctr"/>
+          <a:lstStyle/>
+          <a:p>
+            <a:pPr indent="0" marL="0">
+              <a:buNone/>
+            </a:pPr>
+            <a:r>
+              <a:rPr lang="en-US" sz="1000" dirty="0">
+                <a:solidFill>
+                  <a:srgbClr val="D9A441"/>
+                </a:solidFill>
+                <a:latin typeface="Calibri" pitchFamily="34" charset="0"/>
+                <a:ea typeface="Calibri" pitchFamily="34" charset="-122"/>
+                <a:cs typeface="Calibri" pitchFamily="34" charset="-120"/>
+              </a:rPr>
+              <a:t>~50 n. Chr.</a:t>
+            </a:r>
+            <a:endParaRPr lang="en-US" sz="1000" dirty="0"/>
+          </a:p>
+        </p:txBody>
+      </p:sp>
+      <p:sp>
+        <p:nvSpPr>
+          <p:cNvPr id="48" name="Shape 39"/>
+          <p:cNvSpPr/>
+          <p:nvPr/>
+        </p:nvSpPr>
+        <p:spPr>
+          <a:xfrm>
+            <a:off x="7900265" y="1883664"/>
+            <a:ext cx="0" cy="822960"/>
+          </a:xfrm>
+          <a:prstGeom prst="line">
+            <a:avLst/>
+          </a:prstGeom>
+          <a:noFill/>
+          <a:ln w="10160">
+            <a:solidFill>
+              <a:srgbClr val="6B4A0F">
+                <a:alpha val="50000"/>
+              </a:srgbClr>
+            </a:solidFill>
+            <a:prstDash val="solid"/>
+          </a:ln>
+        </p:spPr>
+      </p:sp>
+      <p:sp>
+        <p:nvSpPr>
+          <p:cNvPr id="49" name="Text 40"/>
+          <p:cNvSpPr/>
+          <p:nvPr/>
+        </p:nvSpPr>
+        <p:spPr>
+          <a:xfrm>
+            <a:off x="8046569" y="1865376"/>
+            <a:ext cx="3724502" cy="859536"/>
+          </a:xfrm>
+          <a:prstGeom prst="rect">
+            <a:avLst/>
+          </a:prstGeom>
+          <a:noFill/>
+          <a:ln/>
+        </p:spPr>
+        <p:txBody>
+          <a:bodyPr wrap="square" rtlCol="0" anchor="ctr"/>
+          <a:lstStyle/>
+          <a:p>
+            <a:pPr indent="0" marL="0">
+              <a:lnSpc>
+                <a:spcPct val="134000"/>
+              </a:lnSpc>
+              <a:buNone/>
+            </a:pPr>
+            <a:r>
+              <a:rPr lang="en-US" sz="1150" dirty="0">
+                <a:solidFill>
+                  <a:srgbClr val="C4A882"/>
+                </a:solidFill>
+                <a:latin typeface="Calibri" pitchFamily="34" charset="0"/>
+                <a:ea typeface="Calibri" pitchFamily="34" charset="-122"/>
+                <a:cs typeface="Calibri" pitchFamily="34" charset="-120"/>
+              </a:rPr>
+              <a:t>Areopag-Rede: Paulus zitiert griechische Dichter, nicht jüdische Schriften. Inkulturation als Methode.</a:t>
+            </a:r>
+            <a:endParaRPr lang="en-US" sz="1150" dirty="0"/>
+          </a:p>
+        </p:txBody>
+      </p:sp>
+      <p:sp>
+        <p:nvSpPr>
+          <p:cNvPr id="50" name="Shape 41"/>
+          <p:cNvSpPr/>
+          <p:nvPr/>
+        </p:nvSpPr>
+        <p:spPr>
+          <a:xfrm>
+            <a:off x="6034889" y="2889504"/>
+            <a:ext cx="5900774" cy="1042416"/>
+          </a:xfrm>
+          <a:prstGeom prst="rect">
+            <a:avLst/>
+          </a:prstGeom>
+          <a:solidFill>
+            <a:srgbClr val="0F0B07">
+              <a:alpha val="80000"/>
+            </a:srgbClr>
+          </a:solidFill>
+          <a:ln w="10160">
+            <a:solidFill>
+              <a:srgbClr val="C8820A">
+                <a:alpha val="40000"/>
+              </a:srgbClr>
+            </a:solidFill>
+            <a:prstDash val="solid"/>
+          </a:ln>
+        </p:spPr>
+      </p:sp>
+      <p:sp>
+        <p:nvSpPr>
+          <p:cNvPr id="51" name="Shape 42"/>
+          <p:cNvSpPr/>
+          <p:nvPr/>
+        </p:nvSpPr>
+        <p:spPr>
+          <a:xfrm>
+            <a:off x="6034889" y="2889504"/>
+            <a:ext cx="5900774" cy="18288"/>
+          </a:xfrm>
+          <a:prstGeom prst="rect">
+            <a:avLst/>
+          </a:prstGeom>
+          <a:solidFill>
+            <a:srgbClr val="C8820A">
+              <a:alpha val="50000"/>
+            </a:srgbClr>
+          </a:solidFill>
+          <a:ln/>
+        </p:spPr>
+      </p:sp>
+      <p:sp>
+        <p:nvSpPr>
+          <p:cNvPr id="52" name="Text 43"/>
+          <p:cNvSpPr/>
+          <p:nvPr/>
+        </p:nvSpPr>
+        <p:spPr>
+          <a:xfrm>
+            <a:off x="6162905" y="2980944"/>
+            <a:ext cx="1572768" cy="329184"/>
+          </a:xfrm>
+          <a:prstGeom prst="rect">
+            <a:avLst/>
+          </a:prstGeom>
+          <a:noFill/>
+          <a:ln/>
+        </p:spPr>
+        <p:txBody>
+          <a:bodyPr wrap="square" rtlCol="0" anchor="ctr"/>
+          <a:lstStyle/>
+          <a:p>
+            <a:pPr indent="0" marL="0">
+              <a:buNone/>
+            </a:pPr>
+            <a:r>
+              <a:rPr lang="en-US" sz="1350" b="1" spc="100" kern="0" dirty="0">
+                <a:solidFill>
+                  <a:srgbClr val="F5EBD8"/>
+                </a:solidFill>
+                <a:latin typeface="Georgia" pitchFamily="34" charset="0"/>
+                <a:ea typeface="Georgia" pitchFamily="34" charset="-122"/>
+                <a:cs typeface="Georgia" pitchFamily="34" charset="-120"/>
+              </a:rPr>
+              <a:t>KORINTH</a:t>
+            </a:r>
+            <a:endParaRPr lang="en-US" sz="1350" dirty="0"/>
+          </a:p>
+        </p:txBody>
+      </p:sp>
+      <p:sp>
+        <p:nvSpPr>
+          <p:cNvPr id="53" name="Text 44"/>
+          <p:cNvSpPr/>
+          <p:nvPr/>
+        </p:nvSpPr>
+        <p:spPr>
+          <a:xfrm>
+            <a:off x="6162905" y="3346704"/>
+            <a:ext cx="1572768" cy="237744"/>
+          </a:xfrm>
+          <a:prstGeom prst="rect">
+            <a:avLst/>
+          </a:prstGeom>
+          <a:noFill/>
+          <a:ln/>
+        </p:spPr>
+        <p:txBody>
+          <a:bodyPr wrap="square" rtlCol="0" anchor="ctr"/>
+          <a:lstStyle/>
+          <a:p>
+            <a:pPr indent="0" marL="0">
+              <a:buNone/>
+            </a:pPr>
+            <a:r>
+              <a:rPr lang="en-US" sz="1000" dirty="0">
+                <a:solidFill>
+                  <a:srgbClr val="D9A441"/>
+                </a:solidFill>
+                <a:latin typeface="Calibri" pitchFamily="34" charset="0"/>
+                <a:ea typeface="Calibri" pitchFamily="34" charset="-122"/>
+                <a:cs typeface="Calibri" pitchFamily="34" charset="-120"/>
+              </a:rPr>
+              <a:t>~51 n. Chr.</a:t>
+            </a:r>
+            <a:endParaRPr lang="en-US" sz="1000" dirty="0"/>
+          </a:p>
+        </p:txBody>
+      </p:sp>
+      <p:sp>
+        <p:nvSpPr>
+          <p:cNvPr id="54" name="Shape 45"/>
+          <p:cNvSpPr/>
+          <p:nvPr/>
+        </p:nvSpPr>
+        <p:spPr>
+          <a:xfrm>
+            <a:off x="7900265" y="2999232"/>
+            <a:ext cx="0" cy="822960"/>
+          </a:xfrm>
+          <a:prstGeom prst="line">
+            <a:avLst/>
+          </a:prstGeom>
+          <a:noFill/>
+          <a:ln w="10160">
+            <a:solidFill>
+              <a:srgbClr val="6B4A0F">
+                <a:alpha val="50000"/>
+              </a:srgbClr>
+            </a:solidFill>
+            <a:prstDash val="solid"/>
+          </a:ln>
+        </p:spPr>
+      </p:sp>
+      <p:sp>
+        <p:nvSpPr>
+          <p:cNvPr id="55" name="Text 46"/>
+          <p:cNvSpPr/>
+          <p:nvPr/>
+        </p:nvSpPr>
+        <p:spPr>
+          <a:xfrm>
+            <a:off x="8046569" y="2980944"/>
+            <a:ext cx="3724502" cy="859536"/>
+          </a:xfrm>
+          <a:prstGeom prst="rect">
+            <a:avLst/>
+          </a:prstGeom>
+          <a:noFill/>
+          <a:ln/>
+        </p:spPr>
+        <p:txBody>
+          <a:bodyPr wrap="square" rtlCol="0" anchor="ctr"/>
+          <a:lstStyle/>
+          <a:p>
+            <a:pPr indent="0" marL="0">
+              <a:lnSpc>
+                <a:spcPct val="134000"/>
+              </a:lnSpc>
+              <a:buNone/>
+            </a:pPr>
+            <a:r>
+              <a:rPr lang="en-US" sz="1150" dirty="0">
+                <a:solidFill>
+                  <a:srgbClr val="C4A882"/>
+                </a:solidFill>
+                <a:latin typeface="Calibri" pitchFamily="34" charset="0"/>
+                <a:ea typeface="Calibri" pitchFamily="34" charset="-122"/>
+                <a:cs typeface="Calibri" pitchFamily="34" charset="-120"/>
+              </a:rPr>
+              <a:t>18 Monate in der größten Handelsstadt. Hier entsteht der 1. Korintherbrief.</a:t>
+            </a:r>
+            <a:endParaRPr lang="en-US" sz="1150" dirty="0"/>
+          </a:p>
+        </p:txBody>
+      </p:sp>
+      <p:sp>
+        <p:nvSpPr>
+          <p:cNvPr id="56" name="Shape 47"/>
+          <p:cNvSpPr/>
+          <p:nvPr/>
+        </p:nvSpPr>
+        <p:spPr>
+          <a:xfrm>
+            <a:off x="6034889" y="4005072"/>
+            <a:ext cx="5900774" cy="1042416"/>
+          </a:xfrm>
+          <a:prstGeom prst="rect">
+            <a:avLst/>
+          </a:prstGeom>
+          <a:solidFill>
+            <a:srgbClr val="0F0B07">
+              <a:alpha val="80000"/>
+            </a:srgbClr>
+          </a:solidFill>
+          <a:ln w="10160">
+            <a:solidFill>
+              <a:srgbClr val="C8820A">
+                <a:alpha val="40000"/>
+              </a:srgbClr>
+            </a:solidFill>
+            <a:prstDash val="solid"/>
+          </a:ln>
+        </p:spPr>
+      </p:sp>
+      <p:sp>
+        <p:nvSpPr>
+          <p:cNvPr id="57" name="Shape 48"/>
+          <p:cNvSpPr/>
+          <p:nvPr/>
+        </p:nvSpPr>
+        <p:spPr>
+          <a:xfrm>
+            <a:off x="6034889" y="4005072"/>
+            <a:ext cx="5900774" cy="18288"/>
+          </a:xfrm>
+          <a:prstGeom prst="rect">
+            <a:avLst/>
+          </a:prstGeom>
+          <a:solidFill>
+            <a:srgbClr val="C8820A">
+              <a:alpha val="50000"/>
+            </a:srgbClr>
+          </a:solidFill>
+          <a:ln/>
+        </p:spPr>
+      </p:sp>
+      <p:sp>
+        <p:nvSpPr>
+          <p:cNvPr id="58" name="Text 49"/>
+          <p:cNvSpPr/>
+          <p:nvPr/>
+        </p:nvSpPr>
+        <p:spPr>
+          <a:xfrm>
+            <a:off x="6162905" y="4096512"/>
+            <a:ext cx="1572768" cy="329184"/>
+          </a:xfrm>
+          <a:prstGeom prst="rect">
+            <a:avLst/>
+          </a:prstGeom>
+          <a:noFill/>
+          <a:ln/>
+        </p:spPr>
+        <p:txBody>
+          <a:bodyPr wrap="square" rtlCol="0" anchor="ctr"/>
+          <a:lstStyle/>
+          <a:p>
+            <a:pPr indent="0" marL="0">
+              <a:buNone/>
+            </a:pPr>
+            <a:r>
+              <a:rPr lang="en-US" sz="1350" b="1" spc="100" kern="0" dirty="0">
+                <a:solidFill>
+                  <a:srgbClr val="F5EBD8"/>
+                </a:solidFill>
+                <a:latin typeface="Georgia" pitchFamily="34" charset="0"/>
+                <a:ea typeface="Georgia" pitchFamily="34" charset="-122"/>
+                <a:cs typeface="Georgia" pitchFamily="34" charset="-120"/>
+              </a:rPr>
+              <a:t>EPHESUS</a:t>
+            </a:r>
+            <a:endParaRPr lang="en-US" sz="1350" dirty="0"/>
+          </a:p>
+        </p:txBody>
+      </p:sp>
+      <p:sp>
+        <p:nvSpPr>
+          <p:cNvPr id="59" name="Text 50"/>
+          <p:cNvSpPr/>
+          <p:nvPr/>
+        </p:nvSpPr>
+        <p:spPr>
+          <a:xfrm>
+            <a:off x="6162905" y="4462272"/>
+            <a:ext cx="1572768" cy="237744"/>
+          </a:xfrm>
+          <a:prstGeom prst="rect">
+            <a:avLst/>
+          </a:prstGeom>
+          <a:noFill/>
+          <a:ln/>
+        </p:spPr>
+        <p:txBody>
+          <a:bodyPr wrap="square" rtlCol="0" anchor="ctr"/>
+          <a:lstStyle/>
+          <a:p>
+            <a:pPr indent="0" marL="0">
+              <a:buNone/>
+            </a:pPr>
+            <a:r>
+              <a:rPr lang="en-US" sz="1000" dirty="0">
+                <a:solidFill>
+                  <a:srgbClr val="D9A441"/>
+                </a:solidFill>
+                <a:latin typeface="Calibri" pitchFamily="34" charset="0"/>
+                <a:ea typeface="Calibri" pitchFamily="34" charset="-122"/>
+                <a:cs typeface="Calibri" pitchFamily="34" charset="-120"/>
+              </a:rPr>
+              <a:t>~54 n. Chr.</a:t>
+            </a:r>
+            <a:endParaRPr lang="en-US" sz="1000" dirty="0"/>
+          </a:p>
+        </p:txBody>
+      </p:sp>
+      <p:sp>
+        <p:nvSpPr>
+          <p:cNvPr id="60" name="Shape 51"/>
+          <p:cNvSpPr/>
+          <p:nvPr/>
+        </p:nvSpPr>
+        <p:spPr>
+          <a:xfrm>
+            <a:off x="7900265" y="4114800"/>
+            <a:ext cx="0" cy="822960"/>
+          </a:xfrm>
+          <a:prstGeom prst="line">
+            <a:avLst/>
+          </a:prstGeom>
+          <a:noFill/>
+          <a:ln w="10160">
+            <a:solidFill>
+              <a:srgbClr val="6B4A0F">
+                <a:alpha val="50000"/>
+              </a:srgbClr>
+            </a:solidFill>
+            <a:prstDash val="solid"/>
+          </a:ln>
+        </p:spPr>
+      </p:sp>
+      <p:sp>
+        <p:nvSpPr>
+          <p:cNvPr id="61" name="Text 52"/>
+          <p:cNvSpPr/>
+          <p:nvPr/>
+        </p:nvSpPr>
+        <p:spPr>
+          <a:xfrm>
+            <a:off x="8046569" y="4096512"/>
+            <a:ext cx="3724502" cy="859536"/>
+          </a:xfrm>
+          <a:prstGeom prst="rect">
+            <a:avLst/>
+          </a:prstGeom>
+          <a:noFill/>
+          <a:ln/>
+        </p:spPr>
+        <p:txBody>
+          <a:bodyPr wrap="square" rtlCol="0" anchor="ctr"/>
+          <a:lstStyle/>
+          <a:p>
+            <a:pPr indent="0" marL="0">
+              <a:lnSpc>
+                <a:spcPct val="134000"/>
+              </a:lnSpc>
+              <a:buNone/>
+            </a:pPr>
+            <a:r>
+              <a:rPr lang="en-US" sz="1150" dirty="0">
+                <a:solidFill>
+                  <a:srgbClr val="C4A882"/>
+                </a:solidFill>
+                <a:latin typeface="Calibri" pitchFamily="34" charset="0"/>
+                <a:ea typeface="Calibri" pitchFamily="34" charset="-122"/>
+                <a:cs typeface="Calibri" pitchFamily="34" charset="-120"/>
+              </a:rPr>
+              <a:t>3 Jahre Mission. Aufstand der Silberschmiede — der Artemis-Kult verliert Kundschaft.</a:t>
+            </a:r>
+            <a:endParaRPr lang="en-US" sz="1150" dirty="0"/>
+          </a:p>
+        </p:txBody>
+      </p:sp>
+      <p:sp>
+        <p:nvSpPr>
+          <p:cNvPr id="62" name="Shape 53"/>
+          <p:cNvSpPr/>
+          <p:nvPr/>
+        </p:nvSpPr>
+        <p:spPr>
+          <a:xfrm>
+            <a:off x="6034889" y="5120640"/>
+            <a:ext cx="5900774" cy="1042416"/>
+          </a:xfrm>
+          <a:prstGeom prst="rect">
+            <a:avLst/>
+          </a:prstGeom>
+          <a:solidFill>
+            <a:srgbClr val="0F0B07">
+              <a:alpha val="80000"/>
+            </a:srgbClr>
+          </a:solidFill>
+          <a:ln w="10160">
+            <a:solidFill>
+              <a:srgbClr val="C8820A">
+                <a:alpha val="40000"/>
+              </a:srgbClr>
+            </a:solidFill>
+            <a:prstDash val="solid"/>
+          </a:ln>
+        </p:spPr>
+      </p:sp>
+      <p:sp>
+        <p:nvSpPr>
+          <p:cNvPr id="63" name="Shape 54"/>
+          <p:cNvSpPr/>
+          <p:nvPr/>
+        </p:nvSpPr>
+        <p:spPr>
+          <a:xfrm>
+            <a:off x="6034889" y="5120640"/>
+            <a:ext cx="5900774" cy="18288"/>
+          </a:xfrm>
+          <a:prstGeom prst="rect">
+            <a:avLst/>
+          </a:prstGeom>
+          <a:solidFill>
+            <a:srgbClr val="C8820A">
+              <a:alpha val="50000"/>
+            </a:srgbClr>
+          </a:solidFill>
+          <a:ln/>
+        </p:spPr>
+      </p:sp>
+      <p:sp>
+        <p:nvSpPr>
+          <p:cNvPr id="64" name="Text 55"/>
+          <p:cNvSpPr/>
+          <p:nvPr/>
+        </p:nvSpPr>
+        <p:spPr>
+          <a:xfrm>
+            <a:off x="6162905" y="5212080"/>
+            <a:ext cx="1572768" cy="329184"/>
+          </a:xfrm>
+          <a:prstGeom prst="rect">
+            <a:avLst/>
+          </a:prstGeom>
+          <a:noFill/>
+          <a:ln/>
+        </p:spPr>
+        <p:txBody>
+          <a:bodyPr wrap="square" rtlCol="0" anchor="ctr"/>
+          <a:lstStyle/>
+          <a:p>
+            <a:pPr indent="0" marL="0">
+              <a:buNone/>
+            </a:pPr>
+            <a:r>
+              <a:rPr lang="en-US" sz="1350" b="1" spc="100" kern="0" dirty="0">
+                <a:solidFill>
+                  <a:srgbClr val="F5EBD8"/>
+                </a:solidFill>
+                <a:latin typeface="Georgia" pitchFamily="34" charset="0"/>
+                <a:ea typeface="Georgia" pitchFamily="34" charset="-122"/>
+                <a:cs typeface="Georgia" pitchFamily="34" charset="-120"/>
+              </a:rPr>
+              <a:t>ROM</a:t>
+            </a:r>
+            <a:endParaRPr lang="en-US" sz="1350" dirty="0"/>
+          </a:p>
+        </p:txBody>
+      </p:sp>
+      <p:sp>
+        <p:nvSpPr>
+          <p:cNvPr id="65" name="Text 56"/>
+          <p:cNvSpPr/>
+          <p:nvPr/>
+        </p:nvSpPr>
+        <p:spPr>
+          <a:xfrm>
+            <a:off x="6162905" y="5577840"/>
+            <a:ext cx="1572768" cy="237744"/>
+          </a:xfrm>
+          <a:prstGeom prst="rect">
+            <a:avLst/>
+          </a:prstGeom>
+          <a:noFill/>
+          <a:ln/>
+        </p:spPr>
+        <p:txBody>
+          <a:bodyPr wrap="square" rtlCol="0" anchor="ctr"/>
+          <a:lstStyle/>
+          <a:p>
+            <a:pPr indent="0" marL="0">
+              <a:buNone/>
+            </a:pPr>
+            <a:r>
+              <a:rPr lang="en-US" sz="1000" dirty="0">
+                <a:solidFill>
+                  <a:srgbClr val="D9A441"/>
+                </a:solidFill>
+                <a:latin typeface="Calibri" pitchFamily="34" charset="0"/>
+                <a:ea typeface="Calibri" pitchFamily="34" charset="-122"/>
+                <a:cs typeface="Calibri" pitchFamily="34" charset="-120"/>
+              </a:rPr>
+              <a:t>~67 n. Chr.</a:t>
+            </a:r>
+            <a:endParaRPr lang="en-US" sz="1000" dirty="0"/>
+          </a:p>
+        </p:txBody>
+      </p:sp>
+      <p:sp>
+        <p:nvSpPr>
+          <p:cNvPr id="66" name="Shape 57"/>
+          <p:cNvSpPr/>
+          <p:nvPr/>
+        </p:nvSpPr>
+        <p:spPr>
+          <a:xfrm>
+            <a:off x="7900265" y="5230368"/>
+            <a:ext cx="0" cy="822960"/>
+          </a:xfrm>
+          <a:prstGeom prst="line">
+            <a:avLst/>
+          </a:prstGeom>
+          <a:noFill/>
+          <a:ln w="10160">
+            <a:solidFill>
+              <a:srgbClr val="6B4A0F">
+                <a:alpha val="50000"/>
+              </a:srgbClr>
+            </a:solidFill>
+            <a:prstDash val="solid"/>
+          </a:ln>
+        </p:spPr>
+      </p:sp>
+      <p:sp>
+        <p:nvSpPr>
+          <p:cNvPr id="67" name="Text 58"/>
+          <p:cNvSpPr/>
+          <p:nvPr/>
+        </p:nvSpPr>
+        <p:spPr>
+          <a:xfrm>
+            <a:off x="8046569" y="5212080"/>
+            <a:ext cx="3724502" cy="859536"/>
+          </a:xfrm>
+          <a:prstGeom prst="rect">
+            <a:avLst/>
+          </a:prstGeom>
+          <a:noFill/>
+          <a:ln/>
+        </p:spPr>
+        <p:txBody>
+          <a:bodyPr wrap="square" rtlCol="0" anchor="ctr"/>
+          <a:lstStyle/>
+          <a:p>
+            <a:pPr indent="0" marL="0">
+              <a:lnSpc>
+                <a:spcPct val="134000"/>
+              </a:lnSpc>
+              <a:buNone/>
+            </a:pPr>
+            <a:r>
+              <a:rPr lang="en-US" sz="1150" dirty="0">
+                <a:solidFill>
+                  <a:srgbClr val="C4A882"/>
+                </a:solidFill>
+                <a:latin typeface="Calibri" pitchFamily="34" charset="0"/>
+                <a:ea typeface="Calibri" pitchFamily="34" charset="-122"/>
+                <a:cs typeface="Calibri" pitchFamily="34" charset="-120"/>
+              </a:rPr>
+              <a:t>Martyrium unter Nero. Sein Grab liegt heute unter dem Hochaltar des Petersdoms.</a:t>
             </a:r>
             <a:endParaRPr lang="en-US" sz="1150" dirty="0"/>
           </a:p>
@@ -6468,7 +7541,7 @@
           </a:prstGeom>
           <a:solidFill>
             <a:srgbClr val="000000">
-              <a:alpha val="45000"/>
+              <a:alpha val="52000"/>
             </a:srgbClr>
           </a:solidFill>
           <a:ln w="12700">
@@ -6573,7 +7646,36 @@
       </p:pic>
       <p:sp>
         <p:nvSpPr>
-          <p:cNvPr id="7" name="Text 1"/>
+          <p:cNvPr id="7" name="Shape 1"/>
+          <p:cNvSpPr/>
+          <p:nvPr/>
+        </p:nvSpPr>
+        <p:spPr>
+          <a:xfrm>
+            <a:off x="731502" y="530352"/>
+            <a:ext cx="10728692" cy="1554480"/>
+          </a:xfrm>
+          <a:prstGeom prst="rect">
+            <a:avLst/>
+          </a:prstGeom>
+          <a:solidFill>
+            <a:srgbClr val="000000">
+              <a:alpha val="30000"/>
+            </a:srgbClr>
+          </a:solidFill>
+          <a:ln w="12700">
+            <a:solidFill>
+              <a:srgbClr val="000000">
+                <a:alpha val="0"/>
+              </a:srgbClr>
+            </a:solidFill>
+            <a:prstDash val="solid"/>
+          </a:ln>
+        </p:spPr>
+      </p:sp>
+      <p:sp>
+        <p:nvSpPr>
+          <p:cNvPr id="8" name="Text 2"/>
           <p:cNvSpPr/>
           <p:nvPr/>
         </p:nvSpPr>
@@ -6588,9 +7690,9 @@
           <a:noFill/>
           <a:ln/>
           <a:effectLst>
-            <a:outerShdw sx="100000" sy="100000" kx="0" ky="0" algn="bl" rotWithShape="0" blurRad="228600" dist="50800" dir="16200000">
+            <a:outerShdw sx="100000" sy="100000" kx="0" ky="0" algn="bl" rotWithShape="0" blurRad="279400" dist="50800" dir="16200000">
               <a:srgbClr val="C8820A">
-                <a:alpha val="45000"/>
+                <a:alpha val="65000"/>
               </a:srgbClr>
             </a:outerShdw>
           </a:effectLst>
@@ -6636,7 +7738,7 @@
       </p:sp>
       <p:pic>
         <p:nvPicPr>
-          <p:cNvPr id="8" name="Image 4" descr="preencoded.png">    </p:cNvPr>
+          <p:cNvPr id="9" name="Image 4" descr="preencoded.png">    </p:cNvPr>
           <p:cNvPicPr>
             <a:picLocks noChangeAspect="1"/>
           </p:cNvPicPr>
@@ -6666,7 +7768,7 @@
       </p:pic>
       <p:sp>
         <p:nvSpPr>
-          <p:cNvPr id="9" name="Text 2"/>
+          <p:cNvPr id="10" name="Text 3"/>
           <p:cNvSpPr/>
           <p:nvPr/>
         </p:nvSpPr>
@@ -6680,6 +7782,13 @@
           </a:prstGeom>
           <a:noFill/>
           <a:ln/>
+          <a:effectLst>
+            <a:outerShdw sx="100000" sy="100000" kx="0" ky="0" algn="bl" rotWithShape="0" blurRad="101600" dist="50800" dir="16200000">
+              <a:srgbClr val="000000">
+                <a:alpha val="70000"/>
+              </a:srgbClr>
+            </a:outerShdw>
+          </a:effectLst>
         </p:spPr>
         <p:txBody>
           <a:bodyPr wrap="square" rtlCol="0" anchor="ctr"/>
@@ -6728,7 +7837,7 @@
       </p:sp>
       <p:sp>
         <p:nvSpPr>
-          <p:cNvPr id="10" name="Shape 3"/>
+          <p:cNvPr id="11" name="Shape 4"/>
           <p:cNvSpPr/>
           <p:nvPr/>
         </p:nvSpPr>
@@ -6742,13 +7851,13 @@
           </a:prstGeom>
           <a:solidFill>
             <a:srgbClr val="0F0B07">
-              <a:alpha val="90000"/>
+              <a:alpha val="82000"/>
             </a:srgbClr>
           </a:solidFill>
           <a:ln w="10160">
             <a:solidFill>
               <a:srgbClr val="C8820A">
-                <a:alpha val="45000"/>
+                <a:alpha val="50000"/>
               </a:srgbClr>
             </a:solidFill>
             <a:prstDash val="solid"/>
@@ -6764,7 +7873,7 @@
       </p:sp>
       <p:sp>
         <p:nvSpPr>
-          <p:cNvPr id="11" name="Shape 4"/>
+          <p:cNvPr id="12" name="Shape 5"/>
           <p:cNvSpPr/>
           <p:nvPr/>
         </p:nvSpPr>
@@ -6786,7 +7895,7 @@
       </p:sp>
       <p:sp>
         <p:nvSpPr>
-          <p:cNvPr id="12" name="Shape 5"/>
+          <p:cNvPr id="13" name="Shape 6"/>
           <p:cNvSpPr/>
           <p:nvPr/>
         </p:nvSpPr>
@@ -6808,7 +7917,7 @@
       </p:sp>
       <p:sp>
         <p:nvSpPr>
-          <p:cNvPr id="13" name="Text 6"/>
+          <p:cNvPr id="14" name="Text 7"/>
           <p:cNvSpPr/>
           <p:nvPr/>
         </p:nvSpPr>
@@ -6854,7 +7963,7 @@
       </p:sp>
       <p:sp>
         <p:nvSpPr>
-          <p:cNvPr id="14" name="Text 7"/>
+          <p:cNvPr id="15" name="Text 8"/>
           <p:cNvSpPr/>
           <p:nvPr/>
         </p:nvSpPr>
@@ -6893,7 +8002,7 @@
       </p:sp>
       <p:sp>
         <p:nvSpPr>
-          <p:cNvPr id="15" name="Text 8"/>
+          <p:cNvPr id="16" name="Text 9"/>
           <p:cNvSpPr/>
           <p:nvPr/>
         </p:nvSpPr>
@@ -6932,7 +8041,7 @@
       </p:sp>
       <p:pic>
         <p:nvPicPr>
-          <p:cNvPr id="16" name="Image 5" descr="preencoded.png">    </p:cNvPr>
+          <p:cNvPr id="17" name="Image 5" descr="preencoded.png">    </p:cNvPr>
           <p:cNvPicPr>
             <a:picLocks noChangeAspect="1"/>
           </p:cNvPicPr>
@@ -6962,7 +8071,7 @@
       </p:pic>
       <p:sp>
         <p:nvSpPr>
-          <p:cNvPr id="17" name="Text 9"/>
+          <p:cNvPr id="18" name="Text 10"/>
           <p:cNvSpPr/>
           <p:nvPr/>
         </p:nvSpPr>
@@ -7004,7 +8113,7 @@
       </p:sp>
       <p:sp>
         <p:nvSpPr>
-          <p:cNvPr id="18" name="Shape 10"/>
+          <p:cNvPr id="19" name="Shape 11"/>
           <p:cNvSpPr/>
           <p:nvPr/>
         </p:nvSpPr>
@@ -7018,13 +8127,13 @@
           </a:prstGeom>
           <a:solidFill>
             <a:srgbClr val="0F0B07">
-              <a:alpha val="90000"/>
+              <a:alpha val="82000"/>
             </a:srgbClr>
           </a:solidFill>
           <a:ln w="10160">
             <a:solidFill>
               <a:srgbClr val="C8820A">
-                <a:alpha val="45000"/>
+                <a:alpha val="50000"/>
               </a:srgbClr>
             </a:solidFill>
             <a:prstDash val="solid"/>
@@ -7040,7 +8149,7 @@
       </p:sp>
       <p:sp>
         <p:nvSpPr>
-          <p:cNvPr id="19" name="Shape 11"/>
+          <p:cNvPr id="20" name="Shape 12"/>
           <p:cNvSpPr/>
           <p:nvPr/>
         </p:nvSpPr>
@@ -7062,7 +8171,7 @@
       </p:sp>
       <p:sp>
         <p:nvSpPr>
-          <p:cNvPr id="20" name="Shape 12"/>
+          <p:cNvPr id="21" name="Shape 13"/>
           <p:cNvSpPr/>
           <p:nvPr/>
         </p:nvSpPr>
@@ -7084,7 +8193,7 @@
       </p:sp>
       <p:sp>
         <p:nvSpPr>
-          <p:cNvPr id="21" name="Text 13"/>
+          <p:cNvPr id="22" name="Text 14"/>
           <p:cNvSpPr/>
           <p:nvPr/>
         </p:nvSpPr>
@@ -7130,7 +8239,7 @@
       </p:sp>
       <p:sp>
         <p:nvSpPr>
-          <p:cNvPr id="22" name="Text 14"/>
+          <p:cNvPr id="23" name="Text 15"/>
           <p:cNvSpPr/>
           <p:nvPr/>
         </p:nvSpPr>
@@ -7169,7 +8278,7 @@
       </p:sp>
       <p:sp>
         <p:nvSpPr>
-          <p:cNvPr id="23" name="Text 15"/>
+          <p:cNvPr id="24" name="Text 16"/>
           <p:cNvSpPr/>
           <p:nvPr/>
         </p:nvSpPr>
@@ -7208,7 +8317,7 @@
       </p:sp>
       <p:pic>
         <p:nvPicPr>
-          <p:cNvPr id="24" name="Image 6" descr="preencoded.png">    </p:cNvPr>
+          <p:cNvPr id="25" name="Image 6" descr="preencoded.png">    </p:cNvPr>
           <p:cNvPicPr>
             <a:picLocks noChangeAspect="1"/>
           </p:cNvPicPr>
@@ -7238,7 +8347,7 @@
       </p:pic>
       <p:sp>
         <p:nvSpPr>
-          <p:cNvPr id="25" name="Text 16"/>
+          <p:cNvPr id="26" name="Text 17"/>
           <p:cNvSpPr/>
           <p:nvPr/>
         </p:nvSpPr>
@@ -7280,7 +8389,7 @@
       </p:sp>
       <p:sp>
         <p:nvSpPr>
-          <p:cNvPr id="26" name="Shape 17"/>
+          <p:cNvPr id="27" name="Shape 18"/>
           <p:cNvSpPr/>
           <p:nvPr/>
         </p:nvSpPr>
@@ -7294,13 +8403,13 @@
           </a:prstGeom>
           <a:solidFill>
             <a:srgbClr val="0F0B07">
-              <a:alpha val="90000"/>
+              <a:alpha val="82000"/>
             </a:srgbClr>
           </a:solidFill>
           <a:ln w="10160">
             <a:solidFill>
               <a:srgbClr val="C8820A">
-                <a:alpha val="45000"/>
+                <a:alpha val="50000"/>
               </a:srgbClr>
             </a:solidFill>
             <a:prstDash val="solid"/>
@@ -7316,7 +8425,7 @@
       </p:sp>
       <p:sp>
         <p:nvSpPr>
-          <p:cNvPr id="27" name="Shape 18"/>
+          <p:cNvPr id="28" name="Shape 19"/>
           <p:cNvSpPr/>
           <p:nvPr/>
         </p:nvSpPr>
@@ -7338,7 +8447,7 @@
       </p:sp>
       <p:sp>
         <p:nvSpPr>
-          <p:cNvPr id="28" name="Shape 19"/>
+          <p:cNvPr id="29" name="Shape 20"/>
           <p:cNvSpPr/>
           <p:nvPr/>
         </p:nvSpPr>
@@ -7360,7 +8469,7 @@
       </p:sp>
       <p:sp>
         <p:nvSpPr>
-          <p:cNvPr id="29" name="Text 20"/>
+          <p:cNvPr id="30" name="Text 21"/>
           <p:cNvSpPr/>
           <p:nvPr/>
         </p:nvSpPr>
@@ -7406,7 +8515,7 @@
       </p:sp>
       <p:sp>
         <p:nvSpPr>
-          <p:cNvPr id="30" name="Text 21"/>
+          <p:cNvPr id="31" name="Text 22"/>
           <p:cNvSpPr/>
           <p:nvPr/>
         </p:nvSpPr>
@@ -7445,7 +8554,7 @@
       </p:sp>
       <p:sp>
         <p:nvSpPr>
-          <p:cNvPr id="31" name="Text 22"/>
+          <p:cNvPr id="32" name="Text 23"/>
           <p:cNvSpPr/>
           <p:nvPr/>
         </p:nvSpPr>
@@ -7484,7 +8593,7 @@
       </p:sp>
       <p:pic>
         <p:nvPicPr>
-          <p:cNvPr id="32" name="Image 7" descr="preencoded.png">    </p:cNvPr>
+          <p:cNvPr id="33" name="Image 7" descr="preencoded.png">    </p:cNvPr>
           <p:cNvPicPr>
             <a:picLocks noChangeAspect="1"/>
           </p:cNvPicPr>
@@ -7514,7 +8623,7 @@
       </p:pic>
       <p:sp>
         <p:nvSpPr>
-          <p:cNvPr id="33" name="Text 23"/>
+          <p:cNvPr id="34" name="Text 24"/>
           <p:cNvSpPr/>
           <p:nvPr/>
         </p:nvSpPr>
@@ -7556,7 +8665,7 @@
       </p:sp>
       <p:sp>
         <p:nvSpPr>
-          <p:cNvPr id="34" name="Text 24"/>
+          <p:cNvPr id="35" name="Text 25"/>
           <p:cNvSpPr/>
           <p:nvPr/>
         </p:nvSpPr>
@@ -10292,7 +11401,7 @@
           </a:prstGeom>
           <a:solidFill>
             <a:srgbClr val="000000">
-              <a:alpha val="62000"/>
+              <a:alpha val="66000"/>
             </a:srgbClr>
           </a:solidFill>
           <a:ln w="12700">
@@ -10441,13 +11550,13 @@
           </a:prstGeom>
           <a:solidFill>
             <a:srgbClr val="0F0B07">
-              <a:alpha val="88000"/>
+              <a:alpha val="78000"/>
             </a:srgbClr>
           </a:solidFill>
           <a:ln w="10160">
             <a:solidFill>
               <a:srgbClr val="C8820A">
-                <a:alpha val="30000"/>
+                <a:alpha val="40000"/>
               </a:srgbClr>
             </a:solidFill>
             <a:prstDash val="solid"/>
@@ -10625,13 +11734,13 @@
           </a:prstGeom>
           <a:solidFill>
             <a:srgbClr val="0F0B07">
-              <a:alpha val="88000"/>
+              <a:alpha val="78000"/>
             </a:srgbClr>
           </a:solidFill>
           <a:ln w="10160">
             <a:solidFill>
               <a:srgbClr val="C8820A">
-                <a:alpha val="30000"/>
+                <a:alpha val="40000"/>
               </a:srgbClr>
             </a:solidFill>
             <a:prstDash val="solid"/>
@@ -10809,13 +11918,13 @@
           </a:prstGeom>
           <a:solidFill>
             <a:srgbClr val="0F0B07">
-              <a:alpha val="88000"/>
+              <a:alpha val="78000"/>
             </a:srgbClr>
           </a:solidFill>
           <a:ln w="10160">
             <a:solidFill>
               <a:srgbClr val="C8820A">
-                <a:alpha val="30000"/>
+                <a:alpha val="40000"/>
               </a:srgbClr>
             </a:solidFill>
             <a:prstDash val="solid"/>
@@ -10993,13 +12102,13 @@
           </a:prstGeom>
           <a:solidFill>
             <a:srgbClr val="0F0B07">
-              <a:alpha val="88000"/>
+              <a:alpha val="78000"/>
             </a:srgbClr>
           </a:solidFill>
           <a:ln w="10160">
             <a:solidFill>
               <a:srgbClr val="C8820A">
-                <a:alpha val="30000"/>
+                <a:alpha val="40000"/>
               </a:srgbClr>
             </a:solidFill>
             <a:prstDash val="solid"/>
@@ -11232,7 +12341,36 @@
       </p:sp>
       <p:sp>
         <p:nvSpPr>
-          <p:cNvPr id="34" name="Text 22"/>
+          <p:cNvPr id="34" name="Shape 22"/>
+          <p:cNvSpPr/>
+          <p:nvPr/>
+        </p:nvSpPr>
+        <p:spPr>
+          <a:xfrm>
+            <a:off x="487668" y="2395728"/>
+            <a:ext cx="11216360" cy="4114800"/>
+          </a:xfrm>
+          <a:prstGeom prst="rect">
+            <a:avLst/>
+          </a:prstGeom>
+          <a:solidFill>
+            <a:srgbClr val="000000">
+              <a:alpha val="35000"/>
+            </a:srgbClr>
+          </a:solidFill>
+          <a:ln w="12700">
+            <a:solidFill>
+              <a:srgbClr val="000000">
+                <a:alpha val="0"/>
+              </a:srgbClr>
+            </a:solidFill>
+            <a:prstDash val="solid"/>
+          </a:ln>
+        </p:spPr>
+      </p:sp>
+      <p:sp>
+        <p:nvSpPr>
+          <p:cNvPr id="35" name="Text 23"/>
           <p:cNvSpPr/>
           <p:nvPr/>
         </p:nvSpPr>
@@ -11247,9 +12385,9 @@
           <a:noFill/>
           <a:ln/>
           <a:effectLst>
-            <a:outerShdw sx="100000" sy="100000" kx="0" ky="0" algn="bl" rotWithShape="0" blurRad="330200" dist="50800" dir="16200000">
+            <a:outerShdw sx="100000" sy="100000" kx="0" ky="0" algn="bl" rotWithShape="0" blurRad="355600" dist="50800" dir="16200000">
               <a:srgbClr val="C8820A">
-                <a:alpha val="65000"/>
+                <a:alpha val="75000"/>
               </a:srgbClr>
             </a:outerShdw>
           </a:effectLst>
@@ -11295,7 +12433,7 @@
       </p:sp>
       <p:pic>
         <p:nvPicPr>
-          <p:cNvPr id="35" name="Image 10" descr="preencoded.png">    </p:cNvPr>
+          <p:cNvPr id="36" name="Image 10" descr="preencoded.png">    </p:cNvPr>
           <p:cNvPicPr>
             <a:picLocks noChangeAspect="1"/>
           </p:cNvPicPr>
@@ -11325,7 +12463,7 @@
       </p:pic>
       <p:sp>
         <p:nvSpPr>
-          <p:cNvPr id="36" name="Text 23"/>
+          <p:cNvPr id="37" name="Text 24"/>
           <p:cNvSpPr/>
           <p:nvPr/>
         </p:nvSpPr>
@@ -11339,6 +12477,13 @@
           </a:prstGeom>
           <a:noFill/>
           <a:ln/>
+          <a:effectLst>
+            <a:outerShdw sx="100000" sy="100000" kx="0" ky="0" algn="bl" rotWithShape="0" blurRad="101600" dist="50800" dir="16200000">
+              <a:srgbClr val="000000">
+                <a:alpha val="65000"/>
+              </a:srgbClr>
+            </a:outerShdw>
+          </a:effectLst>
         </p:spPr>
         <p:txBody>
           <a:bodyPr wrap="square" rtlCol="0" anchor="ctr"/>
@@ -11364,7 +12509,7 @@
       </p:sp>
       <p:sp>
         <p:nvSpPr>
-          <p:cNvPr id="37" name="Text 24"/>
+          <p:cNvPr id="38" name="Text 25"/>
           <p:cNvSpPr/>
           <p:nvPr/>
         </p:nvSpPr>
@@ -11378,6 +12523,13 @@
           </a:prstGeom>
           <a:noFill/>
           <a:ln/>
+          <a:effectLst>
+            <a:outerShdw sx="100000" sy="100000" kx="0" ky="0" algn="bl" rotWithShape="0" blurRad="76200" dist="50800" dir="16200000">
+              <a:srgbClr val="000000">
+                <a:alpha val="65000"/>
+              </a:srgbClr>
+            </a:outerShdw>
+          </a:effectLst>
         </p:spPr>
         <p:txBody>
           <a:bodyPr wrap="square" rtlCol="0" anchor="ctr"/>
@@ -11403,7 +12555,7 @@
       </p:sp>
       <p:sp>
         <p:nvSpPr>
-          <p:cNvPr id="38" name="Text 25"/>
+          <p:cNvPr id="39" name="Text 26"/>
           <p:cNvSpPr/>
           <p:nvPr/>
         </p:nvSpPr>
@@ -11417,6 +12569,13 @@
           </a:prstGeom>
           <a:noFill/>
           <a:ln/>
+          <a:effectLst>
+            <a:outerShdw sx="100000" sy="100000" kx="0" ky="0" algn="bl" rotWithShape="0" blurRad="63500" dist="50800" dir="16200000">
+              <a:srgbClr val="000000">
+                <a:alpha val="60000"/>
+              </a:srgbClr>
+            </a:outerShdw>
+          </a:effectLst>
         </p:spPr>
         <p:txBody>
           <a:bodyPr wrap="square" rtlCol="0" anchor="ctr"/>
@@ -11442,7 +12601,7 @@
       </p:sp>
       <p:sp>
         <p:nvSpPr>
-          <p:cNvPr id="39" name="Text 26"/>
+          <p:cNvPr id="40" name="Text 27"/>
           <p:cNvSpPr/>
           <p:nvPr/>
         </p:nvSpPr>

--- a/Anfaenge_Kirche_Antike_v3.pptx
+++ b/Anfaenge_Kirche_Antike_v3.pptx
@@ -10385,7 +10385,36 @@
       </p:sp>
       <p:sp>
         <p:nvSpPr>
-          <p:cNvPr id="15" name="Text 8"/>
+          <p:cNvPr id="15" name="Shape 8"/>
+          <p:cNvSpPr/>
+          <p:nvPr/>
+        </p:nvSpPr>
+        <p:spPr>
+          <a:xfrm>
+            <a:off x="6248242" y="182880"/>
+            <a:ext cx="5925166" cy="6601968"/>
+          </a:xfrm>
+          <a:prstGeom prst="rect">
+            <a:avLst/>
+          </a:prstGeom>
+          <a:solidFill>
+            <a:srgbClr val="000000">
+              <a:alpha val="38000"/>
+            </a:srgbClr>
+          </a:solidFill>
+          <a:ln w="12700">
+            <a:solidFill>
+              <a:srgbClr val="000000">
+                <a:alpha val="0"/>
+              </a:srgbClr>
+            </a:solidFill>
+            <a:prstDash val="solid"/>
+          </a:ln>
+        </p:spPr>
+      </p:sp>
+      <p:sp>
+        <p:nvSpPr>
+          <p:cNvPr id="16" name="Text 9"/>
           <p:cNvSpPr/>
           <p:nvPr/>
         </p:nvSpPr>
@@ -10424,7 +10453,7 @@
       </p:sp>
       <p:pic>
         <p:nvPicPr>
-          <p:cNvPr id="16" name="Image 5" descr="preencoded.png">    </p:cNvPr>
+          <p:cNvPr id="17" name="Image 5" descr="preencoded.png">    </p:cNvPr>
           <p:cNvPicPr>
             <a:picLocks noChangeAspect="1"/>
           </p:cNvPicPr>
@@ -10454,7 +10483,7 @@
       </p:pic>
       <p:sp>
         <p:nvSpPr>
-          <p:cNvPr id="17" name="Shape 9"/>
+          <p:cNvPr id="18" name="Shape 10"/>
           <p:cNvSpPr/>
           <p:nvPr/>
         </p:nvSpPr>
@@ -10477,7 +10506,7 @@
       </p:sp>
       <p:sp>
         <p:nvSpPr>
-          <p:cNvPr id="18" name="Text 10"/>
+          <p:cNvPr id="19" name="Text 11"/>
           <p:cNvSpPr/>
           <p:nvPr/>
         </p:nvSpPr>
@@ -10491,6 +10520,13 @@
           </a:prstGeom>
           <a:noFill/>
           <a:ln/>
+          <a:effectLst>
+            <a:outerShdw sx="100000" sy="100000" kx="0" ky="0" algn="bl" rotWithShape="0" blurRad="76200" dist="50800" dir="16200000">
+              <a:srgbClr val="000000">
+                <a:alpha val="75000"/>
+              </a:srgbClr>
+            </a:outerShdw>
+          </a:effectLst>
         </p:spPr>
         <p:txBody>
           <a:bodyPr wrap="square" rtlCol="0" anchor="ctr"/>
@@ -10516,7 +10552,7 @@
       </p:sp>
       <p:sp>
         <p:nvSpPr>
-          <p:cNvPr id="19" name="Text 11"/>
+          <p:cNvPr id="20" name="Text 12"/>
           <p:cNvSpPr/>
           <p:nvPr/>
         </p:nvSpPr>
@@ -10530,6 +10566,13 @@
           </a:prstGeom>
           <a:noFill/>
           <a:ln/>
+          <a:effectLst>
+            <a:outerShdw sx="100000" sy="100000" kx="0" ky="0" algn="bl" rotWithShape="0" blurRad="63500" dist="50800" dir="16200000">
+              <a:srgbClr val="000000">
+                <a:alpha val="75000"/>
+              </a:srgbClr>
+            </a:outerShdw>
+          </a:effectLst>
         </p:spPr>
         <p:txBody>
           <a:bodyPr wrap="square" rtlCol="0" anchor="ctr"/>
@@ -10558,7 +10601,7 @@
       </p:sp>
       <p:pic>
         <p:nvPicPr>
-          <p:cNvPr id="20" name="Image 6" descr="preencoded.png">    </p:cNvPr>
+          <p:cNvPr id="21" name="Image 6" descr="preencoded.png">    </p:cNvPr>
           <p:cNvPicPr>
             <a:picLocks noChangeAspect="1"/>
           </p:cNvPicPr>
@@ -10588,7 +10631,7 @@
       </p:pic>
       <p:sp>
         <p:nvSpPr>
-          <p:cNvPr id="21" name="Shape 12"/>
+          <p:cNvPr id="22" name="Shape 13"/>
           <p:cNvSpPr/>
           <p:nvPr/>
         </p:nvSpPr>
@@ -10611,7 +10654,7 @@
       </p:sp>
       <p:sp>
         <p:nvSpPr>
-          <p:cNvPr id="22" name="Text 13"/>
+          <p:cNvPr id="23" name="Text 14"/>
           <p:cNvSpPr/>
           <p:nvPr/>
         </p:nvSpPr>
@@ -10625,6 +10668,13 @@
           </a:prstGeom>
           <a:noFill/>
           <a:ln/>
+          <a:effectLst>
+            <a:outerShdw sx="100000" sy="100000" kx="0" ky="0" algn="bl" rotWithShape="0" blurRad="76200" dist="50800" dir="16200000">
+              <a:srgbClr val="000000">
+                <a:alpha val="75000"/>
+              </a:srgbClr>
+            </a:outerShdw>
+          </a:effectLst>
         </p:spPr>
         <p:txBody>
           <a:bodyPr wrap="square" rtlCol="0" anchor="ctr"/>
@@ -10650,7 +10700,7 @@
       </p:sp>
       <p:sp>
         <p:nvSpPr>
-          <p:cNvPr id="23" name="Text 14"/>
+          <p:cNvPr id="24" name="Text 15"/>
           <p:cNvSpPr/>
           <p:nvPr/>
         </p:nvSpPr>
@@ -10664,6 +10714,13 @@
           </a:prstGeom>
           <a:noFill/>
           <a:ln/>
+          <a:effectLst>
+            <a:outerShdw sx="100000" sy="100000" kx="0" ky="0" algn="bl" rotWithShape="0" blurRad="63500" dist="50800" dir="16200000">
+              <a:srgbClr val="000000">
+                <a:alpha val="75000"/>
+              </a:srgbClr>
+            </a:outerShdw>
+          </a:effectLst>
         </p:spPr>
         <p:txBody>
           <a:bodyPr wrap="square" rtlCol="0" anchor="ctr"/>
@@ -10692,7 +10749,7 @@
       </p:sp>
       <p:pic>
         <p:nvPicPr>
-          <p:cNvPr id="24" name="Image 7" descr="preencoded.png">    </p:cNvPr>
+          <p:cNvPr id="25" name="Image 7" descr="preencoded.png">    </p:cNvPr>
           <p:cNvPicPr>
             <a:picLocks noChangeAspect="1"/>
           </p:cNvPicPr>
@@ -10722,7 +10779,7 @@
       </p:pic>
       <p:sp>
         <p:nvSpPr>
-          <p:cNvPr id="25" name="Shape 15"/>
+          <p:cNvPr id="26" name="Shape 16"/>
           <p:cNvSpPr/>
           <p:nvPr/>
         </p:nvSpPr>
@@ -10745,7 +10802,7 @@
       </p:sp>
       <p:sp>
         <p:nvSpPr>
-          <p:cNvPr id="26" name="Text 16"/>
+          <p:cNvPr id="27" name="Text 17"/>
           <p:cNvSpPr/>
           <p:nvPr/>
         </p:nvSpPr>
@@ -10759,6 +10816,13 @@
           </a:prstGeom>
           <a:noFill/>
           <a:ln/>
+          <a:effectLst>
+            <a:outerShdw sx="100000" sy="100000" kx="0" ky="0" algn="bl" rotWithShape="0" blurRad="76200" dist="50800" dir="16200000">
+              <a:srgbClr val="000000">
+                <a:alpha val="75000"/>
+              </a:srgbClr>
+            </a:outerShdw>
+          </a:effectLst>
         </p:spPr>
         <p:txBody>
           <a:bodyPr wrap="square" rtlCol="0" anchor="ctr"/>
@@ -10784,7 +10848,7 @@
       </p:sp>
       <p:sp>
         <p:nvSpPr>
-          <p:cNvPr id="27" name="Text 17"/>
+          <p:cNvPr id="28" name="Text 18"/>
           <p:cNvSpPr/>
           <p:nvPr/>
         </p:nvSpPr>
@@ -10798,6 +10862,13 @@
           </a:prstGeom>
           <a:noFill/>
           <a:ln/>
+          <a:effectLst>
+            <a:outerShdw sx="100000" sy="100000" kx="0" ky="0" algn="bl" rotWithShape="0" blurRad="63500" dist="50800" dir="16200000">
+              <a:srgbClr val="000000">
+                <a:alpha val="75000"/>
+              </a:srgbClr>
+            </a:outerShdw>
+          </a:effectLst>
         </p:spPr>
         <p:txBody>
           <a:bodyPr wrap="square" rtlCol="0" anchor="ctr"/>
@@ -10826,7 +10897,7 @@
       </p:sp>
       <p:pic>
         <p:nvPicPr>
-          <p:cNvPr id="28" name="Image 8" descr="preencoded.png">    </p:cNvPr>
+          <p:cNvPr id="29" name="Image 8" descr="preencoded.png">    </p:cNvPr>
           <p:cNvPicPr>
             <a:picLocks noChangeAspect="1"/>
           </p:cNvPicPr>
@@ -10856,7 +10927,7 @@
       </p:pic>
       <p:sp>
         <p:nvSpPr>
-          <p:cNvPr id="29" name="Shape 18"/>
+          <p:cNvPr id="30" name="Shape 19"/>
           <p:cNvSpPr/>
           <p:nvPr/>
         </p:nvSpPr>
@@ -10879,7 +10950,7 @@
       </p:sp>
       <p:sp>
         <p:nvSpPr>
-          <p:cNvPr id="30" name="Text 19"/>
+          <p:cNvPr id="31" name="Text 20"/>
           <p:cNvSpPr/>
           <p:nvPr/>
         </p:nvSpPr>
@@ -10893,6 +10964,13 @@
           </a:prstGeom>
           <a:noFill/>
           <a:ln/>
+          <a:effectLst>
+            <a:outerShdw sx="100000" sy="100000" kx="0" ky="0" algn="bl" rotWithShape="0" blurRad="76200" dist="50800" dir="16200000">
+              <a:srgbClr val="000000">
+                <a:alpha val="75000"/>
+              </a:srgbClr>
+            </a:outerShdw>
+          </a:effectLst>
         </p:spPr>
         <p:txBody>
           <a:bodyPr wrap="square" rtlCol="0" anchor="ctr"/>
@@ -10918,7 +10996,7 @@
       </p:sp>
       <p:sp>
         <p:nvSpPr>
-          <p:cNvPr id="31" name="Text 20"/>
+          <p:cNvPr id="32" name="Text 21"/>
           <p:cNvSpPr/>
           <p:nvPr/>
         </p:nvSpPr>
@@ -10932,6 +11010,13 @@
           </a:prstGeom>
           <a:noFill/>
           <a:ln/>
+          <a:effectLst>
+            <a:outerShdw sx="100000" sy="100000" kx="0" ky="0" algn="bl" rotWithShape="0" blurRad="63500" dist="50800" dir="16200000">
+              <a:srgbClr val="000000">
+                <a:alpha val="75000"/>
+              </a:srgbClr>
+            </a:outerShdw>
+          </a:effectLst>
         </p:spPr>
         <p:txBody>
           <a:bodyPr wrap="square" rtlCol="0" anchor="ctr"/>
@@ -10960,7 +11045,7 @@
       </p:sp>
       <p:pic>
         <p:nvPicPr>
-          <p:cNvPr id="32" name="Image 9" descr="preencoded.png">    </p:cNvPr>
+          <p:cNvPr id="33" name="Image 9" descr="preencoded.png">    </p:cNvPr>
           <p:cNvPicPr>
             <a:picLocks noChangeAspect="1"/>
           </p:cNvPicPr>
@@ -10990,7 +11075,7 @@
       </p:pic>
       <p:sp>
         <p:nvSpPr>
-          <p:cNvPr id="33" name="Shape 21"/>
+          <p:cNvPr id="34" name="Shape 22"/>
           <p:cNvSpPr/>
           <p:nvPr/>
         </p:nvSpPr>
@@ -11013,7 +11098,7 @@
       </p:sp>
       <p:sp>
         <p:nvSpPr>
-          <p:cNvPr id="34" name="Text 22"/>
+          <p:cNvPr id="35" name="Text 23"/>
           <p:cNvSpPr/>
           <p:nvPr/>
         </p:nvSpPr>
@@ -11027,6 +11112,13 @@
           </a:prstGeom>
           <a:noFill/>
           <a:ln/>
+          <a:effectLst>
+            <a:outerShdw sx="100000" sy="100000" kx="0" ky="0" algn="bl" rotWithShape="0" blurRad="76200" dist="50800" dir="16200000">
+              <a:srgbClr val="000000">
+                <a:alpha val="75000"/>
+              </a:srgbClr>
+            </a:outerShdw>
+          </a:effectLst>
         </p:spPr>
         <p:txBody>
           <a:bodyPr wrap="square" rtlCol="0" anchor="ctr"/>
@@ -11052,7 +11144,7 @@
       </p:sp>
       <p:sp>
         <p:nvSpPr>
-          <p:cNvPr id="35" name="Text 23"/>
+          <p:cNvPr id="36" name="Text 24"/>
           <p:cNvSpPr/>
           <p:nvPr/>
         </p:nvSpPr>
@@ -11066,6 +11158,13 @@
           </a:prstGeom>
           <a:noFill/>
           <a:ln/>
+          <a:effectLst>
+            <a:outerShdw sx="100000" sy="100000" kx="0" ky="0" algn="bl" rotWithShape="0" blurRad="63500" dist="50800" dir="16200000">
+              <a:srgbClr val="000000">
+                <a:alpha val="75000"/>
+              </a:srgbClr>
+            </a:outerShdw>
+          </a:effectLst>
         </p:spPr>
         <p:txBody>
           <a:bodyPr wrap="square" rtlCol="0" anchor="ctr"/>
@@ -11094,7 +11193,7 @@
       </p:sp>
       <p:pic>
         <p:nvPicPr>
-          <p:cNvPr id="36" name="Image 10" descr="preencoded.png">    </p:cNvPr>
+          <p:cNvPr id="37" name="Image 10" descr="preencoded.png">    </p:cNvPr>
           <p:cNvPicPr>
             <a:picLocks noChangeAspect="1"/>
           </p:cNvPicPr>
@@ -11124,7 +11223,7 @@
       </p:pic>
       <p:sp>
         <p:nvSpPr>
-          <p:cNvPr id="37" name="Shape 24"/>
+          <p:cNvPr id="38" name="Shape 25"/>
           <p:cNvSpPr/>
           <p:nvPr/>
         </p:nvSpPr>
@@ -11147,7 +11246,7 @@
       </p:sp>
       <p:sp>
         <p:nvSpPr>
-          <p:cNvPr id="38" name="Text 25"/>
+          <p:cNvPr id="39" name="Text 26"/>
           <p:cNvSpPr/>
           <p:nvPr/>
         </p:nvSpPr>
@@ -11161,6 +11260,13 @@
           </a:prstGeom>
           <a:noFill/>
           <a:ln/>
+          <a:effectLst>
+            <a:outerShdw sx="100000" sy="100000" kx="0" ky="0" algn="bl" rotWithShape="0" blurRad="76200" dist="50800" dir="16200000">
+              <a:srgbClr val="000000">
+                <a:alpha val="75000"/>
+              </a:srgbClr>
+            </a:outerShdw>
+          </a:effectLst>
         </p:spPr>
         <p:txBody>
           <a:bodyPr wrap="square" rtlCol="0" anchor="ctr"/>
@@ -11186,7 +11292,7 @@
       </p:sp>
       <p:sp>
         <p:nvSpPr>
-          <p:cNvPr id="39" name="Text 26"/>
+          <p:cNvPr id="40" name="Text 27"/>
           <p:cNvSpPr/>
           <p:nvPr/>
         </p:nvSpPr>
@@ -11200,6 +11306,13 @@
           </a:prstGeom>
           <a:noFill/>
           <a:ln/>
+          <a:effectLst>
+            <a:outerShdw sx="100000" sy="100000" kx="0" ky="0" algn="bl" rotWithShape="0" blurRad="63500" dist="50800" dir="16200000">
+              <a:srgbClr val="000000">
+                <a:alpha val="75000"/>
+              </a:srgbClr>
+            </a:outerShdw>
+          </a:effectLst>
         </p:spPr>
         <p:txBody>
           <a:bodyPr wrap="square" rtlCol="0" anchor="ctr"/>
@@ -11228,7 +11341,7 @@
       </p:sp>
       <p:pic>
         <p:nvPicPr>
-          <p:cNvPr id="40" name="Image 11" descr="preencoded.png">    </p:cNvPr>
+          <p:cNvPr id="41" name="Image 11" descr="preencoded.png">    </p:cNvPr>
           <p:cNvPicPr>
             <a:picLocks noChangeAspect="1"/>
           </p:cNvPicPr>
@@ -11258,7 +11371,7 @@
       </p:pic>
       <p:sp>
         <p:nvSpPr>
-          <p:cNvPr id="41" name="Text 27"/>
+          <p:cNvPr id="42" name="Text 28"/>
           <p:cNvSpPr/>
           <p:nvPr/>
         </p:nvSpPr>
@@ -11272,6 +11385,13 @@
           </a:prstGeom>
           <a:noFill/>
           <a:ln/>
+          <a:effectLst>
+            <a:outerShdw sx="100000" sy="100000" kx="0" ky="0" algn="bl" rotWithShape="0" blurRad="76200" dist="50800" dir="16200000">
+              <a:srgbClr val="000000">
+                <a:alpha val="75000"/>
+              </a:srgbClr>
+            </a:outerShdw>
+          </a:effectLst>
         </p:spPr>
         <p:txBody>
           <a:bodyPr wrap="square" rtlCol="0" anchor="ctr"/>
@@ -11297,7 +11417,7 @@
       </p:sp>
       <p:sp>
         <p:nvSpPr>
-          <p:cNvPr id="42" name="Text 28"/>
+          <p:cNvPr id="43" name="Text 29"/>
           <p:cNvSpPr/>
           <p:nvPr/>
         </p:nvSpPr>
@@ -11311,6 +11431,13 @@
           </a:prstGeom>
           <a:noFill/>
           <a:ln/>
+          <a:effectLst>
+            <a:outerShdw sx="100000" sy="100000" kx="0" ky="0" algn="bl" rotWithShape="0" blurRad="63500" dist="50800" dir="16200000">
+              <a:srgbClr val="000000">
+                <a:alpha val="75000"/>
+              </a:srgbClr>
+            </a:outerShdw>
+          </a:effectLst>
         </p:spPr>
         <p:txBody>
           <a:bodyPr wrap="square" rtlCol="0" anchor="ctr"/>
